--- a/docs/content/05-teaching-resources/slides/specialism/01-sdlc-and-requirements.pptx
+++ b/docs/content/05-teaching-resources/slides/specialism/01-sdlc-and-requirements.pptx
@@ -15,6 +15,12 @@
     <p:sldId id="263" r:id="rId15"/>
     <p:sldId id="264" r:id="rId16"/>
     <p:sldId id="265" r:id="rId17"/>
+    <p:sldId id="266" r:id="rId18"/>
+    <p:sldId id="267" r:id="rId19"/>
+    <p:sldId id="268" r:id="rId20"/>
+    <p:sldId id="269" r:id="rId21"/>
+    <p:sldId id="270" r:id="rId22"/>
+    <p:sldId id="271" r:id="rId23"/>
   </p:sldIdLst>
   <p:sldSz cx="12191695" cy="6858000" type="screen4x3"/>
   <p:notesSz cx="6858000" cy="9144000"/>
@@ -511,7 +517,22 @@
           <a:lstStyle/>
           <a:p>
             <a:r>
-              <a:t>Secure by design: security shapes both kinds of requirement from the start. Spike testing is early experimentation to work out the scope of a problem.</a:t>
+              <a:t>Answers:</a:t>
+            </a:r>
+          </a:p>
+          <a:p>
+            <a:r>
+              <a:t>1. User analysis.</a:t>
+            </a:r>
+          </a:p>
+          <a:p>
+            <a:r>
+              <a:t>2. To make sure it really meets the requirements.</a:t>
+            </a:r>
+          </a:p>
+          <a:p>
+            <a:r>
+              <a:t>3. Support, bug fixes, training and updates.</a:t>
             </a:r>
           </a:p>
         </p:txBody>
@@ -581,7 +602,7 @@
           <a:lstStyle/>
           <a:p>
             <a:r>
-              <a:t>Give students a few minutes to answer on mini whiteboards or paper, then reveal the answers on the next slide.</a:t>
+              <a:t>Secure by design: security shapes both kinds of requirement from the start. Spike testing is early experimentation to work out the scope of a problem.</a:t>
             </a:r>
           </a:p>
         </p:txBody>
@@ -651,7 +672,22 @@
           <a:lstStyle/>
           <a:p>
             <a:r>
-              <a:t>Talk through any answers the class found difficult.</a:t>
+              <a:t>Answers:</a:t>
+            </a:r>
+          </a:p>
+          <a:p>
+            <a:r>
+              <a:t>1. Non-functional.</a:t>
+            </a:r>
+          </a:p>
+          <a:p>
+            <a:r>
+              <a:t>2. Building security in from the start.</a:t>
+            </a:r>
+          </a:p>
+          <a:p>
+            <a:r>
+              <a:t>3. An early experiment to explore a problem and its scope.</a:t>
             </a:r>
           </a:p>
         </p:txBody>
@@ -677,6 +713,231 @@
 </file>
 
 <file path=ppt/notesSlides/notesSlide4.xml><?xml version="1.0" encoding="utf-8"?>
+<p:notes xmlns:a="http://schemas.openxmlformats.org/drawingml/2006/main" xmlns:p="http://schemas.openxmlformats.org/presentationml/2006/main" xmlns:r="http://schemas.openxmlformats.org/officeDocument/2006/relationships">
+  <p:cSld>
+    <p:spTree>
+      <p:nvGrpSpPr>
+        <p:cNvPr id="1" name=""/>
+        <p:cNvGrpSpPr/>
+        <p:nvPr/>
+      </p:nvGrpSpPr>
+      <p:grpSpPr>
+        <a:xfrm>
+          <a:off x="0" y="0"/>
+          <a:ext cx="0" cy="0"/>
+          <a:chOff x="0" y="0"/>
+          <a:chExt cx="0" cy="0"/>
+        </a:xfrm>
+      </p:grpSpPr>
+      <p:sp>
+        <p:nvSpPr>
+          <p:cNvPr id="2" name="Slide Image Placeholder 1"/>
+          <p:cNvSpPr>
+            <a:spLocks noGrp="1"/>
+          </p:cNvSpPr>
+          <p:nvPr>
+            <p:ph type="sldImg" idx="2"/>
+          </p:nvPr>
+        </p:nvSpPr>
+        <p:spPr/>
+      </p:sp>
+      <p:sp>
+        <p:nvSpPr>
+          <p:cNvPr id="3" name="Notes Placeholder 2"/>
+          <p:cNvSpPr>
+            <a:spLocks noGrp="1"/>
+          </p:cNvSpPr>
+          <p:nvPr>
+            <p:ph type="body" idx="3" sz="quarter"/>
+          </p:nvPr>
+        </p:nvSpPr>
+        <p:spPr/>
+        <p:txBody>
+          <a:bodyPr/>
+          <a:lstStyle/>
+          <a:p>
+            <a:r>
+              <a:t>Answers:</a:t>
+            </a:r>
+          </a:p>
+          <a:p>
+            <a:r>
+              <a:t>1. As a [user], I want [goal], so that [reason].</a:t>
+            </a:r>
+          </a:p>
+          <a:p>
+            <a:r>
+              <a:t>2. The data stored and how it links.</a:t>
+            </a:r>
+          </a:p>
+          <a:p>
+            <a:r>
+              <a:t>3. A plan of which features arrive in which release.</a:t>
+            </a:r>
+          </a:p>
+        </p:txBody>
+      </p:sp>
+      <p:sp>
+        <p:nvSpPr>
+          <p:cNvPr id="4" name="Slide Number Placeholder 3"/>
+          <p:cNvSpPr>
+            <a:spLocks noGrp="1"/>
+          </p:cNvSpPr>
+          <p:nvPr>
+            <p:ph type="sldNum" idx="5" sz="quarter"/>
+          </p:nvPr>
+        </p:nvSpPr>
+        <p:spPr/>
+      </p:sp>
+    </p:spTree>
+  </p:cSld>
+  <p:clrMapOvr>
+    <a:masterClrMapping/>
+  </p:clrMapOvr>
+</p:notes>
+</file>
+
+<file path=ppt/notesSlides/notesSlide5.xml><?xml version="1.0" encoding="utf-8"?>
+<p:notes xmlns:a="http://schemas.openxmlformats.org/drawingml/2006/main" xmlns:p="http://schemas.openxmlformats.org/presentationml/2006/main" xmlns:r="http://schemas.openxmlformats.org/officeDocument/2006/relationships">
+  <p:cSld>
+    <p:spTree>
+      <p:nvGrpSpPr>
+        <p:cNvPr id="1" name=""/>
+        <p:cNvGrpSpPr/>
+        <p:nvPr/>
+      </p:nvGrpSpPr>
+      <p:grpSpPr>
+        <a:xfrm>
+          <a:off x="0" y="0"/>
+          <a:ext cx="0" cy="0"/>
+          <a:chOff x="0" y="0"/>
+          <a:chExt cx="0" cy="0"/>
+        </a:xfrm>
+      </p:grpSpPr>
+      <p:sp>
+        <p:nvSpPr>
+          <p:cNvPr id="2" name="Slide Image Placeholder 1"/>
+          <p:cNvSpPr>
+            <a:spLocks noGrp="1"/>
+          </p:cNvSpPr>
+          <p:nvPr>
+            <p:ph type="sldImg" idx="2"/>
+          </p:nvPr>
+        </p:nvSpPr>
+        <p:spPr/>
+      </p:sp>
+      <p:sp>
+        <p:nvSpPr>
+          <p:cNvPr id="3" name="Notes Placeholder 2"/>
+          <p:cNvSpPr>
+            <a:spLocks noGrp="1"/>
+          </p:cNvSpPr>
+          <p:nvPr>
+            <p:ph type="body" idx="3" sz="quarter"/>
+          </p:nvPr>
+        </p:nvSpPr>
+        <p:spPr/>
+        <p:txBody>
+          <a:bodyPr/>
+          <a:lstStyle/>
+          <a:p>
+            <a:r>
+              <a:t>Give students a few minutes to answer on mini whiteboards or paper, then reveal the answers on the next slide.</a:t>
+            </a:r>
+          </a:p>
+        </p:txBody>
+      </p:sp>
+      <p:sp>
+        <p:nvSpPr>
+          <p:cNvPr id="4" name="Slide Number Placeholder 3"/>
+          <p:cNvSpPr>
+            <a:spLocks noGrp="1"/>
+          </p:cNvSpPr>
+          <p:nvPr>
+            <p:ph type="sldNum" idx="5" sz="quarter"/>
+          </p:nvPr>
+        </p:nvSpPr>
+        <p:spPr/>
+      </p:sp>
+    </p:spTree>
+  </p:cSld>
+  <p:clrMapOvr>
+    <a:masterClrMapping/>
+  </p:clrMapOvr>
+</p:notes>
+</file>
+
+<file path=ppt/notesSlides/notesSlide6.xml><?xml version="1.0" encoding="utf-8"?>
+<p:notes xmlns:a="http://schemas.openxmlformats.org/drawingml/2006/main" xmlns:p="http://schemas.openxmlformats.org/presentationml/2006/main" xmlns:r="http://schemas.openxmlformats.org/officeDocument/2006/relationships">
+  <p:cSld>
+    <p:spTree>
+      <p:nvGrpSpPr>
+        <p:cNvPr id="1" name=""/>
+        <p:cNvGrpSpPr/>
+        <p:nvPr/>
+      </p:nvGrpSpPr>
+      <p:grpSpPr>
+        <a:xfrm>
+          <a:off x="0" y="0"/>
+          <a:ext cx="0" cy="0"/>
+          <a:chOff x="0" y="0"/>
+          <a:chExt cx="0" cy="0"/>
+        </a:xfrm>
+      </p:grpSpPr>
+      <p:sp>
+        <p:nvSpPr>
+          <p:cNvPr id="2" name="Slide Image Placeholder 1"/>
+          <p:cNvSpPr>
+            <a:spLocks noGrp="1"/>
+          </p:cNvSpPr>
+          <p:nvPr>
+            <p:ph type="sldImg" idx="2"/>
+          </p:nvPr>
+        </p:nvSpPr>
+        <p:spPr/>
+      </p:sp>
+      <p:sp>
+        <p:nvSpPr>
+          <p:cNvPr id="3" name="Notes Placeholder 2"/>
+          <p:cNvSpPr>
+            <a:spLocks noGrp="1"/>
+          </p:cNvSpPr>
+          <p:nvPr>
+            <p:ph type="body" idx="3" sz="quarter"/>
+          </p:nvPr>
+        </p:nvSpPr>
+        <p:spPr/>
+        <p:txBody>
+          <a:bodyPr/>
+          <a:lstStyle/>
+          <a:p>
+            <a:r>
+              <a:t>Talk through any answers the class found difficult.</a:t>
+            </a:r>
+          </a:p>
+        </p:txBody>
+      </p:sp>
+      <p:sp>
+        <p:nvSpPr>
+          <p:cNvPr id="4" name="Slide Number Placeholder 3"/>
+          <p:cNvSpPr>
+            <a:spLocks noGrp="1"/>
+          </p:cNvSpPr>
+          <p:nvPr>
+            <p:ph type="sldNum" idx="5" sz="quarter"/>
+          </p:nvPr>
+        </p:nvSpPr>
+        <p:spPr/>
+      </p:sp>
+    </p:spTree>
+  </p:cSld>
+  <p:clrMapOvr>
+    <a:masterClrMapping/>
+  </p:clrMapOvr>
+</p:notes>
+</file>
+
+<file path=ppt/notesSlides/notesSlide7.xml><?xml version="1.0" encoding="utf-8"?>
 <p:notes xmlns:a="http://schemas.openxmlformats.org/drawingml/2006/main" xmlns:p="http://schemas.openxmlformats.org/presentationml/2006/main" xmlns:r="http://schemas.openxmlformats.org/officeDocument/2006/relationships">
   <p:cSld>
     <p:spTree>
@@ -4052,6 +4313,3663 @@
     <p:bg>
       <p:bgPr>
         <a:solidFill>
+          <a:srgbClr val="FFFFFF"/>
+        </a:solidFill>
+        <a:effectLst/>
+      </p:bgPr>
+    </p:bg>
+    <p:spTree>
+      <p:nvGrpSpPr>
+        <p:cNvPr id="1" name=""/>
+        <p:cNvGrpSpPr/>
+        <p:nvPr/>
+      </p:nvGrpSpPr>
+      <p:grpSpPr/>
+      <p:sp>
+        <p:nvSpPr>
+          <p:cNvPr id="2" name="TextBox 1"/>
+          <p:cNvSpPr txBox="1"/>
+          <p:nvPr/>
+        </p:nvSpPr>
+        <p:spPr>
+          <a:xfrm>
+            <a:off x="548640" y="320040"/>
+            <a:ext cx="11094415" cy="274320"/>
+          </a:xfrm>
+          <a:prstGeom prst="rect">
+            <a:avLst/>
+          </a:prstGeom>
+          <a:noFill/>
+        </p:spPr>
+        <p:txBody>
+          <a:bodyPr wrap="square" anchor="t" lIns="0" rIns="0" tIns="0" bIns="0"/>
+          <a:lstStyle/>
+          <a:p>
+            <a:pPr algn="l"/>
+            <a:r>
+              <a:rPr sz="1100" b="1" i="0">
+                <a:solidFill>
+                  <a:srgbClr val="54595D"/>
+                </a:solidFill>
+                <a:latin typeface="Calibri"/>
+              </a:rPr>
+              <a:t>OCCUPATIONAL SPECIALISM  ·  Specialism Content Area 1</a:t>
+            </a:r>
+          </a:p>
+        </p:txBody>
+      </p:sp>
+      <p:sp>
+        <p:nvSpPr>
+          <p:cNvPr id="3" name="TextBox 2"/>
+          <p:cNvSpPr txBox="1"/>
+          <p:nvPr/>
+        </p:nvSpPr>
+        <p:spPr>
+          <a:xfrm>
+            <a:off x="548640" y="566928"/>
+            <a:ext cx="11094415" cy="822960"/>
+          </a:xfrm>
+          <a:prstGeom prst="rect">
+            <a:avLst/>
+          </a:prstGeom>
+          <a:noFill/>
+        </p:spPr>
+        <p:txBody>
+          <a:bodyPr wrap="square" anchor="ctr" lIns="0" rIns="0" tIns="0" bIns="0"/>
+          <a:lstStyle/>
+          <a:p>
+            <a:pPr algn="l"/>
+            <a:r>
+              <a:rPr sz="3200" b="1" i="0">
+                <a:solidFill>
+                  <a:srgbClr val="03306E"/>
+                </a:solidFill>
+                <a:latin typeface="Cambria"/>
+              </a:rPr>
+              <a:t>User analysis tools</a:t>
+            </a:r>
+          </a:p>
+        </p:txBody>
+      </p:sp>
+      <p:sp>
+        <p:nvSpPr>
+          <p:cNvPr id="4" name="TextBox 3"/>
+          <p:cNvSpPr txBox="1"/>
+          <p:nvPr/>
+        </p:nvSpPr>
+        <p:spPr>
+          <a:xfrm>
+            <a:off x="548640" y="6446520"/>
+            <a:ext cx="8229600" cy="274320"/>
+          </a:xfrm>
+          <a:prstGeom prst="rect">
+            <a:avLst/>
+          </a:prstGeom>
+          <a:noFill/>
+        </p:spPr>
+        <p:txBody>
+          <a:bodyPr wrap="square" anchor="t" lIns="0" rIns="0" tIns="0" bIns="0"/>
+          <a:lstStyle/>
+          <a:p>
+            <a:pPr algn="l"/>
+            <a:r>
+              <a:rPr sz="1000" b="0" i="0">
+                <a:solidFill>
+                  <a:srgbClr val="54595D"/>
+                </a:solidFill>
+                <a:latin typeface="Calibri"/>
+              </a:rPr>
+              <a:t>Digital Software Development T Level  ·  The Software Development Lifecycle and Requirements</a:t>
+            </a:r>
+          </a:p>
+        </p:txBody>
+      </p:sp>
+      <p:sp>
+        <p:nvSpPr>
+          <p:cNvPr id="5" name="TextBox 4"/>
+          <p:cNvSpPr txBox="1"/>
+          <p:nvPr/>
+        </p:nvSpPr>
+        <p:spPr>
+          <a:xfrm>
+            <a:off x="10728655" y="6446520"/>
+            <a:ext cx="914400" cy="274320"/>
+          </a:xfrm>
+          <a:prstGeom prst="rect">
+            <a:avLst/>
+          </a:prstGeom>
+          <a:noFill/>
+        </p:spPr>
+        <p:txBody>
+          <a:bodyPr wrap="square" anchor="t" lIns="0" rIns="0" tIns="0" bIns="0"/>
+          <a:lstStyle/>
+          <a:p>
+            <a:pPr algn="r"/>
+            <a:r>
+              <a:rPr sz="1000" b="0" i="0">
+                <a:solidFill>
+                  <a:srgbClr val="54595D"/>
+                </a:solidFill>
+                <a:latin typeface="Calibri"/>
+              </a:rPr>
+              <a:t>10</a:t>
+            </a:r>
+          </a:p>
+        </p:txBody>
+      </p:sp>
+      <p:sp>
+        <p:nvSpPr>
+          <p:cNvPr id="6" name="TextBox 5"/>
+          <p:cNvSpPr txBox="1"/>
+          <p:nvPr/>
+        </p:nvSpPr>
+        <p:spPr>
+          <a:xfrm>
+            <a:off x="548640" y="1554480"/>
+            <a:ext cx="6720840" cy="4617720"/>
+          </a:xfrm>
+          <a:prstGeom prst="rect">
+            <a:avLst/>
+          </a:prstGeom>
+          <a:noFill/>
+        </p:spPr>
+        <p:txBody>
+          <a:bodyPr wrap="square" lIns="0" rIns="0" tIns="0" bIns="0">
+            <a:spAutoFit/>
+          </a:bodyPr>
+          <a:lstStyle/>
+          <a:p>
+            <a:pPr>
+              <a:spcAft>
+                <a:spcPts val="1320"/>
+              </a:spcAft>
+            </a:pPr>
+            <a:r>
+              <a:rPr sz="2200" b="0">
+                <a:solidFill>
+                  <a:srgbClr val="202122"/>
+                </a:solidFill>
+                <a:latin typeface="Calibri"/>
+              </a:rPr>
+              <a:t>User analysis makes sure you build what users actually need.</a:t>
+            </a:r>
+          </a:p>
+          <a:p>
+            <a:pPr>
+              <a:spcAft>
+                <a:spcPts val="1320"/>
+              </a:spcAft>
+            </a:pPr>
+            <a:r>
+              <a:rPr sz="2200" b="0">
+                <a:solidFill>
+                  <a:srgbClr val="202122"/>
+                </a:solidFill>
+                <a:latin typeface="Calibri"/>
+              </a:rPr>
+              <a:t>User stories describe a need from the user's view: 'As a [user], I want [goal], so that [reason]'.</a:t>
+            </a:r>
+          </a:p>
+          <a:p>
+            <a:pPr>
+              <a:spcAft>
+                <a:spcPts val="1320"/>
+              </a:spcAft>
+            </a:pPr>
+            <a:r>
+              <a:rPr sz="2200" b="0">
+                <a:solidFill>
+                  <a:srgbClr val="202122"/>
+                </a:solidFill>
+                <a:latin typeface="Calibri"/>
+              </a:rPr>
+              <a:t>Activity and process diagrams show the steps a user or system goes through. Mind maps explore ideas. Product road maps plan which features arrive in which release. Entity relationship diagrams (ERDs) show the data the system stores and how it links.</a:t>
+            </a:r>
+          </a:p>
+        </p:txBody>
+      </p:sp>
+      <p:sp>
+        <p:nvSpPr>
+          <p:cNvPr id="7" name="Rounded Rectangle 6"/>
+          <p:cNvSpPr/>
+          <p:nvPr/>
+        </p:nvSpPr>
+        <p:spPr>
+          <a:xfrm>
+            <a:off x="7772400" y="1554480"/>
+            <a:ext cx="3867912" cy="4526280"/>
+          </a:xfrm>
+          <a:prstGeom prst="roundRect">
+            <a:avLst>
+              <a:gd name="adj" fmla="val 8000"/>
+            </a:avLst>
+          </a:prstGeom>
+          <a:solidFill>
+            <a:srgbClr val="03306E"/>
+          </a:solidFill>
+          <a:ln>
+            <a:noFill/>
+          </a:ln>
+          <a:effectLst/>
+        </p:spPr>
+        <p:style>
+          <a:lnRef idx="1">
+            <a:schemeClr val="accent1"/>
+          </a:lnRef>
+          <a:fillRef idx="3">
+            <a:schemeClr val="accent1"/>
+          </a:fillRef>
+          <a:effectRef idx="2">
+            <a:schemeClr val="accent1"/>
+          </a:effectRef>
+          <a:fontRef idx="minor">
+            <a:schemeClr val="lt1"/>
+          </a:fontRef>
+        </p:style>
+        <p:txBody>
+          <a:bodyPr rtlCol="0" anchor="ctr"/>
+          <a:lstStyle/>
+          <a:p/>
+        </p:txBody>
+      </p:sp>
+      <p:sp>
+        <p:nvSpPr>
+          <p:cNvPr id="8" name="Oval 7"/>
+          <p:cNvSpPr/>
+          <p:nvPr/>
+        </p:nvSpPr>
+        <p:spPr>
+          <a:xfrm>
+            <a:off x="8046720" y="1828800"/>
+            <a:ext cx="548640" cy="548640"/>
+          </a:xfrm>
+          <a:prstGeom prst="ellipse">
+            <a:avLst/>
+          </a:prstGeom>
+          <a:solidFill>
+            <a:srgbClr val="33C17A"/>
+          </a:solidFill>
+          <a:ln>
+            <a:noFill/>
+          </a:ln>
+          <a:effectLst/>
+        </p:spPr>
+        <p:style>
+          <a:lnRef idx="1">
+            <a:schemeClr val="accent1"/>
+          </a:lnRef>
+          <a:fillRef idx="3">
+            <a:schemeClr val="accent1"/>
+          </a:fillRef>
+          <a:effectRef idx="2">
+            <a:schemeClr val="accent1"/>
+          </a:effectRef>
+          <a:fontRef idx="minor">
+            <a:schemeClr val="lt1"/>
+          </a:fontRef>
+        </p:style>
+        <p:txBody>
+          <a:bodyPr rtlCol="0" anchor="ctr" lIns="0" rIns="0" tIns="0" bIns="0"/>
+          <a:lstStyle/>
+          <a:p>
+            <a:pPr algn="ctr"/>
+            <a:r>
+              <a:rPr sz="1300" b="1">
+                <a:solidFill>
+                  <a:srgbClr val="202122"/>
+                </a:solidFill>
+                <a:latin typeface="Calibri"/>
+              </a:rPr>
+              <a:t>e.g.</a:t>
+            </a:r>
+          </a:p>
+        </p:txBody>
+      </p:sp>
+      <p:sp>
+        <p:nvSpPr>
+          <p:cNvPr id="9" name="TextBox 8"/>
+          <p:cNvSpPr txBox="1"/>
+          <p:nvPr/>
+        </p:nvSpPr>
+        <p:spPr>
+          <a:xfrm>
+            <a:off x="8046720" y="2560320"/>
+            <a:ext cx="3291840" cy="365760"/>
+          </a:xfrm>
+          <a:prstGeom prst="rect">
+            <a:avLst/>
+          </a:prstGeom>
+          <a:noFill/>
+        </p:spPr>
+        <p:txBody>
+          <a:bodyPr wrap="square" anchor="t" lIns="0" rIns="0" tIns="0" bIns="0"/>
+          <a:lstStyle/>
+          <a:p>
+            <a:pPr algn="l"/>
+            <a:r>
+              <a:rPr sz="1300" b="1" i="0">
+                <a:solidFill>
+                  <a:srgbClr val="A9C8F0"/>
+                </a:solidFill>
+                <a:latin typeface="Calibri"/>
+              </a:rPr>
+              <a:t>EXAMPLE</a:t>
+            </a:r>
+          </a:p>
+        </p:txBody>
+      </p:sp>
+      <p:sp>
+        <p:nvSpPr>
+          <p:cNvPr id="10" name="TextBox 9"/>
+          <p:cNvSpPr txBox="1"/>
+          <p:nvPr/>
+        </p:nvSpPr>
+        <p:spPr>
+          <a:xfrm>
+            <a:off x="8046720" y="2971800"/>
+            <a:ext cx="3291840" cy="2971800"/>
+          </a:xfrm>
+          <a:prstGeom prst="rect">
+            <a:avLst/>
+          </a:prstGeom>
+          <a:noFill/>
+        </p:spPr>
+        <p:txBody>
+          <a:bodyPr wrap="square" anchor="t" lIns="0" rIns="0" tIns="0" bIns="0"/>
+          <a:lstStyle/>
+          <a:p>
+            <a:pPr algn="l"/>
+            <a:r>
+              <a:rPr sz="1900" b="0" i="0">
+                <a:solidFill>
+                  <a:srgbClr val="FFFFFF"/>
+                </a:solidFill>
+                <a:latin typeface="Cambria"/>
+              </a:rPr>
+              <a:t>'As a busy parent, I want to reorder my usual items in one tap, so that ordering takes seconds.'</a:t>
+            </a:r>
+          </a:p>
+        </p:txBody>
+      </p:sp>
+    </p:spTree>
+  </p:cSld>
+  <p:clrMapOvr>
+    <a:masterClrMapping/>
+  </p:clrMapOvr>
+</p:sld>
+</file>
+
+<file path=ppt/slides/slide11.xml><?xml version="1.0" encoding="utf-8"?>
+<p:sld xmlns:a="http://schemas.openxmlformats.org/drawingml/2006/main" xmlns:p="http://schemas.openxmlformats.org/presentationml/2006/main" xmlns:r="http://schemas.openxmlformats.org/officeDocument/2006/relationships">
+  <p:cSld>
+    <p:bg>
+      <p:bgPr>
+        <a:solidFill>
+          <a:srgbClr val="FFFFFF"/>
+        </a:solidFill>
+        <a:effectLst/>
+      </p:bgPr>
+    </p:bg>
+    <p:spTree>
+      <p:nvGrpSpPr>
+        <p:cNvPr id="1" name=""/>
+        <p:cNvGrpSpPr/>
+        <p:nvPr/>
+      </p:nvGrpSpPr>
+      <p:grpSpPr/>
+      <p:sp>
+        <p:nvSpPr>
+          <p:cNvPr id="2" name="TextBox 1"/>
+          <p:cNvSpPr txBox="1"/>
+          <p:nvPr/>
+        </p:nvSpPr>
+        <p:spPr>
+          <a:xfrm>
+            <a:off x="548640" y="320040"/>
+            <a:ext cx="11094415" cy="274320"/>
+          </a:xfrm>
+          <a:prstGeom prst="rect">
+            <a:avLst/>
+          </a:prstGeom>
+          <a:noFill/>
+        </p:spPr>
+        <p:txBody>
+          <a:bodyPr wrap="square" anchor="t" lIns="0" rIns="0" tIns="0" bIns="0"/>
+          <a:lstStyle/>
+          <a:p>
+            <a:pPr algn="l"/>
+            <a:r>
+              <a:rPr sz="1100" b="1" i="0">
+                <a:solidFill>
+                  <a:srgbClr val="54595D"/>
+                </a:solidFill>
+                <a:latin typeface="Calibri"/>
+              </a:rPr>
+              <a:t>OCCUPATIONAL SPECIALISM  ·  Specialism Content Area 1</a:t>
+            </a:r>
+          </a:p>
+        </p:txBody>
+      </p:sp>
+      <p:sp>
+        <p:nvSpPr>
+          <p:cNvPr id="3" name="TextBox 2"/>
+          <p:cNvSpPr txBox="1"/>
+          <p:nvPr/>
+        </p:nvSpPr>
+        <p:spPr>
+          <a:xfrm>
+            <a:off x="548640" y="566928"/>
+            <a:ext cx="11094415" cy="822960"/>
+          </a:xfrm>
+          <a:prstGeom prst="rect">
+            <a:avLst/>
+          </a:prstGeom>
+          <a:noFill/>
+        </p:spPr>
+        <p:txBody>
+          <a:bodyPr wrap="square" anchor="ctr" lIns="0" rIns="0" tIns="0" bIns="0"/>
+          <a:lstStyle/>
+          <a:p>
+            <a:pPr algn="l"/>
+            <a:r>
+              <a:rPr sz="3200" b="1" i="0">
+                <a:solidFill>
+                  <a:srgbClr val="03306E"/>
+                </a:solidFill>
+                <a:latin typeface="Cambria"/>
+              </a:rPr>
+              <a:t>User analysis tools</a:t>
+            </a:r>
+          </a:p>
+        </p:txBody>
+      </p:sp>
+      <p:sp>
+        <p:nvSpPr>
+          <p:cNvPr id="4" name="TextBox 3"/>
+          <p:cNvSpPr txBox="1"/>
+          <p:nvPr/>
+        </p:nvSpPr>
+        <p:spPr>
+          <a:xfrm>
+            <a:off x="548640" y="6446520"/>
+            <a:ext cx="8229600" cy="274320"/>
+          </a:xfrm>
+          <a:prstGeom prst="rect">
+            <a:avLst/>
+          </a:prstGeom>
+          <a:noFill/>
+        </p:spPr>
+        <p:txBody>
+          <a:bodyPr wrap="square" anchor="t" lIns="0" rIns="0" tIns="0" bIns="0"/>
+          <a:lstStyle/>
+          <a:p>
+            <a:pPr algn="l"/>
+            <a:r>
+              <a:rPr sz="1000" b="0" i="0">
+                <a:solidFill>
+                  <a:srgbClr val="54595D"/>
+                </a:solidFill>
+                <a:latin typeface="Calibri"/>
+              </a:rPr>
+              <a:t>Digital Software Development T Level  ·  The Software Development Lifecycle and Requirements</a:t>
+            </a:r>
+          </a:p>
+        </p:txBody>
+      </p:sp>
+      <p:sp>
+        <p:nvSpPr>
+          <p:cNvPr id="5" name="TextBox 4"/>
+          <p:cNvSpPr txBox="1"/>
+          <p:nvPr/>
+        </p:nvSpPr>
+        <p:spPr>
+          <a:xfrm>
+            <a:off x="10728655" y="6446520"/>
+            <a:ext cx="914400" cy="274320"/>
+          </a:xfrm>
+          <a:prstGeom prst="rect">
+            <a:avLst/>
+          </a:prstGeom>
+          <a:noFill/>
+        </p:spPr>
+        <p:txBody>
+          <a:bodyPr wrap="square" anchor="t" lIns="0" rIns="0" tIns="0" bIns="0"/>
+          <a:lstStyle/>
+          <a:p>
+            <a:pPr algn="r"/>
+            <a:r>
+              <a:rPr sz="1000" b="0" i="0">
+                <a:solidFill>
+                  <a:srgbClr val="54595D"/>
+                </a:solidFill>
+                <a:latin typeface="Calibri"/>
+              </a:rPr>
+              <a:t>11</a:t>
+            </a:r>
+          </a:p>
+        </p:txBody>
+      </p:sp>
+      <p:sp>
+        <p:nvSpPr>
+          <p:cNvPr id="6" name="Rounded Rectangle 5"/>
+          <p:cNvSpPr/>
+          <p:nvPr/>
+        </p:nvSpPr>
+        <p:spPr>
+          <a:xfrm>
+            <a:off x="548640" y="1600200"/>
+            <a:ext cx="5410047" cy="2148840"/>
+          </a:xfrm>
+          <a:prstGeom prst="roundRect">
+            <a:avLst>
+              <a:gd name="adj" fmla="val 6000"/>
+            </a:avLst>
+          </a:prstGeom>
+          <a:solidFill>
+            <a:srgbClr val="EAF3FF"/>
+          </a:solidFill>
+          <a:ln>
+            <a:noFill/>
+          </a:ln>
+          <a:effectLst/>
+        </p:spPr>
+        <p:style>
+          <a:lnRef idx="1">
+            <a:schemeClr val="accent1"/>
+          </a:lnRef>
+          <a:fillRef idx="3">
+            <a:schemeClr val="accent1"/>
+          </a:fillRef>
+          <a:effectRef idx="2">
+            <a:schemeClr val="accent1"/>
+          </a:effectRef>
+          <a:fontRef idx="minor">
+            <a:schemeClr val="lt1"/>
+          </a:fontRef>
+        </p:style>
+        <p:txBody>
+          <a:bodyPr rtlCol="0" anchor="ctr"/>
+          <a:lstStyle/>
+          <a:p/>
+        </p:txBody>
+      </p:sp>
+      <p:sp>
+        <p:nvSpPr>
+          <p:cNvPr id="7" name="Oval 6"/>
+          <p:cNvSpPr/>
+          <p:nvPr/>
+        </p:nvSpPr>
+        <p:spPr>
+          <a:xfrm>
+            <a:off x="777240" y="1828800"/>
+            <a:ext cx="457200" cy="457200"/>
+          </a:xfrm>
+          <a:prstGeom prst="ellipse">
+            <a:avLst/>
+          </a:prstGeom>
+          <a:solidFill>
+            <a:srgbClr val="33C17A"/>
+          </a:solidFill>
+          <a:ln>
+            <a:noFill/>
+          </a:ln>
+          <a:effectLst/>
+        </p:spPr>
+        <p:style>
+          <a:lnRef idx="1">
+            <a:schemeClr val="accent1"/>
+          </a:lnRef>
+          <a:fillRef idx="3">
+            <a:schemeClr val="accent1"/>
+          </a:fillRef>
+          <a:effectRef idx="2">
+            <a:schemeClr val="accent1"/>
+          </a:effectRef>
+          <a:fontRef idx="minor">
+            <a:schemeClr val="lt1"/>
+          </a:fontRef>
+        </p:style>
+        <p:txBody>
+          <a:bodyPr rtlCol="0" anchor="ctr" lIns="0" rIns="0" tIns="0" bIns="0"/>
+          <a:lstStyle/>
+          <a:p>
+            <a:pPr algn="ctr"/>
+            <a:r>
+              <a:rPr sz="1500" b="1">
+                <a:solidFill>
+                  <a:srgbClr val="202122"/>
+                </a:solidFill>
+                <a:latin typeface="Calibri"/>
+              </a:rPr>
+              <a:t>1</a:t>
+            </a:r>
+          </a:p>
+        </p:txBody>
+      </p:sp>
+      <p:sp>
+        <p:nvSpPr>
+          <p:cNvPr id="8" name="TextBox 7"/>
+          <p:cNvSpPr txBox="1"/>
+          <p:nvPr/>
+        </p:nvSpPr>
+        <p:spPr>
+          <a:xfrm>
+            <a:off x="1371600" y="1801368"/>
+            <a:ext cx="4404207" cy="512064"/>
+          </a:xfrm>
+          <a:prstGeom prst="rect">
+            <a:avLst/>
+          </a:prstGeom>
+          <a:noFill/>
+        </p:spPr>
+        <p:txBody>
+          <a:bodyPr wrap="square" anchor="ctr" lIns="0" rIns="0" tIns="0" bIns="0"/>
+          <a:lstStyle/>
+          <a:p>
+            <a:pPr algn="l"/>
+            <a:r>
+              <a:rPr sz="1900" b="1" i="0">
+                <a:solidFill>
+                  <a:srgbClr val="03306E"/>
+                </a:solidFill>
+                <a:latin typeface="Calibri"/>
+              </a:rPr>
+              <a:t>User stories</a:t>
+            </a:r>
+          </a:p>
+        </p:txBody>
+      </p:sp>
+      <p:sp>
+        <p:nvSpPr>
+          <p:cNvPr id="9" name="TextBox 8"/>
+          <p:cNvSpPr txBox="1"/>
+          <p:nvPr/>
+        </p:nvSpPr>
+        <p:spPr>
+          <a:xfrm>
+            <a:off x="777240" y="2468880"/>
+            <a:ext cx="4952847" cy="1143000"/>
+          </a:xfrm>
+          <a:prstGeom prst="rect">
+            <a:avLst/>
+          </a:prstGeom>
+          <a:noFill/>
+        </p:spPr>
+        <p:txBody>
+          <a:bodyPr wrap="square" anchor="t" lIns="0" rIns="0" tIns="0" bIns="0"/>
+          <a:lstStyle/>
+          <a:p>
+            <a:pPr algn="l"/>
+            <a:r>
+              <a:rPr sz="2000" b="0" i="0">
+                <a:solidFill>
+                  <a:srgbClr val="202122"/>
+                </a:solidFill>
+                <a:latin typeface="Calibri"/>
+              </a:rPr>
+              <a:t>As a customer, I want to order ahead, so that I skip the queue.</a:t>
+            </a:r>
+          </a:p>
+        </p:txBody>
+      </p:sp>
+      <p:sp>
+        <p:nvSpPr>
+          <p:cNvPr id="10" name="Rounded Rectangle 9"/>
+          <p:cNvSpPr/>
+          <p:nvPr/>
+        </p:nvSpPr>
+        <p:spPr>
+          <a:xfrm>
+            <a:off x="6233007" y="1600200"/>
+            <a:ext cx="5410047" cy="2148840"/>
+          </a:xfrm>
+          <a:prstGeom prst="roundRect">
+            <a:avLst>
+              <a:gd name="adj" fmla="val 6000"/>
+            </a:avLst>
+          </a:prstGeom>
+          <a:solidFill>
+            <a:srgbClr val="EAF3FF"/>
+          </a:solidFill>
+          <a:ln>
+            <a:noFill/>
+          </a:ln>
+          <a:effectLst/>
+        </p:spPr>
+        <p:style>
+          <a:lnRef idx="1">
+            <a:schemeClr val="accent1"/>
+          </a:lnRef>
+          <a:fillRef idx="3">
+            <a:schemeClr val="accent1"/>
+          </a:fillRef>
+          <a:effectRef idx="2">
+            <a:schemeClr val="accent1"/>
+          </a:effectRef>
+          <a:fontRef idx="minor">
+            <a:schemeClr val="lt1"/>
+          </a:fontRef>
+        </p:style>
+        <p:txBody>
+          <a:bodyPr rtlCol="0" anchor="ctr"/>
+          <a:lstStyle/>
+          <a:p/>
+        </p:txBody>
+      </p:sp>
+      <p:sp>
+        <p:nvSpPr>
+          <p:cNvPr id="11" name="Oval 10"/>
+          <p:cNvSpPr/>
+          <p:nvPr/>
+        </p:nvSpPr>
+        <p:spPr>
+          <a:xfrm>
+            <a:off x="6461607" y="1828800"/>
+            <a:ext cx="457200" cy="457200"/>
+          </a:xfrm>
+          <a:prstGeom prst="ellipse">
+            <a:avLst/>
+          </a:prstGeom>
+          <a:solidFill>
+            <a:srgbClr val="33C17A"/>
+          </a:solidFill>
+          <a:ln>
+            <a:noFill/>
+          </a:ln>
+          <a:effectLst/>
+        </p:spPr>
+        <p:style>
+          <a:lnRef idx="1">
+            <a:schemeClr val="accent1"/>
+          </a:lnRef>
+          <a:fillRef idx="3">
+            <a:schemeClr val="accent1"/>
+          </a:fillRef>
+          <a:effectRef idx="2">
+            <a:schemeClr val="accent1"/>
+          </a:effectRef>
+          <a:fontRef idx="minor">
+            <a:schemeClr val="lt1"/>
+          </a:fontRef>
+        </p:style>
+        <p:txBody>
+          <a:bodyPr rtlCol="0" anchor="ctr" lIns="0" rIns="0" tIns="0" bIns="0"/>
+          <a:lstStyle/>
+          <a:p>
+            <a:pPr algn="ctr"/>
+            <a:r>
+              <a:rPr sz="1500" b="1">
+                <a:solidFill>
+                  <a:srgbClr val="202122"/>
+                </a:solidFill>
+                <a:latin typeface="Calibri"/>
+              </a:rPr>
+              <a:t>2</a:t>
+            </a:r>
+          </a:p>
+        </p:txBody>
+      </p:sp>
+      <p:sp>
+        <p:nvSpPr>
+          <p:cNvPr id="12" name="TextBox 11"/>
+          <p:cNvSpPr txBox="1"/>
+          <p:nvPr/>
+        </p:nvSpPr>
+        <p:spPr>
+          <a:xfrm>
+            <a:off x="7055967" y="1801368"/>
+            <a:ext cx="4404207" cy="512064"/>
+          </a:xfrm>
+          <a:prstGeom prst="rect">
+            <a:avLst/>
+          </a:prstGeom>
+          <a:noFill/>
+        </p:spPr>
+        <p:txBody>
+          <a:bodyPr wrap="square" anchor="ctr" lIns="0" rIns="0" tIns="0" bIns="0"/>
+          <a:lstStyle/>
+          <a:p>
+            <a:pPr algn="l"/>
+            <a:r>
+              <a:rPr sz="1900" b="1" i="0">
+                <a:solidFill>
+                  <a:srgbClr val="03306E"/>
+                </a:solidFill>
+                <a:latin typeface="Calibri"/>
+              </a:rPr>
+              <a:t>Activity and process diagrams</a:t>
+            </a:r>
+          </a:p>
+        </p:txBody>
+      </p:sp>
+      <p:sp>
+        <p:nvSpPr>
+          <p:cNvPr id="13" name="TextBox 12"/>
+          <p:cNvSpPr txBox="1"/>
+          <p:nvPr/>
+        </p:nvSpPr>
+        <p:spPr>
+          <a:xfrm>
+            <a:off x="6461607" y="2468880"/>
+            <a:ext cx="4952847" cy="1143000"/>
+          </a:xfrm>
+          <a:prstGeom prst="rect">
+            <a:avLst/>
+          </a:prstGeom>
+          <a:noFill/>
+        </p:spPr>
+        <p:txBody>
+          <a:bodyPr wrap="square" anchor="t" lIns="0" rIns="0" tIns="0" bIns="0"/>
+          <a:lstStyle/>
+          <a:p>
+            <a:pPr algn="l"/>
+            <a:r>
+              <a:rPr sz="2000" b="0" i="0">
+                <a:solidFill>
+                  <a:srgbClr val="202122"/>
+                </a:solidFill>
+                <a:latin typeface="Calibri"/>
+              </a:rPr>
+              <a:t>Show the steps a user or system goes through.</a:t>
+            </a:r>
+          </a:p>
+        </p:txBody>
+      </p:sp>
+      <p:sp>
+        <p:nvSpPr>
+          <p:cNvPr id="14" name="Rounded Rectangle 13"/>
+          <p:cNvSpPr/>
+          <p:nvPr/>
+        </p:nvSpPr>
+        <p:spPr>
+          <a:xfrm>
+            <a:off x="548640" y="4023360"/>
+            <a:ext cx="5410047" cy="2148840"/>
+          </a:xfrm>
+          <a:prstGeom prst="roundRect">
+            <a:avLst>
+              <a:gd name="adj" fmla="val 6000"/>
+            </a:avLst>
+          </a:prstGeom>
+          <a:solidFill>
+            <a:srgbClr val="EAF3FF"/>
+          </a:solidFill>
+          <a:ln>
+            <a:noFill/>
+          </a:ln>
+          <a:effectLst/>
+        </p:spPr>
+        <p:style>
+          <a:lnRef idx="1">
+            <a:schemeClr val="accent1"/>
+          </a:lnRef>
+          <a:fillRef idx="3">
+            <a:schemeClr val="accent1"/>
+          </a:fillRef>
+          <a:effectRef idx="2">
+            <a:schemeClr val="accent1"/>
+          </a:effectRef>
+          <a:fontRef idx="minor">
+            <a:schemeClr val="lt1"/>
+          </a:fontRef>
+        </p:style>
+        <p:txBody>
+          <a:bodyPr rtlCol="0" anchor="ctr"/>
+          <a:lstStyle/>
+          <a:p/>
+        </p:txBody>
+      </p:sp>
+      <p:sp>
+        <p:nvSpPr>
+          <p:cNvPr id="15" name="Oval 14"/>
+          <p:cNvSpPr/>
+          <p:nvPr/>
+        </p:nvSpPr>
+        <p:spPr>
+          <a:xfrm>
+            <a:off x="777240" y="4251960"/>
+            <a:ext cx="457200" cy="457200"/>
+          </a:xfrm>
+          <a:prstGeom prst="ellipse">
+            <a:avLst/>
+          </a:prstGeom>
+          <a:solidFill>
+            <a:srgbClr val="33C17A"/>
+          </a:solidFill>
+          <a:ln>
+            <a:noFill/>
+          </a:ln>
+          <a:effectLst/>
+        </p:spPr>
+        <p:style>
+          <a:lnRef idx="1">
+            <a:schemeClr val="accent1"/>
+          </a:lnRef>
+          <a:fillRef idx="3">
+            <a:schemeClr val="accent1"/>
+          </a:fillRef>
+          <a:effectRef idx="2">
+            <a:schemeClr val="accent1"/>
+          </a:effectRef>
+          <a:fontRef idx="minor">
+            <a:schemeClr val="lt1"/>
+          </a:fontRef>
+        </p:style>
+        <p:txBody>
+          <a:bodyPr rtlCol="0" anchor="ctr" lIns="0" rIns="0" tIns="0" bIns="0"/>
+          <a:lstStyle/>
+          <a:p>
+            <a:pPr algn="ctr"/>
+            <a:r>
+              <a:rPr sz="1500" b="1">
+                <a:solidFill>
+                  <a:srgbClr val="202122"/>
+                </a:solidFill>
+                <a:latin typeface="Calibri"/>
+              </a:rPr>
+              <a:t>3</a:t>
+            </a:r>
+          </a:p>
+        </p:txBody>
+      </p:sp>
+      <p:sp>
+        <p:nvSpPr>
+          <p:cNvPr id="16" name="TextBox 15"/>
+          <p:cNvSpPr txBox="1"/>
+          <p:nvPr/>
+        </p:nvSpPr>
+        <p:spPr>
+          <a:xfrm>
+            <a:off x="1371600" y="4224528"/>
+            <a:ext cx="4404207" cy="512064"/>
+          </a:xfrm>
+          <a:prstGeom prst="rect">
+            <a:avLst/>
+          </a:prstGeom>
+          <a:noFill/>
+        </p:spPr>
+        <p:txBody>
+          <a:bodyPr wrap="square" anchor="ctr" lIns="0" rIns="0" tIns="0" bIns="0"/>
+          <a:lstStyle/>
+          <a:p>
+            <a:pPr algn="l"/>
+            <a:r>
+              <a:rPr sz="1900" b="1" i="0">
+                <a:solidFill>
+                  <a:srgbClr val="03306E"/>
+                </a:solidFill>
+                <a:latin typeface="Calibri"/>
+              </a:rPr>
+              <a:t>Mind maps and road maps</a:t>
+            </a:r>
+          </a:p>
+        </p:txBody>
+      </p:sp>
+      <p:sp>
+        <p:nvSpPr>
+          <p:cNvPr id="17" name="TextBox 16"/>
+          <p:cNvSpPr txBox="1"/>
+          <p:nvPr/>
+        </p:nvSpPr>
+        <p:spPr>
+          <a:xfrm>
+            <a:off x="777240" y="4892040"/>
+            <a:ext cx="4952847" cy="1143000"/>
+          </a:xfrm>
+          <a:prstGeom prst="rect">
+            <a:avLst/>
+          </a:prstGeom>
+          <a:noFill/>
+        </p:spPr>
+        <p:txBody>
+          <a:bodyPr wrap="square" anchor="t" lIns="0" rIns="0" tIns="0" bIns="0"/>
+          <a:lstStyle/>
+          <a:p>
+            <a:pPr algn="l"/>
+            <a:r>
+              <a:rPr sz="2000" b="0" i="0">
+                <a:solidFill>
+                  <a:srgbClr val="202122"/>
+                </a:solidFill>
+                <a:latin typeface="Calibri"/>
+              </a:rPr>
+              <a:t>Explore ideas and plan releases over time.</a:t>
+            </a:r>
+          </a:p>
+        </p:txBody>
+      </p:sp>
+      <p:sp>
+        <p:nvSpPr>
+          <p:cNvPr id="18" name="Rounded Rectangle 17"/>
+          <p:cNvSpPr/>
+          <p:nvPr/>
+        </p:nvSpPr>
+        <p:spPr>
+          <a:xfrm>
+            <a:off x="6233007" y="4023360"/>
+            <a:ext cx="5410047" cy="2148840"/>
+          </a:xfrm>
+          <a:prstGeom prst="roundRect">
+            <a:avLst>
+              <a:gd name="adj" fmla="val 6000"/>
+            </a:avLst>
+          </a:prstGeom>
+          <a:solidFill>
+            <a:srgbClr val="EAF3FF"/>
+          </a:solidFill>
+          <a:ln>
+            <a:noFill/>
+          </a:ln>
+          <a:effectLst/>
+        </p:spPr>
+        <p:style>
+          <a:lnRef idx="1">
+            <a:schemeClr val="accent1"/>
+          </a:lnRef>
+          <a:fillRef idx="3">
+            <a:schemeClr val="accent1"/>
+          </a:fillRef>
+          <a:effectRef idx="2">
+            <a:schemeClr val="accent1"/>
+          </a:effectRef>
+          <a:fontRef idx="minor">
+            <a:schemeClr val="lt1"/>
+          </a:fontRef>
+        </p:style>
+        <p:txBody>
+          <a:bodyPr rtlCol="0" anchor="ctr"/>
+          <a:lstStyle/>
+          <a:p/>
+        </p:txBody>
+      </p:sp>
+      <p:sp>
+        <p:nvSpPr>
+          <p:cNvPr id="19" name="Oval 18"/>
+          <p:cNvSpPr/>
+          <p:nvPr/>
+        </p:nvSpPr>
+        <p:spPr>
+          <a:xfrm>
+            <a:off x="6461607" y="4251960"/>
+            <a:ext cx="457200" cy="457200"/>
+          </a:xfrm>
+          <a:prstGeom prst="ellipse">
+            <a:avLst/>
+          </a:prstGeom>
+          <a:solidFill>
+            <a:srgbClr val="33C17A"/>
+          </a:solidFill>
+          <a:ln>
+            <a:noFill/>
+          </a:ln>
+          <a:effectLst/>
+        </p:spPr>
+        <p:style>
+          <a:lnRef idx="1">
+            <a:schemeClr val="accent1"/>
+          </a:lnRef>
+          <a:fillRef idx="3">
+            <a:schemeClr val="accent1"/>
+          </a:fillRef>
+          <a:effectRef idx="2">
+            <a:schemeClr val="accent1"/>
+          </a:effectRef>
+          <a:fontRef idx="minor">
+            <a:schemeClr val="lt1"/>
+          </a:fontRef>
+        </p:style>
+        <p:txBody>
+          <a:bodyPr rtlCol="0" anchor="ctr" lIns="0" rIns="0" tIns="0" bIns="0"/>
+          <a:lstStyle/>
+          <a:p>
+            <a:pPr algn="ctr"/>
+            <a:r>
+              <a:rPr sz="1500" b="1">
+                <a:solidFill>
+                  <a:srgbClr val="202122"/>
+                </a:solidFill>
+                <a:latin typeface="Calibri"/>
+              </a:rPr>
+              <a:t>4</a:t>
+            </a:r>
+          </a:p>
+        </p:txBody>
+      </p:sp>
+      <p:sp>
+        <p:nvSpPr>
+          <p:cNvPr id="20" name="TextBox 19"/>
+          <p:cNvSpPr txBox="1"/>
+          <p:nvPr/>
+        </p:nvSpPr>
+        <p:spPr>
+          <a:xfrm>
+            <a:off x="7055967" y="4224528"/>
+            <a:ext cx="4404207" cy="512064"/>
+          </a:xfrm>
+          <a:prstGeom prst="rect">
+            <a:avLst/>
+          </a:prstGeom>
+          <a:noFill/>
+        </p:spPr>
+        <p:txBody>
+          <a:bodyPr wrap="square" anchor="ctr" lIns="0" rIns="0" tIns="0" bIns="0"/>
+          <a:lstStyle/>
+          <a:p>
+            <a:pPr algn="l"/>
+            <a:r>
+              <a:rPr sz="1900" b="1" i="0">
+                <a:solidFill>
+                  <a:srgbClr val="03306E"/>
+                </a:solidFill>
+                <a:latin typeface="Calibri"/>
+              </a:rPr>
+              <a:t>Entity relationship diagrams</a:t>
+            </a:r>
+          </a:p>
+        </p:txBody>
+      </p:sp>
+      <p:sp>
+        <p:nvSpPr>
+          <p:cNvPr id="21" name="TextBox 20"/>
+          <p:cNvSpPr txBox="1"/>
+          <p:nvPr/>
+        </p:nvSpPr>
+        <p:spPr>
+          <a:xfrm>
+            <a:off x="6461607" y="4892040"/>
+            <a:ext cx="4952847" cy="1143000"/>
+          </a:xfrm>
+          <a:prstGeom prst="rect">
+            <a:avLst/>
+          </a:prstGeom>
+          <a:noFill/>
+        </p:spPr>
+        <p:txBody>
+          <a:bodyPr wrap="square" anchor="t" lIns="0" rIns="0" tIns="0" bIns="0"/>
+          <a:lstStyle/>
+          <a:p>
+            <a:pPr algn="l"/>
+            <a:r>
+              <a:rPr sz="2000" b="0" i="0">
+                <a:solidFill>
+                  <a:srgbClr val="202122"/>
+                </a:solidFill>
+                <a:latin typeface="Calibri"/>
+              </a:rPr>
+              <a:t>Show the data and how it links.</a:t>
+            </a:r>
+          </a:p>
+        </p:txBody>
+      </p:sp>
+    </p:spTree>
+  </p:cSld>
+  <p:clrMapOvr>
+    <a:masterClrMapping/>
+  </p:clrMapOvr>
+</p:sld>
+</file>
+
+<file path=ppt/slides/slide12.xml><?xml version="1.0" encoding="utf-8"?>
+<p:sld xmlns:a="http://schemas.openxmlformats.org/drawingml/2006/main" xmlns:p="http://schemas.openxmlformats.org/presentationml/2006/main" xmlns:r="http://schemas.openxmlformats.org/officeDocument/2006/relationships">
+  <p:cSld>
+    <p:bg>
+      <p:bgPr>
+        <a:solidFill>
+          <a:srgbClr val="FFFFFF"/>
+        </a:solidFill>
+        <a:effectLst/>
+      </p:bgPr>
+    </p:bg>
+    <p:spTree>
+      <p:nvGrpSpPr>
+        <p:cNvPr id="1" name=""/>
+        <p:cNvGrpSpPr/>
+        <p:nvPr/>
+      </p:nvGrpSpPr>
+      <p:grpSpPr/>
+      <p:sp>
+        <p:nvSpPr>
+          <p:cNvPr id="2" name="TextBox 1"/>
+          <p:cNvSpPr txBox="1"/>
+          <p:nvPr/>
+        </p:nvSpPr>
+        <p:spPr>
+          <a:xfrm>
+            <a:off x="548640" y="320040"/>
+            <a:ext cx="11094415" cy="274320"/>
+          </a:xfrm>
+          <a:prstGeom prst="rect">
+            <a:avLst/>
+          </a:prstGeom>
+          <a:noFill/>
+        </p:spPr>
+        <p:txBody>
+          <a:bodyPr wrap="square" anchor="t" lIns="0" rIns="0" tIns="0" bIns="0"/>
+          <a:lstStyle/>
+          <a:p>
+            <a:pPr algn="l"/>
+            <a:r>
+              <a:rPr sz="1100" b="1" i="0">
+                <a:solidFill>
+                  <a:srgbClr val="54595D"/>
+                </a:solidFill>
+                <a:latin typeface="Calibri"/>
+              </a:rPr>
+              <a:t>OCCUPATIONAL SPECIALISM  ·  Specialism Content Area 1</a:t>
+            </a:r>
+          </a:p>
+        </p:txBody>
+      </p:sp>
+      <p:sp>
+        <p:nvSpPr>
+          <p:cNvPr id="3" name="TextBox 2"/>
+          <p:cNvSpPr txBox="1"/>
+          <p:nvPr/>
+        </p:nvSpPr>
+        <p:spPr>
+          <a:xfrm>
+            <a:off x="548640" y="566928"/>
+            <a:ext cx="11094415" cy="822960"/>
+          </a:xfrm>
+          <a:prstGeom prst="rect">
+            <a:avLst/>
+          </a:prstGeom>
+          <a:noFill/>
+        </p:spPr>
+        <p:txBody>
+          <a:bodyPr wrap="square" anchor="ctr" lIns="0" rIns="0" tIns="0" bIns="0"/>
+          <a:lstStyle/>
+          <a:p>
+            <a:pPr algn="l"/>
+            <a:r>
+              <a:rPr sz="3200" b="1" i="0">
+                <a:solidFill>
+                  <a:srgbClr val="03306E"/>
+                </a:solidFill>
+                <a:latin typeface="Cambria"/>
+              </a:rPr>
+              <a:t>Quick check: User analysis tools</a:t>
+            </a:r>
+          </a:p>
+        </p:txBody>
+      </p:sp>
+      <p:sp>
+        <p:nvSpPr>
+          <p:cNvPr id="4" name="TextBox 3"/>
+          <p:cNvSpPr txBox="1"/>
+          <p:nvPr/>
+        </p:nvSpPr>
+        <p:spPr>
+          <a:xfrm>
+            <a:off x="548640" y="6446520"/>
+            <a:ext cx="8229600" cy="274320"/>
+          </a:xfrm>
+          <a:prstGeom prst="rect">
+            <a:avLst/>
+          </a:prstGeom>
+          <a:noFill/>
+        </p:spPr>
+        <p:txBody>
+          <a:bodyPr wrap="square" anchor="t" lIns="0" rIns="0" tIns="0" bIns="0"/>
+          <a:lstStyle/>
+          <a:p>
+            <a:pPr algn="l"/>
+            <a:r>
+              <a:rPr sz="1000" b="0" i="0">
+                <a:solidFill>
+                  <a:srgbClr val="54595D"/>
+                </a:solidFill>
+                <a:latin typeface="Calibri"/>
+              </a:rPr>
+              <a:t>Digital Software Development T Level  ·  The Software Development Lifecycle and Requirements</a:t>
+            </a:r>
+          </a:p>
+        </p:txBody>
+      </p:sp>
+      <p:sp>
+        <p:nvSpPr>
+          <p:cNvPr id="5" name="TextBox 4"/>
+          <p:cNvSpPr txBox="1"/>
+          <p:nvPr/>
+        </p:nvSpPr>
+        <p:spPr>
+          <a:xfrm>
+            <a:off x="10728655" y="6446520"/>
+            <a:ext cx="914400" cy="274320"/>
+          </a:xfrm>
+          <a:prstGeom prst="rect">
+            <a:avLst/>
+          </a:prstGeom>
+          <a:noFill/>
+        </p:spPr>
+        <p:txBody>
+          <a:bodyPr wrap="square" anchor="t" lIns="0" rIns="0" tIns="0" bIns="0"/>
+          <a:lstStyle/>
+          <a:p>
+            <a:pPr algn="r"/>
+            <a:r>
+              <a:rPr sz="1000" b="0" i="0">
+                <a:solidFill>
+                  <a:srgbClr val="54595D"/>
+                </a:solidFill>
+                <a:latin typeface="Calibri"/>
+              </a:rPr>
+              <a:t>12</a:t>
+            </a:r>
+          </a:p>
+        </p:txBody>
+      </p:sp>
+      <p:sp>
+        <p:nvSpPr>
+          <p:cNvPr id="6" name="Oval 5"/>
+          <p:cNvSpPr/>
+          <p:nvPr/>
+        </p:nvSpPr>
+        <p:spPr>
+          <a:xfrm>
+            <a:off x="548640" y="1691640"/>
+            <a:ext cx="502920" cy="502920"/>
+          </a:xfrm>
+          <a:prstGeom prst="ellipse">
+            <a:avLst/>
+          </a:prstGeom>
+          <a:solidFill>
+            <a:srgbClr val="33C17A"/>
+          </a:solidFill>
+          <a:ln>
+            <a:noFill/>
+          </a:ln>
+          <a:effectLst/>
+        </p:spPr>
+        <p:style>
+          <a:lnRef idx="1">
+            <a:schemeClr val="accent1"/>
+          </a:lnRef>
+          <a:fillRef idx="3">
+            <a:schemeClr val="accent1"/>
+          </a:fillRef>
+          <a:effectRef idx="2">
+            <a:schemeClr val="accent1"/>
+          </a:effectRef>
+          <a:fontRef idx="minor">
+            <a:schemeClr val="lt1"/>
+          </a:fontRef>
+        </p:style>
+        <p:txBody>
+          <a:bodyPr rtlCol="0" anchor="ctr" lIns="0" rIns="0" tIns="0" bIns="0"/>
+          <a:lstStyle/>
+          <a:p>
+            <a:pPr algn="ctr"/>
+            <a:r>
+              <a:rPr sz="1600" b="1">
+                <a:solidFill>
+                  <a:srgbClr val="202122"/>
+                </a:solidFill>
+                <a:latin typeface="Calibri"/>
+              </a:rPr>
+              <a:t>1</a:t>
+            </a:r>
+          </a:p>
+        </p:txBody>
+      </p:sp>
+      <p:sp>
+        <p:nvSpPr>
+          <p:cNvPr id="7" name="TextBox 6"/>
+          <p:cNvSpPr txBox="1"/>
+          <p:nvPr/>
+        </p:nvSpPr>
+        <p:spPr>
+          <a:xfrm>
+            <a:off x="1371600" y="1645920"/>
+            <a:ext cx="10271455" cy="1188720"/>
+          </a:xfrm>
+          <a:prstGeom prst="rect">
+            <a:avLst/>
+          </a:prstGeom>
+          <a:noFill/>
+        </p:spPr>
+        <p:txBody>
+          <a:bodyPr wrap="square" anchor="t" lIns="0" rIns="0" tIns="0" bIns="0"/>
+          <a:lstStyle/>
+          <a:p>
+            <a:pPr algn="l"/>
+            <a:r>
+              <a:rPr sz="2400" b="0" i="0">
+                <a:solidFill>
+                  <a:srgbClr val="202122"/>
+                </a:solidFill>
+                <a:latin typeface="Calibri"/>
+              </a:rPr>
+              <a:t>What is the format of a user story?</a:t>
+            </a:r>
+          </a:p>
+        </p:txBody>
+      </p:sp>
+      <p:sp>
+        <p:nvSpPr>
+          <p:cNvPr id="8" name="Oval 7"/>
+          <p:cNvSpPr/>
+          <p:nvPr/>
+        </p:nvSpPr>
+        <p:spPr>
+          <a:xfrm>
+            <a:off x="548640" y="3108960"/>
+            <a:ext cx="502920" cy="502920"/>
+          </a:xfrm>
+          <a:prstGeom prst="ellipse">
+            <a:avLst/>
+          </a:prstGeom>
+          <a:solidFill>
+            <a:srgbClr val="33C17A"/>
+          </a:solidFill>
+          <a:ln>
+            <a:noFill/>
+          </a:ln>
+          <a:effectLst/>
+        </p:spPr>
+        <p:style>
+          <a:lnRef idx="1">
+            <a:schemeClr val="accent1"/>
+          </a:lnRef>
+          <a:fillRef idx="3">
+            <a:schemeClr val="accent1"/>
+          </a:fillRef>
+          <a:effectRef idx="2">
+            <a:schemeClr val="accent1"/>
+          </a:effectRef>
+          <a:fontRef idx="minor">
+            <a:schemeClr val="lt1"/>
+          </a:fontRef>
+        </p:style>
+        <p:txBody>
+          <a:bodyPr rtlCol="0" anchor="ctr" lIns="0" rIns="0" tIns="0" bIns="0"/>
+          <a:lstStyle/>
+          <a:p>
+            <a:pPr algn="ctr"/>
+            <a:r>
+              <a:rPr sz="1600" b="1">
+                <a:solidFill>
+                  <a:srgbClr val="202122"/>
+                </a:solidFill>
+                <a:latin typeface="Calibri"/>
+              </a:rPr>
+              <a:t>2</a:t>
+            </a:r>
+          </a:p>
+        </p:txBody>
+      </p:sp>
+      <p:sp>
+        <p:nvSpPr>
+          <p:cNvPr id="9" name="TextBox 8"/>
+          <p:cNvSpPr txBox="1"/>
+          <p:nvPr/>
+        </p:nvSpPr>
+        <p:spPr>
+          <a:xfrm>
+            <a:off x="1371600" y="3063240"/>
+            <a:ext cx="10271455" cy="1188720"/>
+          </a:xfrm>
+          <a:prstGeom prst="rect">
+            <a:avLst/>
+          </a:prstGeom>
+          <a:noFill/>
+        </p:spPr>
+        <p:txBody>
+          <a:bodyPr wrap="square" anchor="t" lIns="0" rIns="0" tIns="0" bIns="0"/>
+          <a:lstStyle/>
+          <a:p>
+            <a:pPr algn="l"/>
+            <a:r>
+              <a:rPr sz="2400" b="0" i="0">
+                <a:solidFill>
+                  <a:srgbClr val="202122"/>
+                </a:solidFill>
+                <a:latin typeface="Calibri"/>
+              </a:rPr>
+              <a:t>What does an ERD show?</a:t>
+            </a:r>
+          </a:p>
+        </p:txBody>
+      </p:sp>
+      <p:sp>
+        <p:nvSpPr>
+          <p:cNvPr id="10" name="Oval 9"/>
+          <p:cNvSpPr/>
+          <p:nvPr/>
+        </p:nvSpPr>
+        <p:spPr>
+          <a:xfrm>
+            <a:off x="548640" y="4526280"/>
+            <a:ext cx="502920" cy="502920"/>
+          </a:xfrm>
+          <a:prstGeom prst="ellipse">
+            <a:avLst/>
+          </a:prstGeom>
+          <a:solidFill>
+            <a:srgbClr val="33C17A"/>
+          </a:solidFill>
+          <a:ln>
+            <a:noFill/>
+          </a:ln>
+          <a:effectLst/>
+        </p:spPr>
+        <p:style>
+          <a:lnRef idx="1">
+            <a:schemeClr val="accent1"/>
+          </a:lnRef>
+          <a:fillRef idx="3">
+            <a:schemeClr val="accent1"/>
+          </a:fillRef>
+          <a:effectRef idx="2">
+            <a:schemeClr val="accent1"/>
+          </a:effectRef>
+          <a:fontRef idx="minor">
+            <a:schemeClr val="lt1"/>
+          </a:fontRef>
+        </p:style>
+        <p:txBody>
+          <a:bodyPr rtlCol="0" anchor="ctr" lIns="0" rIns="0" tIns="0" bIns="0"/>
+          <a:lstStyle/>
+          <a:p>
+            <a:pPr algn="ctr"/>
+            <a:r>
+              <a:rPr sz="1600" b="1">
+                <a:solidFill>
+                  <a:srgbClr val="202122"/>
+                </a:solidFill>
+                <a:latin typeface="Calibri"/>
+              </a:rPr>
+              <a:t>3</a:t>
+            </a:r>
+          </a:p>
+        </p:txBody>
+      </p:sp>
+      <p:sp>
+        <p:nvSpPr>
+          <p:cNvPr id="11" name="TextBox 10"/>
+          <p:cNvSpPr txBox="1"/>
+          <p:nvPr/>
+        </p:nvSpPr>
+        <p:spPr>
+          <a:xfrm>
+            <a:off x="1371600" y="4480560"/>
+            <a:ext cx="10271455" cy="1188720"/>
+          </a:xfrm>
+          <a:prstGeom prst="rect">
+            <a:avLst/>
+          </a:prstGeom>
+          <a:noFill/>
+        </p:spPr>
+        <p:txBody>
+          <a:bodyPr wrap="square" anchor="t" lIns="0" rIns="0" tIns="0" bIns="0"/>
+          <a:lstStyle/>
+          <a:p>
+            <a:pPr algn="l"/>
+            <a:r>
+              <a:rPr sz="2400" b="0" i="0">
+                <a:solidFill>
+                  <a:srgbClr val="202122"/>
+                </a:solidFill>
+                <a:latin typeface="Calibri"/>
+              </a:rPr>
+              <a:t>What is a product road map?</a:t>
+            </a:r>
+          </a:p>
+        </p:txBody>
+      </p:sp>
+      <p:sp>
+        <p:nvSpPr>
+          <p:cNvPr id="12" name="TextBox 11"/>
+          <p:cNvSpPr txBox="1"/>
+          <p:nvPr/>
+        </p:nvSpPr>
+        <p:spPr>
+          <a:xfrm>
+            <a:off x="548640" y="5852160"/>
+            <a:ext cx="11094415" cy="365760"/>
+          </a:xfrm>
+          <a:prstGeom prst="rect">
+            <a:avLst/>
+          </a:prstGeom>
+          <a:noFill/>
+        </p:spPr>
+        <p:txBody>
+          <a:bodyPr wrap="square" anchor="t" lIns="0" rIns="0" tIns="0" bIns="0"/>
+          <a:lstStyle/>
+          <a:p>
+            <a:pPr algn="l"/>
+            <a:r>
+              <a:rPr sz="1300" b="0" i="1">
+                <a:solidFill>
+                  <a:srgbClr val="54595D"/>
+                </a:solidFill>
+                <a:latin typeface="Calibri"/>
+              </a:rPr>
+              <a:t>Answer on mini whiteboards or in your book. Answers are in the speaker notes.</a:t>
+            </a:r>
+          </a:p>
+        </p:txBody>
+      </p:sp>
+    </p:spTree>
+  </p:cSld>
+  <p:clrMapOvr>
+    <a:masterClrMapping/>
+  </p:clrMapOvr>
+</p:sld>
+</file>
+
+<file path=ppt/slides/slide13.xml><?xml version="1.0" encoding="utf-8"?>
+<p:sld xmlns:a="http://schemas.openxmlformats.org/drawingml/2006/main" xmlns:p="http://schemas.openxmlformats.org/presentationml/2006/main" xmlns:r="http://schemas.openxmlformats.org/officeDocument/2006/relationships">
+  <p:cSld>
+    <p:bg>
+      <p:bgPr>
+        <a:solidFill>
+          <a:srgbClr val="FFFFFF"/>
+        </a:solidFill>
+        <a:effectLst/>
+      </p:bgPr>
+    </p:bg>
+    <p:spTree>
+      <p:nvGrpSpPr>
+        <p:cNvPr id="1" name=""/>
+        <p:cNvGrpSpPr/>
+        <p:nvPr/>
+      </p:nvGrpSpPr>
+      <p:grpSpPr/>
+      <p:sp>
+        <p:nvSpPr>
+          <p:cNvPr id="2" name="TextBox 1"/>
+          <p:cNvSpPr txBox="1"/>
+          <p:nvPr/>
+        </p:nvSpPr>
+        <p:spPr>
+          <a:xfrm>
+            <a:off x="548640" y="320040"/>
+            <a:ext cx="11094415" cy="274320"/>
+          </a:xfrm>
+          <a:prstGeom prst="rect">
+            <a:avLst/>
+          </a:prstGeom>
+          <a:noFill/>
+        </p:spPr>
+        <p:txBody>
+          <a:bodyPr wrap="square" anchor="t" lIns="0" rIns="0" tIns="0" bIns="0"/>
+          <a:lstStyle/>
+          <a:p>
+            <a:pPr algn="l"/>
+            <a:r>
+              <a:rPr sz="1100" b="1" i="0">
+                <a:solidFill>
+                  <a:srgbClr val="54595D"/>
+                </a:solidFill>
+                <a:latin typeface="Calibri"/>
+              </a:rPr>
+              <a:t>OCCUPATIONAL SPECIALISM  ·  Specialism Content Area 1</a:t>
+            </a:r>
+          </a:p>
+        </p:txBody>
+      </p:sp>
+      <p:sp>
+        <p:nvSpPr>
+          <p:cNvPr id="3" name="TextBox 2"/>
+          <p:cNvSpPr txBox="1"/>
+          <p:nvPr/>
+        </p:nvSpPr>
+        <p:spPr>
+          <a:xfrm>
+            <a:off x="548640" y="566928"/>
+            <a:ext cx="11094415" cy="822960"/>
+          </a:xfrm>
+          <a:prstGeom prst="rect">
+            <a:avLst/>
+          </a:prstGeom>
+          <a:noFill/>
+        </p:spPr>
+        <p:txBody>
+          <a:bodyPr wrap="square" anchor="ctr" lIns="0" rIns="0" tIns="0" bIns="0"/>
+          <a:lstStyle/>
+          <a:p>
+            <a:pPr algn="l"/>
+            <a:r>
+              <a:rPr sz="3200" b="1" i="0">
+                <a:solidFill>
+                  <a:srgbClr val="03306E"/>
+                </a:solidFill>
+                <a:latin typeface="Cambria"/>
+              </a:rPr>
+              <a:t>Check your understanding</a:t>
+            </a:r>
+          </a:p>
+        </p:txBody>
+      </p:sp>
+      <p:sp>
+        <p:nvSpPr>
+          <p:cNvPr id="4" name="TextBox 3"/>
+          <p:cNvSpPr txBox="1"/>
+          <p:nvPr/>
+        </p:nvSpPr>
+        <p:spPr>
+          <a:xfrm>
+            <a:off x="548640" y="6446520"/>
+            <a:ext cx="8229600" cy="274320"/>
+          </a:xfrm>
+          <a:prstGeom prst="rect">
+            <a:avLst/>
+          </a:prstGeom>
+          <a:noFill/>
+        </p:spPr>
+        <p:txBody>
+          <a:bodyPr wrap="square" anchor="t" lIns="0" rIns="0" tIns="0" bIns="0"/>
+          <a:lstStyle/>
+          <a:p>
+            <a:pPr algn="l"/>
+            <a:r>
+              <a:rPr sz="1000" b="0" i="0">
+                <a:solidFill>
+                  <a:srgbClr val="54595D"/>
+                </a:solidFill>
+                <a:latin typeface="Calibri"/>
+              </a:rPr>
+              <a:t>Digital Software Development T Level  ·  The Software Development Lifecycle and Requirements</a:t>
+            </a:r>
+          </a:p>
+        </p:txBody>
+      </p:sp>
+      <p:sp>
+        <p:nvSpPr>
+          <p:cNvPr id="5" name="TextBox 4"/>
+          <p:cNvSpPr txBox="1"/>
+          <p:nvPr/>
+        </p:nvSpPr>
+        <p:spPr>
+          <a:xfrm>
+            <a:off x="10728655" y="6446520"/>
+            <a:ext cx="914400" cy="274320"/>
+          </a:xfrm>
+          <a:prstGeom prst="rect">
+            <a:avLst/>
+          </a:prstGeom>
+          <a:noFill/>
+        </p:spPr>
+        <p:txBody>
+          <a:bodyPr wrap="square" anchor="t" lIns="0" rIns="0" tIns="0" bIns="0"/>
+          <a:lstStyle/>
+          <a:p>
+            <a:pPr algn="r"/>
+            <a:r>
+              <a:rPr sz="1000" b="0" i="0">
+                <a:solidFill>
+                  <a:srgbClr val="54595D"/>
+                </a:solidFill>
+                <a:latin typeface="Calibri"/>
+              </a:rPr>
+              <a:t>13</a:t>
+            </a:r>
+          </a:p>
+        </p:txBody>
+      </p:sp>
+      <p:sp>
+        <p:nvSpPr>
+          <p:cNvPr id="6" name="Oval 5"/>
+          <p:cNvSpPr/>
+          <p:nvPr/>
+        </p:nvSpPr>
+        <p:spPr>
+          <a:xfrm>
+            <a:off x="548640" y="1618488"/>
+            <a:ext cx="411480" cy="411480"/>
+          </a:xfrm>
+          <a:prstGeom prst="ellipse">
+            <a:avLst/>
+          </a:prstGeom>
+          <a:solidFill>
+            <a:srgbClr val="33C17A"/>
+          </a:solidFill>
+          <a:ln>
+            <a:noFill/>
+          </a:ln>
+          <a:effectLst/>
+        </p:spPr>
+        <p:style>
+          <a:lnRef idx="1">
+            <a:schemeClr val="accent1"/>
+          </a:lnRef>
+          <a:fillRef idx="3">
+            <a:schemeClr val="accent1"/>
+          </a:fillRef>
+          <a:effectRef idx="2">
+            <a:schemeClr val="accent1"/>
+          </a:effectRef>
+          <a:fontRef idx="minor">
+            <a:schemeClr val="lt1"/>
+          </a:fontRef>
+        </p:style>
+        <p:txBody>
+          <a:bodyPr rtlCol="0" anchor="ctr" lIns="0" rIns="0" tIns="0" bIns="0"/>
+          <a:lstStyle/>
+          <a:p>
+            <a:pPr algn="ctr"/>
+            <a:r>
+              <a:rPr sz="1400" b="1">
+                <a:solidFill>
+                  <a:srgbClr val="202122"/>
+                </a:solidFill>
+                <a:latin typeface="Calibri"/>
+              </a:rPr>
+              <a:t>1</a:t>
+            </a:r>
+          </a:p>
+        </p:txBody>
+      </p:sp>
+      <p:sp>
+        <p:nvSpPr>
+          <p:cNvPr id="7" name="TextBox 6"/>
+          <p:cNvSpPr txBox="1"/>
+          <p:nvPr/>
+        </p:nvSpPr>
+        <p:spPr>
+          <a:xfrm>
+            <a:off x="1234440" y="1600200"/>
+            <a:ext cx="10408615" cy="791870"/>
+          </a:xfrm>
+          <a:prstGeom prst="rect">
+            <a:avLst/>
+          </a:prstGeom>
+          <a:noFill/>
+        </p:spPr>
+        <p:txBody>
+          <a:bodyPr wrap="square" anchor="t" lIns="0" rIns="0" tIns="0" bIns="0"/>
+          <a:lstStyle/>
+          <a:p>
+            <a:pPr algn="l"/>
+            <a:r>
+              <a:rPr sz="2200" b="0" i="0">
+                <a:solidFill>
+                  <a:srgbClr val="202122"/>
+                </a:solidFill>
+                <a:latin typeface="Calibri"/>
+              </a:rPr>
+              <a:t>Name the SDLC stage where user stories are written.</a:t>
+            </a:r>
+          </a:p>
+        </p:txBody>
+      </p:sp>
+      <p:sp>
+        <p:nvSpPr>
+          <p:cNvPr id="8" name="Oval 7"/>
+          <p:cNvSpPr/>
+          <p:nvPr/>
+        </p:nvSpPr>
+        <p:spPr>
+          <a:xfrm>
+            <a:off x="548640" y="2574950"/>
+            <a:ext cx="411480" cy="411480"/>
+          </a:xfrm>
+          <a:prstGeom prst="ellipse">
+            <a:avLst/>
+          </a:prstGeom>
+          <a:solidFill>
+            <a:srgbClr val="33C17A"/>
+          </a:solidFill>
+          <a:ln>
+            <a:noFill/>
+          </a:ln>
+          <a:effectLst/>
+        </p:spPr>
+        <p:style>
+          <a:lnRef idx="1">
+            <a:schemeClr val="accent1"/>
+          </a:lnRef>
+          <a:fillRef idx="3">
+            <a:schemeClr val="accent1"/>
+          </a:fillRef>
+          <a:effectRef idx="2">
+            <a:schemeClr val="accent1"/>
+          </a:effectRef>
+          <a:fontRef idx="minor">
+            <a:schemeClr val="lt1"/>
+          </a:fontRef>
+        </p:style>
+        <p:txBody>
+          <a:bodyPr rtlCol="0" anchor="ctr" lIns="0" rIns="0" tIns="0" bIns="0"/>
+          <a:lstStyle/>
+          <a:p>
+            <a:pPr algn="ctr"/>
+            <a:r>
+              <a:rPr sz="1400" b="1">
+                <a:solidFill>
+                  <a:srgbClr val="202122"/>
+                </a:solidFill>
+                <a:latin typeface="Calibri"/>
+              </a:rPr>
+              <a:t>2</a:t>
+            </a:r>
+          </a:p>
+        </p:txBody>
+      </p:sp>
+      <p:sp>
+        <p:nvSpPr>
+          <p:cNvPr id="9" name="TextBox 8"/>
+          <p:cNvSpPr txBox="1"/>
+          <p:nvPr/>
+        </p:nvSpPr>
+        <p:spPr>
+          <a:xfrm>
+            <a:off x="1234440" y="2556662"/>
+            <a:ext cx="10408615" cy="791870"/>
+          </a:xfrm>
+          <a:prstGeom prst="rect">
+            <a:avLst/>
+          </a:prstGeom>
+          <a:noFill/>
+        </p:spPr>
+        <p:txBody>
+          <a:bodyPr wrap="square" anchor="t" lIns="0" rIns="0" tIns="0" bIns="0"/>
+          <a:lstStyle/>
+          <a:p>
+            <a:pPr algn="l"/>
+            <a:r>
+              <a:rPr sz="2200" b="0" i="0">
+                <a:solidFill>
+                  <a:srgbClr val="202122"/>
+                </a:solidFill>
+                <a:latin typeface="Calibri"/>
+              </a:rPr>
+              <a:t>Is 'the app loads in under 2 seconds' functional or non-functional?</a:t>
+            </a:r>
+          </a:p>
+        </p:txBody>
+      </p:sp>
+      <p:sp>
+        <p:nvSpPr>
+          <p:cNvPr id="10" name="Oval 9"/>
+          <p:cNvSpPr/>
+          <p:nvPr/>
+        </p:nvSpPr>
+        <p:spPr>
+          <a:xfrm>
+            <a:off x="548640" y="3531412"/>
+            <a:ext cx="411480" cy="411480"/>
+          </a:xfrm>
+          <a:prstGeom prst="ellipse">
+            <a:avLst/>
+          </a:prstGeom>
+          <a:solidFill>
+            <a:srgbClr val="33C17A"/>
+          </a:solidFill>
+          <a:ln>
+            <a:noFill/>
+          </a:ln>
+          <a:effectLst/>
+        </p:spPr>
+        <p:style>
+          <a:lnRef idx="1">
+            <a:schemeClr val="accent1"/>
+          </a:lnRef>
+          <a:fillRef idx="3">
+            <a:schemeClr val="accent1"/>
+          </a:fillRef>
+          <a:effectRef idx="2">
+            <a:schemeClr val="accent1"/>
+          </a:effectRef>
+          <a:fontRef idx="minor">
+            <a:schemeClr val="lt1"/>
+          </a:fontRef>
+        </p:style>
+        <p:txBody>
+          <a:bodyPr rtlCol="0" anchor="ctr" lIns="0" rIns="0" tIns="0" bIns="0"/>
+          <a:lstStyle/>
+          <a:p>
+            <a:pPr algn="ctr"/>
+            <a:r>
+              <a:rPr sz="1400" b="1">
+                <a:solidFill>
+                  <a:srgbClr val="202122"/>
+                </a:solidFill>
+                <a:latin typeface="Calibri"/>
+              </a:rPr>
+              <a:t>3</a:t>
+            </a:r>
+          </a:p>
+        </p:txBody>
+      </p:sp>
+      <p:sp>
+        <p:nvSpPr>
+          <p:cNvPr id="11" name="TextBox 10"/>
+          <p:cNvSpPr txBox="1"/>
+          <p:nvPr/>
+        </p:nvSpPr>
+        <p:spPr>
+          <a:xfrm>
+            <a:off x="1234440" y="3513124"/>
+            <a:ext cx="10408615" cy="791870"/>
+          </a:xfrm>
+          <a:prstGeom prst="rect">
+            <a:avLst/>
+          </a:prstGeom>
+          <a:noFill/>
+        </p:spPr>
+        <p:txBody>
+          <a:bodyPr wrap="square" anchor="t" lIns="0" rIns="0" tIns="0" bIns="0"/>
+          <a:lstStyle/>
+          <a:p>
+            <a:pPr algn="l"/>
+            <a:r>
+              <a:rPr sz="2200" b="0" i="0">
+                <a:solidFill>
+                  <a:srgbClr val="202122"/>
+                </a:solidFill>
+                <a:latin typeface="Calibri"/>
+              </a:rPr>
+              <a:t>What is secure by design?</a:t>
+            </a:r>
+          </a:p>
+        </p:txBody>
+      </p:sp>
+      <p:sp>
+        <p:nvSpPr>
+          <p:cNvPr id="12" name="Oval 11"/>
+          <p:cNvSpPr/>
+          <p:nvPr/>
+        </p:nvSpPr>
+        <p:spPr>
+          <a:xfrm>
+            <a:off x="548640" y="4487875"/>
+            <a:ext cx="411480" cy="411480"/>
+          </a:xfrm>
+          <a:prstGeom prst="ellipse">
+            <a:avLst/>
+          </a:prstGeom>
+          <a:solidFill>
+            <a:srgbClr val="33C17A"/>
+          </a:solidFill>
+          <a:ln>
+            <a:noFill/>
+          </a:ln>
+          <a:effectLst/>
+        </p:spPr>
+        <p:style>
+          <a:lnRef idx="1">
+            <a:schemeClr val="accent1"/>
+          </a:lnRef>
+          <a:fillRef idx="3">
+            <a:schemeClr val="accent1"/>
+          </a:fillRef>
+          <a:effectRef idx="2">
+            <a:schemeClr val="accent1"/>
+          </a:effectRef>
+          <a:fontRef idx="minor">
+            <a:schemeClr val="lt1"/>
+          </a:fontRef>
+        </p:style>
+        <p:txBody>
+          <a:bodyPr rtlCol="0" anchor="ctr" lIns="0" rIns="0" tIns="0" bIns="0"/>
+          <a:lstStyle/>
+          <a:p>
+            <a:pPr algn="ctr"/>
+            <a:r>
+              <a:rPr sz="1400" b="1">
+                <a:solidFill>
+                  <a:srgbClr val="202122"/>
+                </a:solidFill>
+                <a:latin typeface="Calibri"/>
+              </a:rPr>
+              <a:t>4</a:t>
+            </a:r>
+          </a:p>
+        </p:txBody>
+      </p:sp>
+      <p:sp>
+        <p:nvSpPr>
+          <p:cNvPr id="13" name="TextBox 12"/>
+          <p:cNvSpPr txBox="1"/>
+          <p:nvPr/>
+        </p:nvSpPr>
+        <p:spPr>
+          <a:xfrm>
+            <a:off x="1234440" y="4469587"/>
+            <a:ext cx="10408615" cy="791870"/>
+          </a:xfrm>
+          <a:prstGeom prst="rect">
+            <a:avLst/>
+          </a:prstGeom>
+          <a:noFill/>
+        </p:spPr>
+        <p:txBody>
+          <a:bodyPr wrap="square" anchor="t" lIns="0" rIns="0" tIns="0" bIns="0"/>
+          <a:lstStyle/>
+          <a:p>
+            <a:pPr algn="l"/>
+            <a:r>
+              <a:rPr sz="2200" b="0" i="0">
+                <a:solidFill>
+                  <a:srgbClr val="202122"/>
+                </a:solidFill>
+                <a:latin typeface="Calibri"/>
+              </a:rPr>
+              <a:t>What is spike testing used for?</a:t>
+            </a:r>
+          </a:p>
+        </p:txBody>
+      </p:sp>
+      <p:sp>
+        <p:nvSpPr>
+          <p:cNvPr id="14" name="Oval 13"/>
+          <p:cNvSpPr/>
+          <p:nvPr/>
+        </p:nvSpPr>
+        <p:spPr>
+          <a:xfrm>
+            <a:off x="548640" y="5444337"/>
+            <a:ext cx="411480" cy="411480"/>
+          </a:xfrm>
+          <a:prstGeom prst="ellipse">
+            <a:avLst/>
+          </a:prstGeom>
+          <a:solidFill>
+            <a:srgbClr val="33C17A"/>
+          </a:solidFill>
+          <a:ln>
+            <a:noFill/>
+          </a:ln>
+          <a:effectLst/>
+        </p:spPr>
+        <p:style>
+          <a:lnRef idx="1">
+            <a:schemeClr val="accent1"/>
+          </a:lnRef>
+          <a:fillRef idx="3">
+            <a:schemeClr val="accent1"/>
+          </a:fillRef>
+          <a:effectRef idx="2">
+            <a:schemeClr val="accent1"/>
+          </a:effectRef>
+          <a:fontRef idx="minor">
+            <a:schemeClr val="lt1"/>
+          </a:fontRef>
+        </p:style>
+        <p:txBody>
+          <a:bodyPr rtlCol="0" anchor="ctr" lIns="0" rIns="0" tIns="0" bIns="0"/>
+          <a:lstStyle/>
+          <a:p>
+            <a:pPr algn="ctr"/>
+            <a:r>
+              <a:rPr sz="1400" b="1">
+                <a:solidFill>
+                  <a:srgbClr val="202122"/>
+                </a:solidFill>
+                <a:latin typeface="Calibri"/>
+              </a:rPr>
+              <a:t>5</a:t>
+            </a:r>
+          </a:p>
+        </p:txBody>
+      </p:sp>
+      <p:sp>
+        <p:nvSpPr>
+          <p:cNvPr id="15" name="TextBox 14"/>
+          <p:cNvSpPr txBox="1"/>
+          <p:nvPr/>
+        </p:nvSpPr>
+        <p:spPr>
+          <a:xfrm>
+            <a:off x="1234440" y="5426049"/>
+            <a:ext cx="10408615" cy="791870"/>
+          </a:xfrm>
+          <a:prstGeom prst="rect">
+            <a:avLst/>
+          </a:prstGeom>
+          <a:noFill/>
+        </p:spPr>
+        <p:txBody>
+          <a:bodyPr wrap="square" anchor="t" lIns="0" rIns="0" tIns="0" bIns="0"/>
+          <a:lstStyle/>
+          <a:p>
+            <a:pPr algn="l"/>
+            <a:r>
+              <a:rPr sz="2200" b="0" i="0">
+                <a:solidFill>
+                  <a:srgbClr val="202122"/>
+                </a:solidFill>
+                <a:latin typeface="Calibri"/>
+              </a:rPr>
+              <a:t>Why review AI-generated code?</a:t>
+            </a:r>
+          </a:p>
+        </p:txBody>
+      </p:sp>
+    </p:spTree>
+  </p:cSld>
+  <p:clrMapOvr>
+    <a:masterClrMapping/>
+  </p:clrMapOvr>
+</p:sld>
+</file>
+
+<file path=ppt/slides/slide14.xml><?xml version="1.0" encoding="utf-8"?>
+<p:sld xmlns:a="http://schemas.openxmlformats.org/drawingml/2006/main" xmlns:p="http://schemas.openxmlformats.org/presentationml/2006/main" xmlns:r="http://schemas.openxmlformats.org/officeDocument/2006/relationships">
+  <p:cSld>
+    <p:bg>
+      <p:bgPr>
+        <a:solidFill>
+          <a:srgbClr val="FFFFFF"/>
+        </a:solidFill>
+        <a:effectLst/>
+      </p:bgPr>
+    </p:bg>
+    <p:spTree>
+      <p:nvGrpSpPr>
+        <p:cNvPr id="1" name=""/>
+        <p:cNvGrpSpPr/>
+        <p:nvPr/>
+      </p:nvGrpSpPr>
+      <p:grpSpPr/>
+      <p:sp>
+        <p:nvSpPr>
+          <p:cNvPr id="2" name="TextBox 1"/>
+          <p:cNvSpPr txBox="1"/>
+          <p:nvPr/>
+        </p:nvSpPr>
+        <p:spPr>
+          <a:xfrm>
+            <a:off x="548640" y="320040"/>
+            <a:ext cx="11094415" cy="274320"/>
+          </a:xfrm>
+          <a:prstGeom prst="rect">
+            <a:avLst/>
+          </a:prstGeom>
+          <a:noFill/>
+        </p:spPr>
+        <p:txBody>
+          <a:bodyPr wrap="square" anchor="t" lIns="0" rIns="0" tIns="0" bIns="0"/>
+          <a:lstStyle/>
+          <a:p>
+            <a:pPr algn="l"/>
+            <a:r>
+              <a:rPr sz="1100" b="1" i="0">
+                <a:solidFill>
+                  <a:srgbClr val="54595D"/>
+                </a:solidFill>
+                <a:latin typeface="Calibri"/>
+              </a:rPr>
+              <a:t>OCCUPATIONAL SPECIALISM  ·  Specialism Content Area 1</a:t>
+            </a:r>
+          </a:p>
+        </p:txBody>
+      </p:sp>
+      <p:sp>
+        <p:nvSpPr>
+          <p:cNvPr id="3" name="TextBox 2"/>
+          <p:cNvSpPr txBox="1"/>
+          <p:nvPr/>
+        </p:nvSpPr>
+        <p:spPr>
+          <a:xfrm>
+            <a:off x="548640" y="566928"/>
+            <a:ext cx="11094415" cy="822960"/>
+          </a:xfrm>
+          <a:prstGeom prst="rect">
+            <a:avLst/>
+          </a:prstGeom>
+          <a:noFill/>
+        </p:spPr>
+        <p:txBody>
+          <a:bodyPr wrap="square" anchor="ctr" lIns="0" rIns="0" tIns="0" bIns="0"/>
+          <a:lstStyle/>
+          <a:p>
+            <a:pPr algn="l"/>
+            <a:r>
+              <a:rPr sz="3200" b="1" i="0">
+                <a:solidFill>
+                  <a:srgbClr val="03306E"/>
+                </a:solidFill>
+                <a:latin typeface="Cambria"/>
+              </a:rPr>
+              <a:t>Answers</a:t>
+            </a:r>
+          </a:p>
+        </p:txBody>
+      </p:sp>
+      <p:sp>
+        <p:nvSpPr>
+          <p:cNvPr id="4" name="TextBox 3"/>
+          <p:cNvSpPr txBox="1"/>
+          <p:nvPr/>
+        </p:nvSpPr>
+        <p:spPr>
+          <a:xfrm>
+            <a:off x="548640" y="6446520"/>
+            <a:ext cx="8229600" cy="274320"/>
+          </a:xfrm>
+          <a:prstGeom prst="rect">
+            <a:avLst/>
+          </a:prstGeom>
+          <a:noFill/>
+        </p:spPr>
+        <p:txBody>
+          <a:bodyPr wrap="square" anchor="t" lIns="0" rIns="0" tIns="0" bIns="0"/>
+          <a:lstStyle/>
+          <a:p>
+            <a:pPr algn="l"/>
+            <a:r>
+              <a:rPr sz="1000" b="0" i="0">
+                <a:solidFill>
+                  <a:srgbClr val="54595D"/>
+                </a:solidFill>
+                <a:latin typeface="Calibri"/>
+              </a:rPr>
+              <a:t>Digital Software Development T Level  ·  The Software Development Lifecycle and Requirements</a:t>
+            </a:r>
+          </a:p>
+        </p:txBody>
+      </p:sp>
+      <p:sp>
+        <p:nvSpPr>
+          <p:cNvPr id="5" name="TextBox 4"/>
+          <p:cNvSpPr txBox="1"/>
+          <p:nvPr/>
+        </p:nvSpPr>
+        <p:spPr>
+          <a:xfrm>
+            <a:off x="10728655" y="6446520"/>
+            <a:ext cx="914400" cy="274320"/>
+          </a:xfrm>
+          <a:prstGeom prst="rect">
+            <a:avLst/>
+          </a:prstGeom>
+          <a:noFill/>
+        </p:spPr>
+        <p:txBody>
+          <a:bodyPr wrap="square" anchor="t" lIns="0" rIns="0" tIns="0" bIns="0"/>
+          <a:lstStyle/>
+          <a:p>
+            <a:pPr algn="r"/>
+            <a:r>
+              <a:rPr sz="1000" b="0" i="0">
+                <a:solidFill>
+                  <a:srgbClr val="54595D"/>
+                </a:solidFill>
+                <a:latin typeface="Calibri"/>
+              </a:rPr>
+              <a:t>14</a:t>
+            </a:r>
+          </a:p>
+        </p:txBody>
+      </p:sp>
+      <p:sp>
+        <p:nvSpPr>
+          <p:cNvPr id="6" name="Oval 5"/>
+          <p:cNvSpPr/>
+          <p:nvPr/>
+        </p:nvSpPr>
+        <p:spPr>
+          <a:xfrm>
+            <a:off x="548640" y="1618488"/>
+            <a:ext cx="411480" cy="411480"/>
+          </a:xfrm>
+          <a:prstGeom prst="ellipse">
+            <a:avLst/>
+          </a:prstGeom>
+          <a:solidFill>
+            <a:srgbClr val="33C17A"/>
+          </a:solidFill>
+          <a:ln>
+            <a:noFill/>
+          </a:ln>
+          <a:effectLst/>
+        </p:spPr>
+        <p:style>
+          <a:lnRef idx="1">
+            <a:schemeClr val="accent1"/>
+          </a:lnRef>
+          <a:fillRef idx="3">
+            <a:schemeClr val="accent1"/>
+          </a:fillRef>
+          <a:effectRef idx="2">
+            <a:schemeClr val="accent1"/>
+          </a:effectRef>
+          <a:fontRef idx="minor">
+            <a:schemeClr val="lt1"/>
+          </a:fontRef>
+        </p:style>
+        <p:txBody>
+          <a:bodyPr rtlCol="0" anchor="ctr" lIns="0" rIns="0" tIns="0" bIns="0"/>
+          <a:lstStyle/>
+          <a:p>
+            <a:pPr algn="ctr"/>
+            <a:r>
+              <a:rPr sz="1400" b="1">
+                <a:solidFill>
+                  <a:srgbClr val="202122"/>
+                </a:solidFill>
+                <a:latin typeface="Calibri"/>
+              </a:rPr>
+              <a:t>1</a:t>
+            </a:r>
+          </a:p>
+        </p:txBody>
+      </p:sp>
+      <p:sp>
+        <p:nvSpPr>
+          <p:cNvPr id="7" name="TextBox 6"/>
+          <p:cNvSpPr txBox="1"/>
+          <p:nvPr/>
+        </p:nvSpPr>
+        <p:spPr>
+          <a:xfrm>
+            <a:off x="1234440" y="1600200"/>
+            <a:ext cx="10408615" cy="791870"/>
+          </a:xfrm>
+          <a:prstGeom prst="rect">
+            <a:avLst/>
+          </a:prstGeom>
+          <a:noFill/>
+        </p:spPr>
+        <p:txBody>
+          <a:bodyPr wrap="square" anchor="t" lIns="0" rIns="0" tIns="0" bIns="0"/>
+          <a:lstStyle/>
+          <a:p>
+            <a:pPr algn="l"/>
+            <a:r>
+              <a:rPr sz="1800" b="0" i="0">
+                <a:solidFill>
+                  <a:srgbClr val="54595D"/>
+                </a:solidFill>
+                <a:latin typeface="Calibri"/>
+              </a:rPr>
+              <a:t>Name the SDLC stage where user stories are written.</a:t>
+            </a:r>
+          </a:p>
+          <a:p>
+            <a:r>
+              <a:rPr sz="1800" b="1">
+                <a:solidFill>
+                  <a:srgbClr val="03306E"/>
+                </a:solidFill>
+                <a:latin typeface="Calibri"/>
+              </a:rPr>
+              <a:t>Performing a user analysis.</a:t>
+            </a:r>
+          </a:p>
+        </p:txBody>
+      </p:sp>
+      <p:sp>
+        <p:nvSpPr>
+          <p:cNvPr id="8" name="Oval 7"/>
+          <p:cNvSpPr/>
+          <p:nvPr/>
+        </p:nvSpPr>
+        <p:spPr>
+          <a:xfrm>
+            <a:off x="548640" y="2574950"/>
+            <a:ext cx="411480" cy="411480"/>
+          </a:xfrm>
+          <a:prstGeom prst="ellipse">
+            <a:avLst/>
+          </a:prstGeom>
+          <a:solidFill>
+            <a:srgbClr val="33C17A"/>
+          </a:solidFill>
+          <a:ln>
+            <a:noFill/>
+          </a:ln>
+          <a:effectLst/>
+        </p:spPr>
+        <p:style>
+          <a:lnRef idx="1">
+            <a:schemeClr val="accent1"/>
+          </a:lnRef>
+          <a:fillRef idx="3">
+            <a:schemeClr val="accent1"/>
+          </a:fillRef>
+          <a:effectRef idx="2">
+            <a:schemeClr val="accent1"/>
+          </a:effectRef>
+          <a:fontRef idx="minor">
+            <a:schemeClr val="lt1"/>
+          </a:fontRef>
+        </p:style>
+        <p:txBody>
+          <a:bodyPr rtlCol="0" anchor="ctr" lIns="0" rIns="0" tIns="0" bIns="0"/>
+          <a:lstStyle/>
+          <a:p>
+            <a:pPr algn="ctr"/>
+            <a:r>
+              <a:rPr sz="1400" b="1">
+                <a:solidFill>
+                  <a:srgbClr val="202122"/>
+                </a:solidFill>
+                <a:latin typeface="Calibri"/>
+              </a:rPr>
+              <a:t>2</a:t>
+            </a:r>
+          </a:p>
+        </p:txBody>
+      </p:sp>
+      <p:sp>
+        <p:nvSpPr>
+          <p:cNvPr id="9" name="TextBox 8"/>
+          <p:cNvSpPr txBox="1"/>
+          <p:nvPr/>
+        </p:nvSpPr>
+        <p:spPr>
+          <a:xfrm>
+            <a:off x="1234440" y="2556662"/>
+            <a:ext cx="10408615" cy="791870"/>
+          </a:xfrm>
+          <a:prstGeom prst="rect">
+            <a:avLst/>
+          </a:prstGeom>
+          <a:noFill/>
+        </p:spPr>
+        <p:txBody>
+          <a:bodyPr wrap="square" anchor="t" lIns="0" rIns="0" tIns="0" bIns="0"/>
+          <a:lstStyle/>
+          <a:p>
+            <a:pPr algn="l"/>
+            <a:r>
+              <a:rPr sz="1800" b="0" i="0">
+                <a:solidFill>
+                  <a:srgbClr val="54595D"/>
+                </a:solidFill>
+                <a:latin typeface="Calibri"/>
+              </a:rPr>
+              <a:t>Is 'the app loads in under 2 seconds' functional or non-functional?</a:t>
+            </a:r>
+          </a:p>
+          <a:p>
+            <a:r>
+              <a:rPr sz="1800" b="1">
+                <a:solidFill>
+                  <a:srgbClr val="03306E"/>
+                </a:solidFill>
+                <a:latin typeface="Calibri"/>
+              </a:rPr>
+              <a:t>Non-functional.</a:t>
+            </a:r>
+          </a:p>
+        </p:txBody>
+      </p:sp>
+      <p:sp>
+        <p:nvSpPr>
+          <p:cNvPr id="10" name="Oval 9"/>
+          <p:cNvSpPr/>
+          <p:nvPr/>
+        </p:nvSpPr>
+        <p:spPr>
+          <a:xfrm>
+            <a:off x="548640" y="3531412"/>
+            <a:ext cx="411480" cy="411480"/>
+          </a:xfrm>
+          <a:prstGeom prst="ellipse">
+            <a:avLst/>
+          </a:prstGeom>
+          <a:solidFill>
+            <a:srgbClr val="33C17A"/>
+          </a:solidFill>
+          <a:ln>
+            <a:noFill/>
+          </a:ln>
+          <a:effectLst/>
+        </p:spPr>
+        <p:style>
+          <a:lnRef idx="1">
+            <a:schemeClr val="accent1"/>
+          </a:lnRef>
+          <a:fillRef idx="3">
+            <a:schemeClr val="accent1"/>
+          </a:fillRef>
+          <a:effectRef idx="2">
+            <a:schemeClr val="accent1"/>
+          </a:effectRef>
+          <a:fontRef idx="minor">
+            <a:schemeClr val="lt1"/>
+          </a:fontRef>
+        </p:style>
+        <p:txBody>
+          <a:bodyPr rtlCol="0" anchor="ctr" lIns="0" rIns="0" tIns="0" bIns="0"/>
+          <a:lstStyle/>
+          <a:p>
+            <a:pPr algn="ctr"/>
+            <a:r>
+              <a:rPr sz="1400" b="1">
+                <a:solidFill>
+                  <a:srgbClr val="202122"/>
+                </a:solidFill>
+                <a:latin typeface="Calibri"/>
+              </a:rPr>
+              <a:t>3</a:t>
+            </a:r>
+          </a:p>
+        </p:txBody>
+      </p:sp>
+      <p:sp>
+        <p:nvSpPr>
+          <p:cNvPr id="11" name="TextBox 10"/>
+          <p:cNvSpPr txBox="1"/>
+          <p:nvPr/>
+        </p:nvSpPr>
+        <p:spPr>
+          <a:xfrm>
+            <a:off x="1234440" y="3513124"/>
+            <a:ext cx="10408615" cy="791870"/>
+          </a:xfrm>
+          <a:prstGeom prst="rect">
+            <a:avLst/>
+          </a:prstGeom>
+          <a:noFill/>
+        </p:spPr>
+        <p:txBody>
+          <a:bodyPr wrap="square" anchor="t" lIns="0" rIns="0" tIns="0" bIns="0"/>
+          <a:lstStyle/>
+          <a:p>
+            <a:pPr algn="l"/>
+            <a:r>
+              <a:rPr sz="1800" b="0" i="0">
+                <a:solidFill>
+                  <a:srgbClr val="54595D"/>
+                </a:solidFill>
+                <a:latin typeface="Calibri"/>
+              </a:rPr>
+              <a:t>What is secure by design?</a:t>
+            </a:r>
+          </a:p>
+          <a:p>
+            <a:r>
+              <a:rPr sz="1800" b="1">
+                <a:solidFill>
+                  <a:srgbClr val="03306E"/>
+                </a:solidFill>
+                <a:latin typeface="Calibri"/>
+              </a:rPr>
+              <a:t>Building security into decisions from the start.</a:t>
+            </a:r>
+          </a:p>
+        </p:txBody>
+      </p:sp>
+      <p:sp>
+        <p:nvSpPr>
+          <p:cNvPr id="12" name="Oval 11"/>
+          <p:cNvSpPr/>
+          <p:nvPr/>
+        </p:nvSpPr>
+        <p:spPr>
+          <a:xfrm>
+            <a:off x="548640" y="4487875"/>
+            <a:ext cx="411480" cy="411480"/>
+          </a:xfrm>
+          <a:prstGeom prst="ellipse">
+            <a:avLst/>
+          </a:prstGeom>
+          <a:solidFill>
+            <a:srgbClr val="33C17A"/>
+          </a:solidFill>
+          <a:ln>
+            <a:noFill/>
+          </a:ln>
+          <a:effectLst/>
+        </p:spPr>
+        <p:style>
+          <a:lnRef idx="1">
+            <a:schemeClr val="accent1"/>
+          </a:lnRef>
+          <a:fillRef idx="3">
+            <a:schemeClr val="accent1"/>
+          </a:fillRef>
+          <a:effectRef idx="2">
+            <a:schemeClr val="accent1"/>
+          </a:effectRef>
+          <a:fontRef idx="minor">
+            <a:schemeClr val="lt1"/>
+          </a:fontRef>
+        </p:style>
+        <p:txBody>
+          <a:bodyPr rtlCol="0" anchor="ctr" lIns="0" rIns="0" tIns="0" bIns="0"/>
+          <a:lstStyle/>
+          <a:p>
+            <a:pPr algn="ctr"/>
+            <a:r>
+              <a:rPr sz="1400" b="1">
+                <a:solidFill>
+                  <a:srgbClr val="202122"/>
+                </a:solidFill>
+                <a:latin typeface="Calibri"/>
+              </a:rPr>
+              <a:t>4</a:t>
+            </a:r>
+          </a:p>
+        </p:txBody>
+      </p:sp>
+      <p:sp>
+        <p:nvSpPr>
+          <p:cNvPr id="13" name="TextBox 12"/>
+          <p:cNvSpPr txBox="1"/>
+          <p:nvPr/>
+        </p:nvSpPr>
+        <p:spPr>
+          <a:xfrm>
+            <a:off x="1234440" y="4469587"/>
+            <a:ext cx="10408615" cy="791870"/>
+          </a:xfrm>
+          <a:prstGeom prst="rect">
+            <a:avLst/>
+          </a:prstGeom>
+          <a:noFill/>
+        </p:spPr>
+        <p:txBody>
+          <a:bodyPr wrap="square" anchor="t" lIns="0" rIns="0" tIns="0" bIns="0"/>
+          <a:lstStyle/>
+          <a:p>
+            <a:pPr algn="l"/>
+            <a:r>
+              <a:rPr sz="1800" b="0" i="0">
+                <a:solidFill>
+                  <a:srgbClr val="54595D"/>
+                </a:solidFill>
+                <a:latin typeface="Calibri"/>
+              </a:rPr>
+              <a:t>What is spike testing used for?</a:t>
+            </a:r>
+          </a:p>
+          <a:p>
+            <a:r>
+              <a:rPr sz="1800" b="1">
+                <a:solidFill>
+                  <a:srgbClr val="03306E"/>
+                </a:solidFill>
+                <a:latin typeface="Calibri"/>
+              </a:rPr>
+              <a:t>Early investigation to establish requirements and scope.</a:t>
+            </a:r>
+          </a:p>
+        </p:txBody>
+      </p:sp>
+      <p:sp>
+        <p:nvSpPr>
+          <p:cNvPr id="14" name="Oval 13"/>
+          <p:cNvSpPr/>
+          <p:nvPr/>
+        </p:nvSpPr>
+        <p:spPr>
+          <a:xfrm>
+            <a:off x="548640" y="5444337"/>
+            <a:ext cx="411480" cy="411480"/>
+          </a:xfrm>
+          <a:prstGeom prst="ellipse">
+            <a:avLst/>
+          </a:prstGeom>
+          <a:solidFill>
+            <a:srgbClr val="33C17A"/>
+          </a:solidFill>
+          <a:ln>
+            <a:noFill/>
+          </a:ln>
+          <a:effectLst/>
+        </p:spPr>
+        <p:style>
+          <a:lnRef idx="1">
+            <a:schemeClr val="accent1"/>
+          </a:lnRef>
+          <a:fillRef idx="3">
+            <a:schemeClr val="accent1"/>
+          </a:fillRef>
+          <a:effectRef idx="2">
+            <a:schemeClr val="accent1"/>
+          </a:effectRef>
+          <a:fontRef idx="minor">
+            <a:schemeClr val="lt1"/>
+          </a:fontRef>
+        </p:style>
+        <p:txBody>
+          <a:bodyPr rtlCol="0" anchor="ctr" lIns="0" rIns="0" tIns="0" bIns="0"/>
+          <a:lstStyle/>
+          <a:p>
+            <a:pPr algn="ctr"/>
+            <a:r>
+              <a:rPr sz="1400" b="1">
+                <a:solidFill>
+                  <a:srgbClr val="202122"/>
+                </a:solidFill>
+                <a:latin typeface="Calibri"/>
+              </a:rPr>
+              <a:t>5</a:t>
+            </a:r>
+          </a:p>
+        </p:txBody>
+      </p:sp>
+      <p:sp>
+        <p:nvSpPr>
+          <p:cNvPr id="15" name="TextBox 14"/>
+          <p:cNvSpPr txBox="1"/>
+          <p:nvPr/>
+        </p:nvSpPr>
+        <p:spPr>
+          <a:xfrm>
+            <a:off x="1234440" y="5426049"/>
+            <a:ext cx="10408615" cy="791870"/>
+          </a:xfrm>
+          <a:prstGeom prst="rect">
+            <a:avLst/>
+          </a:prstGeom>
+          <a:noFill/>
+        </p:spPr>
+        <p:txBody>
+          <a:bodyPr wrap="square" anchor="t" lIns="0" rIns="0" tIns="0" bIns="0"/>
+          <a:lstStyle/>
+          <a:p>
+            <a:pPr algn="l"/>
+            <a:r>
+              <a:rPr sz="1800" b="0" i="0">
+                <a:solidFill>
+                  <a:srgbClr val="54595D"/>
+                </a:solidFill>
+                <a:latin typeface="Calibri"/>
+              </a:rPr>
+              <a:t>Why review AI-generated code?</a:t>
+            </a:r>
+          </a:p>
+          <a:p>
+            <a:r>
+              <a:rPr sz="1800" b="1">
+                <a:solidFill>
+                  <a:srgbClr val="03306E"/>
+                </a:solidFill>
+                <a:latin typeface="Calibri"/>
+              </a:rPr>
+              <a:t>To make sure it actually meets the requirements.</a:t>
+            </a:r>
+          </a:p>
+        </p:txBody>
+      </p:sp>
+    </p:spTree>
+  </p:cSld>
+  <p:clrMapOvr>
+    <a:masterClrMapping/>
+  </p:clrMapOvr>
+</p:sld>
+</file>
+
+<file path=ppt/slides/slide15.xml><?xml version="1.0" encoding="utf-8"?>
+<p:sld xmlns:a="http://schemas.openxmlformats.org/drawingml/2006/main" xmlns:p="http://schemas.openxmlformats.org/presentationml/2006/main" xmlns:r="http://schemas.openxmlformats.org/officeDocument/2006/relationships">
+  <p:cSld>
+    <p:bg>
+      <p:bgPr>
+        <a:solidFill>
+          <a:srgbClr val="FFFFFF"/>
+        </a:solidFill>
+        <a:effectLst/>
+      </p:bgPr>
+    </p:bg>
+    <p:spTree>
+      <p:nvGrpSpPr>
+        <p:cNvPr id="1" name=""/>
+        <p:cNvGrpSpPr/>
+        <p:nvPr/>
+      </p:nvGrpSpPr>
+      <p:grpSpPr/>
+      <p:sp>
+        <p:nvSpPr>
+          <p:cNvPr id="2" name="TextBox 1"/>
+          <p:cNvSpPr txBox="1"/>
+          <p:nvPr/>
+        </p:nvSpPr>
+        <p:spPr>
+          <a:xfrm>
+            <a:off x="548640" y="320040"/>
+            <a:ext cx="11094415" cy="274320"/>
+          </a:xfrm>
+          <a:prstGeom prst="rect">
+            <a:avLst/>
+          </a:prstGeom>
+          <a:noFill/>
+        </p:spPr>
+        <p:txBody>
+          <a:bodyPr wrap="square" anchor="t" lIns="0" rIns="0" tIns="0" bIns="0"/>
+          <a:lstStyle/>
+          <a:p>
+            <a:pPr algn="l"/>
+            <a:r>
+              <a:rPr sz="1100" b="1" i="0">
+                <a:solidFill>
+                  <a:srgbClr val="54595D"/>
+                </a:solidFill>
+                <a:latin typeface="Calibri"/>
+              </a:rPr>
+              <a:t>OCCUPATIONAL SPECIALISM  ·  Specialism Content Area 1</a:t>
+            </a:r>
+          </a:p>
+        </p:txBody>
+      </p:sp>
+      <p:sp>
+        <p:nvSpPr>
+          <p:cNvPr id="3" name="TextBox 2"/>
+          <p:cNvSpPr txBox="1"/>
+          <p:nvPr/>
+        </p:nvSpPr>
+        <p:spPr>
+          <a:xfrm>
+            <a:off x="548640" y="566928"/>
+            <a:ext cx="11094415" cy="822960"/>
+          </a:xfrm>
+          <a:prstGeom prst="rect">
+            <a:avLst/>
+          </a:prstGeom>
+          <a:noFill/>
+        </p:spPr>
+        <p:txBody>
+          <a:bodyPr wrap="square" anchor="ctr" lIns="0" rIns="0" tIns="0" bIns="0"/>
+          <a:lstStyle/>
+          <a:p>
+            <a:pPr algn="l"/>
+            <a:r>
+              <a:rPr sz="3200" b="1" i="0">
+                <a:solidFill>
+                  <a:srgbClr val="03306E"/>
+                </a:solidFill>
+                <a:latin typeface="Cambria"/>
+              </a:rPr>
+              <a:t>Activity: Requirements for the bakery app</a:t>
+            </a:r>
+          </a:p>
+        </p:txBody>
+      </p:sp>
+      <p:sp>
+        <p:nvSpPr>
+          <p:cNvPr id="4" name="TextBox 3"/>
+          <p:cNvSpPr txBox="1"/>
+          <p:nvPr/>
+        </p:nvSpPr>
+        <p:spPr>
+          <a:xfrm>
+            <a:off x="548640" y="6446520"/>
+            <a:ext cx="8229600" cy="274320"/>
+          </a:xfrm>
+          <a:prstGeom prst="rect">
+            <a:avLst/>
+          </a:prstGeom>
+          <a:noFill/>
+        </p:spPr>
+        <p:txBody>
+          <a:bodyPr wrap="square" anchor="t" lIns="0" rIns="0" tIns="0" bIns="0"/>
+          <a:lstStyle/>
+          <a:p>
+            <a:pPr algn="l"/>
+            <a:r>
+              <a:rPr sz="1000" b="0" i="0">
+                <a:solidFill>
+                  <a:srgbClr val="54595D"/>
+                </a:solidFill>
+                <a:latin typeface="Calibri"/>
+              </a:rPr>
+              <a:t>Digital Software Development T Level  ·  The Software Development Lifecycle and Requirements</a:t>
+            </a:r>
+          </a:p>
+        </p:txBody>
+      </p:sp>
+      <p:sp>
+        <p:nvSpPr>
+          <p:cNvPr id="5" name="TextBox 4"/>
+          <p:cNvSpPr txBox="1"/>
+          <p:nvPr/>
+        </p:nvSpPr>
+        <p:spPr>
+          <a:xfrm>
+            <a:off x="10728655" y="6446520"/>
+            <a:ext cx="914400" cy="274320"/>
+          </a:xfrm>
+          <a:prstGeom prst="rect">
+            <a:avLst/>
+          </a:prstGeom>
+          <a:noFill/>
+        </p:spPr>
+        <p:txBody>
+          <a:bodyPr wrap="square" anchor="t" lIns="0" rIns="0" tIns="0" bIns="0"/>
+          <a:lstStyle/>
+          <a:p>
+            <a:pPr algn="r"/>
+            <a:r>
+              <a:rPr sz="1000" b="0" i="0">
+                <a:solidFill>
+                  <a:srgbClr val="54595D"/>
+                </a:solidFill>
+                <a:latin typeface="Calibri"/>
+              </a:rPr>
+              <a:t>15</a:t>
+            </a:r>
+          </a:p>
+        </p:txBody>
+      </p:sp>
+      <p:sp>
+        <p:nvSpPr>
+          <p:cNvPr id="6" name="Rounded Rectangle 5"/>
+          <p:cNvSpPr/>
+          <p:nvPr/>
+        </p:nvSpPr>
+        <p:spPr>
+          <a:xfrm>
+            <a:off x="548640" y="1508760"/>
+            <a:ext cx="2011680" cy="457200"/>
+          </a:xfrm>
+          <a:prstGeom prst="roundRect">
+            <a:avLst>
+              <a:gd name="adj" fmla="val 50000"/>
+            </a:avLst>
+          </a:prstGeom>
+          <a:solidFill>
+            <a:srgbClr val="33C17A"/>
+          </a:solidFill>
+          <a:ln>
+            <a:noFill/>
+          </a:ln>
+          <a:effectLst/>
+        </p:spPr>
+        <p:style>
+          <a:lnRef idx="1">
+            <a:schemeClr val="accent1"/>
+          </a:lnRef>
+          <a:fillRef idx="3">
+            <a:schemeClr val="accent1"/>
+          </a:fillRef>
+          <a:effectRef idx="2">
+            <a:schemeClr val="accent1"/>
+          </a:effectRef>
+          <a:fontRef idx="minor">
+            <a:schemeClr val="lt1"/>
+          </a:fontRef>
+        </p:style>
+        <p:txBody>
+          <a:bodyPr rtlCol="0" anchor="ctr"/>
+          <a:lstStyle/>
+          <a:p/>
+        </p:txBody>
+      </p:sp>
+      <p:sp>
+        <p:nvSpPr>
+          <p:cNvPr id="7" name="TextBox 6"/>
+          <p:cNvSpPr txBox="1"/>
+          <p:nvPr/>
+        </p:nvSpPr>
+        <p:spPr>
+          <a:xfrm>
+            <a:off x="548640" y="1508760"/>
+            <a:ext cx="2011680" cy="457200"/>
+          </a:xfrm>
+          <a:prstGeom prst="rect">
+            <a:avLst/>
+          </a:prstGeom>
+          <a:noFill/>
+        </p:spPr>
+        <p:txBody>
+          <a:bodyPr wrap="square" anchor="ctr" lIns="0" rIns="0" tIns="0" bIns="0"/>
+          <a:lstStyle/>
+          <a:p>
+            <a:pPr algn="ctr"/>
+            <a:r>
+              <a:rPr sz="1400" b="1" i="0">
+                <a:solidFill>
+                  <a:srgbClr val="202122"/>
+                </a:solidFill>
+                <a:latin typeface="Calibri"/>
+              </a:rPr>
+              <a:t>30 minutes</a:t>
+            </a:r>
+          </a:p>
+        </p:txBody>
+      </p:sp>
+      <p:sp>
+        <p:nvSpPr>
+          <p:cNvPr id="8" name="TextBox 7"/>
+          <p:cNvSpPr txBox="1"/>
+          <p:nvPr/>
+        </p:nvSpPr>
+        <p:spPr>
+          <a:xfrm>
+            <a:off x="2743200" y="1508760"/>
+            <a:ext cx="4754880" cy="457200"/>
+          </a:xfrm>
+          <a:prstGeom prst="rect">
+            <a:avLst/>
+          </a:prstGeom>
+          <a:noFill/>
+        </p:spPr>
+        <p:txBody>
+          <a:bodyPr wrap="square" anchor="ctr" lIns="0" rIns="0" tIns="0" bIns="0"/>
+          <a:lstStyle/>
+          <a:p>
+            <a:pPr algn="l"/>
+            <a:r>
+              <a:rPr sz="1400" b="0" i="1">
+                <a:solidFill>
+                  <a:srgbClr val="54595D"/>
+                </a:solidFill>
+                <a:latin typeface="Calibri"/>
+              </a:rPr>
+              <a:t>Pairs</a:t>
+            </a:r>
+          </a:p>
+        </p:txBody>
+      </p:sp>
+      <p:sp>
+        <p:nvSpPr>
+          <p:cNvPr id="9" name="Oval 8"/>
+          <p:cNvSpPr/>
+          <p:nvPr/>
+        </p:nvSpPr>
+        <p:spPr>
+          <a:xfrm>
+            <a:off x="548640" y="2482596"/>
+            <a:ext cx="384048" cy="384048"/>
+          </a:xfrm>
+          <a:prstGeom prst="ellipse">
+            <a:avLst/>
+          </a:prstGeom>
+          <a:solidFill>
+            <a:srgbClr val="0645AD"/>
+          </a:solidFill>
+          <a:ln>
+            <a:noFill/>
+          </a:ln>
+          <a:effectLst/>
+        </p:spPr>
+        <p:style>
+          <a:lnRef idx="1">
+            <a:schemeClr val="accent1"/>
+          </a:lnRef>
+          <a:fillRef idx="3">
+            <a:schemeClr val="accent1"/>
+          </a:fillRef>
+          <a:effectRef idx="2">
+            <a:schemeClr val="accent1"/>
+          </a:effectRef>
+          <a:fontRef idx="minor">
+            <a:schemeClr val="lt1"/>
+          </a:fontRef>
+        </p:style>
+        <p:txBody>
+          <a:bodyPr rtlCol="0" anchor="ctr" lIns="0" rIns="0" tIns="0" bIns="0"/>
+          <a:lstStyle/>
+          <a:p>
+            <a:pPr algn="ctr"/>
+            <a:r>
+              <a:rPr sz="1300" b="1">
+                <a:solidFill>
+                  <a:srgbClr val="FFFFFF"/>
+                </a:solidFill>
+                <a:latin typeface="Calibri"/>
+              </a:rPr>
+              <a:t>1</a:t>
+            </a:r>
+          </a:p>
+        </p:txBody>
+      </p:sp>
+      <p:sp>
+        <p:nvSpPr>
+          <p:cNvPr id="10" name="TextBox 9"/>
+          <p:cNvSpPr txBox="1"/>
+          <p:nvPr/>
+        </p:nvSpPr>
+        <p:spPr>
+          <a:xfrm>
+            <a:off x="1143000" y="2240280"/>
+            <a:ext cx="5943600" cy="868680"/>
+          </a:xfrm>
+          <a:prstGeom prst="rect">
+            <a:avLst/>
+          </a:prstGeom>
+          <a:noFill/>
+        </p:spPr>
+        <p:txBody>
+          <a:bodyPr wrap="square" anchor="ctr" lIns="0" rIns="0" tIns="0" bIns="0"/>
+          <a:lstStyle/>
+          <a:p>
+            <a:pPr algn="l"/>
+            <a:r>
+              <a:rPr sz="1700" b="0" i="0">
+                <a:solidFill>
+                  <a:srgbClr val="202122"/>
+                </a:solidFill>
+                <a:latin typeface="Calibri"/>
+              </a:rPr>
+              <a:t>Write five user stories for the bakery app.</a:t>
+            </a:r>
+          </a:p>
+        </p:txBody>
+      </p:sp>
+      <p:sp>
+        <p:nvSpPr>
+          <p:cNvPr id="11" name="Oval 10"/>
+          <p:cNvSpPr/>
+          <p:nvPr/>
+        </p:nvSpPr>
+        <p:spPr>
+          <a:xfrm>
+            <a:off x="548640" y="3461004"/>
+            <a:ext cx="384048" cy="384048"/>
+          </a:xfrm>
+          <a:prstGeom prst="ellipse">
+            <a:avLst/>
+          </a:prstGeom>
+          <a:solidFill>
+            <a:srgbClr val="0645AD"/>
+          </a:solidFill>
+          <a:ln>
+            <a:noFill/>
+          </a:ln>
+          <a:effectLst/>
+        </p:spPr>
+        <p:style>
+          <a:lnRef idx="1">
+            <a:schemeClr val="accent1"/>
+          </a:lnRef>
+          <a:fillRef idx="3">
+            <a:schemeClr val="accent1"/>
+          </a:fillRef>
+          <a:effectRef idx="2">
+            <a:schemeClr val="accent1"/>
+          </a:effectRef>
+          <a:fontRef idx="minor">
+            <a:schemeClr val="lt1"/>
+          </a:fontRef>
+        </p:style>
+        <p:txBody>
+          <a:bodyPr rtlCol="0" anchor="ctr" lIns="0" rIns="0" tIns="0" bIns="0"/>
+          <a:lstStyle/>
+          <a:p>
+            <a:pPr algn="ctr"/>
+            <a:r>
+              <a:rPr sz="1300" b="1">
+                <a:solidFill>
+                  <a:srgbClr val="FFFFFF"/>
+                </a:solidFill>
+                <a:latin typeface="Calibri"/>
+              </a:rPr>
+              <a:t>2</a:t>
+            </a:r>
+          </a:p>
+        </p:txBody>
+      </p:sp>
+      <p:sp>
+        <p:nvSpPr>
+          <p:cNvPr id="12" name="TextBox 11"/>
+          <p:cNvSpPr txBox="1"/>
+          <p:nvPr/>
+        </p:nvSpPr>
+        <p:spPr>
+          <a:xfrm>
+            <a:off x="1143000" y="3218688"/>
+            <a:ext cx="5943600" cy="868680"/>
+          </a:xfrm>
+          <a:prstGeom prst="rect">
+            <a:avLst/>
+          </a:prstGeom>
+          <a:noFill/>
+        </p:spPr>
+        <p:txBody>
+          <a:bodyPr wrap="square" anchor="ctr" lIns="0" rIns="0" tIns="0" bIns="0"/>
+          <a:lstStyle/>
+          <a:p>
+            <a:pPr algn="l"/>
+            <a:r>
+              <a:rPr sz="1700" b="0" i="0">
+                <a:solidFill>
+                  <a:srgbClr val="202122"/>
+                </a:solidFill>
+                <a:latin typeface="Calibri"/>
+              </a:rPr>
+              <a:t>Turn them into functional requirements.</a:t>
+            </a:r>
+          </a:p>
+        </p:txBody>
+      </p:sp>
+      <p:sp>
+        <p:nvSpPr>
+          <p:cNvPr id="13" name="Oval 12"/>
+          <p:cNvSpPr/>
+          <p:nvPr/>
+        </p:nvSpPr>
+        <p:spPr>
+          <a:xfrm>
+            <a:off x="548640" y="4439412"/>
+            <a:ext cx="384048" cy="384048"/>
+          </a:xfrm>
+          <a:prstGeom prst="ellipse">
+            <a:avLst/>
+          </a:prstGeom>
+          <a:solidFill>
+            <a:srgbClr val="0645AD"/>
+          </a:solidFill>
+          <a:ln>
+            <a:noFill/>
+          </a:ln>
+          <a:effectLst/>
+        </p:spPr>
+        <p:style>
+          <a:lnRef idx="1">
+            <a:schemeClr val="accent1"/>
+          </a:lnRef>
+          <a:fillRef idx="3">
+            <a:schemeClr val="accent1"/>
+          </a:fillRef>
+          <a:effectRef idx="2">
+            <a:schemeClr val="accent1"/>
+          </a:effectRef>
+          <a:fontRef idx="minor">
+            <a:schemeClr val="lt1"/>
+          </a:fontRef>
+        </p:style>
+        <p:txBody>
+          <a:bodyPr rtlCol="0" anchor="ctr" lIns="0" rIns="0" tIns="0" bIns="0"/>
+          <a:lstStyle/>
+          <a:p>
+            <a:pPr algn="ctr"/>
+            <a:r>
+              <a:rPr sz="1300" b="1">
+                <a:solidFill>
+                  <a:srgbClr val="FFFFFF"/>
+                </a:solidFill>
+                <a:latin typeface="Calibri"/>
+              </a:rPr>
+              <a:t>3</a:t>
+            </a:r>
+          </a:p>
+        </p:txBody>
+      </p:sp>
+      <p:sp>
+        <p:nvSpPr>
+          <p:cNvPr id="14" name="TextBox 13"/>
+          <p:cNvSpPr txBox="1"/>
+          <p:nvPr/>
+        </p:nvSpPr>
+        <p:spPr>
+          <a:xfrm>
+            <a:off x="1143000" y="4197096"/>
+            <a:ext cx="5943600" cy="868680"/>
+          </a:xfrm>
+          <a:prstGeom prst="rect">
+            <a:avLst/>
+          </a:prstGeom>
+          <a:noFill/>
+        </p:spPr>
+        <p:txBody>
+          <a:bodyPr wrap="square" anchor="ctr" lIns="0" rIns="0" tIns="0" bIns="0"/>
+          <a:lstStyle/>
+          <a:p>
+            <a:pPr algn="l"/>
+            <a:r>
+              <a:rPr sz="1700" b="0" i="0">
+                <a:solidFill>
+                  <a:srgbClr val="202122"/>
+                </a:solidFill>
+                <a:latin typeface="Calibri"/>
+              </a:rPr>
+              <a:t>Add four non-functional requirements with measurable KPIs.</a:t>
+            </a:r>
+          </a:p>
+        </p:txBody>
+      </p:sp>
+      <p:sp>
+        <p:nvSpPr>
+          <p:cNvPr id="15" name="Oval 14"/>
+          <p:cNvSpPr/>
+          <p:nvPr/>
+        </p:nvSpPr>
+        <p:spPr>
+          <a:xfrm>
+            <a:off x="548640" y="5417820"/>
+            <a:ext cx="384048" cy="384048"/>
+          </a:xfrm>
+          <a:prstGeom prst="ellipse">
+            <a:avLst/>
+          </a:prstGeom>
+          <a:solidFill>
+            <a:srgbClr val="0645AD"/>
+          </a:solidFill>
+          <a:ln>
+            <a:noFill/>
+          </a:ln>
+          <a:effectLst/>
+        </p:spPr>
+        <p:style>
+          <a:lnRef idx="1">
+            <a:schemeClr val="accent1"/>
+          </a:lnRef>
+          <a:fillRef idx="3">
+            <a:schemeClr val="accent1"/>
+          </a:fillRef>
+          <a:effectRef idx="2">
+            <a:schemeClr val="accent1"/>
+          </a:effectRef>
+          <a:fontRef idx="minor">
+            <a:schemeClr val="lt1"/>
+          </a:fontRef>
+        </p:style>
+        <p:txBody>
+          <a:bodyPr rtlCol="0" anchor="ctr" lIns="0" rIns="0" tIns="0" bIns="0"/>
+          <a:lstStyle/>
+          <a:p>
+            <a:pPr algn="ctr"/>
+            <a:r>
+              <a:rPr sz="1300" b="1">
+                <a:solidFill>
+                  <a:srgbClr val="FFFFFF"/>
+                </a:solidFill>
+                <a:latin typeface="Calibri"/>
+              </a:rPr>
+              <a:t>4</a:t>
+            </a:r>
+          </a:p>
+        </p:txBody>
+      </p:sp>
+      <p:sp>
+        <p:nvSpPr>
+          <p:cNvPr id="16" name="TextBox 15"/>
+          <p:cNvSpPr txBox="1"/>
+          <p:nvPr/>
+        </p:nvSpPr>
+        <p:spPr>
+          <a:xfrm>
+            <a:off x="1143000" y="5175504"/>
+            <a:ext cx="5943600" cy="868680"/>
+          </a:xfrm>
+          <a:prstGeom prst="rect">
+            <a:avLst/>
+          </a:prstGeom>
+          <a:noFill/>
+        </p:spPr>
+        <p:txBody>
+          <a:bodyPr wrap="square" anchor="ctr" lIns="0" rIns="0" tIns="0" bIns="0"/>
+          <a:lstStyle/>
+          <a:p>
+            <a:pPr algn="l"/>
+            <a:r>
+              <a:rPr sz="1700" b="0" i="0">
+                <a:solidFill>
+                  <a:srgbClr val="202122"/>
+                </a:solidFill>
+                <a:latin typeface="Calibri"/>
+              </a:rPr>
+              <a:t>Write acceptance criteria for one user story.</a:t>
+            </a:r>
+          </a:p>
+        </p:txBody>
+      </p:sp>
+      <p:sp>
+        <p:nvSpPr>
+          <p:cNvPr id="17" name="Rounded Rectangle 16"/>
+          <p:cNvSpPr/>
+          <p:nvPr/>
+        </p:nvSpPr>
+        <p:spPr>
+          <a:xfrm>
+            <a:off x="7772400" y="1508760"/>
+            <a:ext cx="3867912" cy="4572000"/>
+          </a:xfrm>
+          <a:prstGeom prst="roundRect">
+            <a:avLst>
+              <a:gd name="adj" fmla="val 8000"/>
+            </a:avLst>
+          </a:prstGeom>
+          <a:solidFill>
+            <a:srgbClr val="EAF3FF"/>
+          </a:solidFill>
+          <a:ln>
+            <a:noFill/>
+          </a:ln>
+          <a:effectLst/>
+        </p:spPr>
+        <p:style>
+          <a:lnRef idx="1">
+            <a:schemeClr val="accent1"/>
+          </a:lnRef>
+          <a:fillRef idx="3">
+            <a:schemeClr val="accent1"/>
+          </a:fillRef>
+          <a:effectRef idx="2">
+            <a:schemeClr val="accent1"/>
+          </a:effectRef>
+          <a:fontRef idx="minor">
+            <a:schemeClr val="lt1"/>
+          </a:fontRef>
+        </p:style>
+        <p:txBody>
+          <a:bodyPr rtlCol="0" anchor="ctr"/>
+          <a:lstStyle/>
+          <a:p/>
+        </p:txBody>
+      </p:sp>
+      <p:sp>
+        <p:nvSpPr>
+          <p:cNvPr id="18" name="TextBox 17"/>
+          <p:cNvSpPr txBox="1"/>
+          <p:nvPr/>
+        </p:nvSpPr>
+        <p:spPr>
+          <a:xfrm>
+            <a:off x="8046720" y="1737360"/>
+            <a:ext cx="3291840" cy="365760"/>
+          </a:xfrm>
+          <a:prstGeom prst="rect">
+            <a:avLst/>
+          </a:prstGeom>
+          <a:noFill/>
+        </p:spPr>
+        <p:txBody>
+          <a:bodyPr wrap="square" anchor="t" lIns="0" rIns="0" tIns="0" bIns="0"/>
+          <a:lstStyle/>
+          <a:p>
+            <a:pPr algn="l"/>
+            <a:r>
+              <a:rPr sz="1300" b="1" i="0">
+                <a:solidFill>
+                  <a:srgbClr val="0645AD"/>
+                </a:solidFill>
+                <a:latin typeface="Calibri"/>
+              </a:rPr>
+              <a:t>SUCCESS CRITERIA</a:t>
+            </a:r>
+          </a:p>
+        </p:txBody>
+      </p:sp>
+      <p:sp>
+        <p:nvSpPr>
+          <p:cNvPr id="19" name="TextBox 18"/>
+          <p:cNvSpPr txBox="1"/>
+          <p:nvPr/>
+        </p:nvSpPr>
+        <p:spPr>
+          <a:xfrm>
+            <a:off x="8046720" y="2240280"/>
+            <a:ext cx="3337560" cy="3657600"/>
+          </a:xfrm>
+          <a:prstGeom prst="rect">
+            <a:avLst/>
+          </a:prstGeom>
+          <a:noFill/>
+        </p:spPr>
+        <p:txBody>
+          <a:bodyPr wrap="square" lIns="0" rIns="0" tIns="0" bIns="0">
+            <a:spAutoFit/>
+          </a:bodyPr>
+          <a:lstStyle/>
+          <a:p>
+            <a:pPr marL="274320" indent="-274320">
+              <a:spcAft>
+                <a:spcPts val="810"/>
+              </a:spcAft>
+              <a:buClr>
+                <a:srgbClr val="0645AD"/>
+              </a:buClr>
+              <a:buFont typeface="Arial"/>
+              <a:buChar char="•"/>
+            </a:pPr>
+            <a:r>
+              <a:rPr sz="1800" b="0">
+                <a:solidFill>
+                  <a:srgbClr val="202122"/>
+                </a:solidFill>
+                <a:latin typeface="Calibri"/>
+              </a:rPr>
+              <a:t>Stories follow 'As a... I want... so that...'</a:t>
+            </a:r>
+          </a:p>
+          <a:p>
+            <a:pPr marL="274320" indent="-274320">
+              <a:spcAft>
+                <a:spcPts val="810"/>
+              </a:spcAft>
+              <a:buClr>
+                <a:srgbClr val="0645AD"/>
+              </a:buClr>
+              <a:buFont typeface="Arial"/>
+              <a:buChar char="•"/>
+            </a:pPr>
+            <a:r>
+              <a:rPr sz="1800" b="0">
+                <a:solidFill>
+                  <a:srgbClr val="202122"/>
+                </a:solidFill>
+                <a:latin typeface="Calibri"/>
+              </a:rPr>
+              <a:t>KPIs are measurable</a:t>
+            </a:r>
+          </a:p>
+          <a:p>
+            <a:pPr marL="274320" indent="-274320">
+              <a:spcAft>
+                <a:spcPts val="810"/>
+              </a:spcAft>
+              <a:buClr>
+                <a:srgbClr val="0645AD"/>
+              </a:buClr>
+              <a:buFont typeface="Arial"/>
+              <a:buChar char="•"/>
+            </a:pPr>
+            <a:r>
+              <a:rPr sz="1800" b="0">
+                <a:solidFill>
+                  <a:srgbClr val="202122"/>
+                </a:solidFill>
+                <a:latin typeface="Calibri"/>
+              </a:rPr>
+              <a:t>Security and accessibility included</a:t>
+            </a:r>
+          </a:p>
+        </p:txBody>
+      </p:sp>
+    </p:spTree>
+  </p:cSld>
+  <p:clrMapOvr>
+    <a:masterClrMapping/>
+  </p:clrMapOvr>
+</p:sld>
+</file>
+
+<file path=ppt/slides/slide16.xml><?xml version="1.0" encoding="utf-8"?>
+<p:sld xmlns:a="http://schemas.openxmlformats.org/drawingml/2006/main" xmlns:p="http://schemas.openxmlformats.org/presentationml/2006/main" xmlns:r="http://schemas.openxmlformats.org/officeDocument/2006/relationships">
+  <p:cSld>
+    <p:bg>
+      <p:bgPr>
+        <a:solidFill>
           <a:srgbClr val="03306E"/>
         </a:solidFill>
         <a:effectLst/>
@@ -5369,20 +9287,86 @@
       </p:sp>
       <p:sp>
         <p:nvSpPr>
-          <p:cNvPr id="6" name="Rectangle 5"/>
+          <p:cNvPr id="6" name="TextBox 5"/>
+          <p:cNvSpPr txBox="1"/>
+          <p:nvPr/>
+        </p:nvSpPr>
+        <p:spPr>
+          <a:xfrm>
+            <a:off x="548640" y="1554480"/>
+            <a:ext cx="6720840" cy="4617720"/>
+          </a:xfrm>
+          <a:prstGeom prst="rect">
+            <a:avLst/>
+          </a:prstGeom>
+          <a:noFill/>
+        </p:spPr>
+        <p:txBody>
+          <a:bodyPr wrap="square" lIns="0" rIns="0" tIns="0" bIns="0">
+            <a:spAutoFit/>
+          </a:bodyPr>
+          <a:lstStyle/>
+          <a:p>
+            <a:pPr>
+              <a:spcAft>
+                <a:spcPts val="1260"/>
+              </a:spcAft>
+            </a:pPr>
+            <a:r>
+              <a:rPr sz="2100" b="0">
+                <a:solidFill>
+                  <a:srgbClr val="202122"/>
+                </a:solidFill>
+                <a:latin typeface="Calibri"/>
+              </a:rPr>
+              <a:t>The software development lifecycle (SDLC) is the set of stages a project moves through.</a:t>
+            </a:r>
+          </a:p>
+          <a:p>
+            <a:pPr>
+              <a:spcAft>
+                <a:spcPts val="1260"/>
+              </a:spcAft>
+            </a:pPr>
+            <a:r>
+              <a:rPr sz="2100" b="1">
+                <a:solidFill>
+                  <a:srgbClr val="202122"/>
+                </a:solidFill>
+                <a:latin typeface="Calibri"/>
+              </a:rPr>
+              <a:t>Research and familiarisation:</a:t>
+            </a:r>
+            <a:r>
+              <a:rPr sz="2100" b="0">
+                <a:solidFill>
+                  <a:srgbClr val="202122"/>
+                </a:solidFill>
+                <a:latin typeface="Calibri"/>
+              </a:rPr>
+              <a:t> understand the brief, the market, existing solutions and your own skills gaps. Planning and requirement analysis: define the scope, requirements, KPIs, schedule, costs, language and risks. User analysis: understand users with user stories, activity diagrams and ERDs. Design: interfaces, algorithms and data, checking any AI-generated code carefully. Develop and test: build a prototype and test it. Deploy: install, configure, document and version-control it. Maintain: support users, fix bugs and release updates.</a:t>
+            </a:r>
+          </a:p>
+        </p:txBody>
+      </p:sp>
+      <p:sp>
+        <p:nvSpPr>
+          <p:cNvPr id="7" name="Rounded Rectangle 6"/>
           <p:cNvSpPr/>
           <p:nvPr/>
         </p:nvSpPr>
         <p:spPr>
           <a:xfrm>
-            <a:off x="1282315" y="2709672"/>
-            <a:ext cx="9627064" cy="36576"/>
-          </a:xfrm>
-          <a:prstGeom prst="rect">
-            <a:avLst/>
+            <a:off x="7772400" y="1554480"/>
+            <a:ext cx="3867912" cy="4526280"/>
+          </a:xfrm>
+          <a:prstGeom prst="roundRect">
+            <a:avLst>
+              <a:gd name="adj" fmla="val 8000"/>
+            </a:avLst>
           </a:prstGeom>
           <a:solidFill>
-            <a:srgbClr val="A9C8F0"/>
+            <a:srgbClr val="03306E"/>
           </a:solidFill>
           <a:ln>
             <a:noFill/>
@@ -5411,14 +9395,14 @@
       </p:sp>
       <p:sp>
         <p:nvSpPr>
-          <p:cNvPr id="7" name="Oval 6"/>
+          <p:cNvPr id="8" name="Oval 7"/>
           <p:cNvSpPr/>
           <p:nvPr/>
         </p:nvSpPr>
         <p:spPr>
           <a:xfrm>
-            <a:off x="962275" y="2407920"/>
-            <a:ext cx="640080" cy="640080"/>
+            <a:off x="8046720" y="1828800"/>
+            <a:ext cx="548640" cy="548640"/>
           </a:xfrm>
           <a:prstGeom prst="ellipse">
             <a:avLst/>
@@ -5451,27 +9435,27 @@
           <a:p>
             <a:pPr algn="ctr"/>
             <a:r>
-              <a:rPr sz="2000" b="1">
+              <a:rPr sz="1300" b="1">
                 <a:solidFill>
                   <a:srgbClr val="202122"/>
                 </a:solidFill>
                 <a:latin typeface="Calibri"/>
               </a:rPr>
-              <a:t>1</a:t>
-            </a:r>
-          </a:p>
-        </p:txBody>
-      </p:sp>
-      <p:sp>
-        <p:nvSpPr>
-          <p:cNvPr id="8" name="TextBox 7"/>
-          <p:cNvSpPr txBox="1"/>
-          <p:nvPr/>
-        </p:nvSpPr>
-        <p:spPr>
-          <a:xfrm>
-            <a:off x="548640" y="3185159"/>
-            <a:ext cx="1467350" cy="731520"/>
+              <a:t>e.g.</a:t>
+            </a:r>
+          </a:p>
+        </p:txBody>
+      </p:sp>
+      <p:sp>
+        <p:nvSpPr>
+          <p:cNvPr id="9" name="TextBox 8"/>
+          <p:cNvSpPr txBox="1"/>
+          <p:nvPr/>
+        </p:nvSpPr>
+        <p:spPr>
+          <a:xfrm>
+            <a:off x="8046720" y="2560320"/>
+            <a:ext cx="3291840" cy="365760"/>
           </a:xfrm>
           <a:prstGeom prst="rect">
             <a:avLst/>
@@ -5482,61 +9466,17 @@
           <a:bodyPr wrap="square" anchor="t" lIns="0" rIns="0" tIns="0" bIns="0"/>
           <a:lstStyle/>
           <a:p>
-            <a:pPr algn="ctr"/>
-            <a:r>
-              <a:rPr sz="1700" b="1" i="0">
-                <a:solidFill>
-                  <a:srgbClr val="03306E"/>
-                </a:solidFill>
-                <a:latin typeface="Calibri"/>
-              </a:rPr>
-              <a:t>Research</a:t>
-            </a:r>
-          </a:p>
-        </p:txBody>
-      </p:sp>
-      <p:sp>
-        <p:nvSpPr>
-          <p:cNvPr id="9" name="Rounded Rectangle 8"/>
-          <p:cNvSpPr/>
-          <p:nvPr/>
-        </p:nvSpPr>
-        <p:spPr>
-          <a:xfrm>
-            <a:off x="548640" y="3962399"/>
-            <a:ext cx="1467350" cy="1402080"/>
-          </a:xfrm>
-          <a:prstGeom prst="roundRect">
-            <a:avLst>
-              <a:gd name="adj" fmla="val 6000"/>
-            </a:avLst>
-          </a:prstGeom>
-          <a:solidFill>
-            <a:srgbClr val="EAF3FF"/>
-          </a:solidFill>
-          <a:ln>
-            <a:noFill/>
-          </a:ln>
-          <a:effectLst/>
-        </p:spPr>
-        <p:style>
-          <a:lnRef idx="1">
-            <a:schemeClr val="accent1"/>
-          </a:lnRef>
-          <a:fillRef idx="3">
-            <a:schemeClr val="accent1"/>
-          </a:fillRef>
-          <a:effectRef idx="2">
-            <a:schemeClr val="accent1"/>
-          </a:effectRef>
-          <a:fontRef idx="minor">
-            <a:schemeClr val="lt1"/>
-          </a:fontRef>
-        </p:style>
-        <p:txBody>
-          <a:bodyPr rtlCol="0" anchor="ctr"/>
-          <a:lstStyle/>
-          <a:p/>
+            <a:pPr algn="l"/>
+            <a:r>
+              <a:rPr sz="1300" b="1" i="0">
+                <a:solidFill>
+                  <a:srgbClr val="A9C8F0"/>
+                </a:solidFill>
+                <a:latin typeface="Calibri"/>
+              </a:rPr>
+              <a:t>EXAMPLE</a:t>
+            </a:r>
+          </a:p>
         </p:txBody>
       </p:sp>
       <p:sp>
@@ -5547,8 +9487,8 @@
         </p:nvSpPr>
         <p:spPr>
           <a:xfrm>
-            <a:off x="685800" y="4099560"/>
-            <a:ext cx="1193030" cy="1127759"/>
+            <a:off x="8046720" y="2971800"/>
+            <a:ext cx="3291840" cy="2971800"/>
           </a:xfrm>
           <a:prstGeom prst="rect">
             <a:avLst/>
@@ -5561,991 +9501,13 @@
           <a:p>
             <a:pPr algn="l"/>
             <a:r>
-              <a:rPr sz="1300" b="0" i="0">
-                <a:solidFill>
-                  <a:srgbClr val="202122"/>
-                </a:solidFill>
-                <a:latin typeface="Calibri"/>
-              </a:rPr>
-              <a:t>Understand the brief, market and your own skills gaps.</a:t>
-            </a:r>
-          </a:p>
-        </p:txBody>
-      </p:sp>
-      <p:sp>
-        <p:nvSpPr>
-          <p:cNvPr id="11" name="Oval 10"/>
-          <p:cNvSpPr/>
-          <p:nvPr/>
-        </p:nvSpPr>
-        <p:spPr>
-          <a:xfrm>
-            <a:off x="2566786" y="2407920"/>
-            <a:ext cx="640080" cy="640080"/>
-          </a:xfrm>
-          <a:prstGeom prst="ellipse">
-            <a:avLst/>
-          </a:prstGeom>
-          <a:solidFill>
-            <a:srgbClr val="33C17A"/>
-          </a:solidFill>
-          <a:ln>
-            <a:noFill/>
-          </a:ln>
-          <a:effectLst/>
-        </p:spPr>
-        <p:style>
-          <a:lnRef idx="1">
-            <a:schemeClr val="accent1"/>
-          </a:lnRef>
-          <a:fillRef idx="3">
-            <a:schemeClr val="accent1"/>
-          </a:fillRef>
-          <a:effectRef idx="2">
-            <a:schemeClr val="accent1"/>
-          </a:effectRef>
-          <a:fontRef idx="minor">
-            <a:schemeClr val="lt1"/>
-          </a:fontRef>
-        </p:style>
-        <p:txBody>
-          <a:bodyPr rtlCol="0" anchor="ctr" lIns="0" rIns="0" tIns="0" bIns="0"/>
-          <a:lstStyle/>
-          <a:p>
-            <a:pPr algn="ctr"/>
-            <a:r>
-              <a:rPr sz="2000" b="1">
-                <a:solidFill>
-                  <a:srgbClr val="202122"/>
-                </a:solidFill>
-                <a:latin typeface="Calibri"/>
-              </a:rPr>
-              <a:t>2</a:t>
-            </a:r>
-          </a:p>
-        </p:txBody>
-      </p:sp>
-      <p:sp>
-        <p:nvSpPr>
-          <p:cNvPr id="12" name="TextBox 11"/>
-          <p:cNvSpPr txBox="1"/>
-          <p:nvPr/>
-        </p:nvSpPr>
-        <p:spPr>
-          <a:xfrm>
-            <a:off x="2153150" y="3185159"/>
-            <a:ext cx="1467350" cy="731520"/>
-          </a:xfrm>
-          <a:prstGeom prst="rect">
-            <a:avLst/>
-          </a:prstGeom>
-          <a:noFill/>
-        </p:spPr>
-        <p:txBody>
-          <a:bodyPr wrap="square" anchor="t" lIns="0" rIns="0" tIns="0" bIns="0"/>
-          <a:lstStyle/>
-          <a:p>
-            <a:pPr algn="ctr"/>
-            <a:r>
-              <a:rPr sz="1700" b="1" i="0">
-                <a:solidFill>
-                  <a:srgbClr val="03306E"/>
-                </a:solidFill>
-                <a:latin typeface="Calibri"/>
-              </a:rPr>
-              <a:t>Plan</a:t>
-            </a:r>
-          </a:p>
-        </p:txBody>
-      </p:sp>
-      <p:sp>
-        <p:nvSpPr>
-          <p:cNvPr id="13" name="Rounded Rectangle 12"/>
-          <p:cNvSpPr/>
-          <p:nvPr/>
-        </p:nvSpPr>
-        <p:spPr>
-          <a:xfrm>
-            <a:off x="2153150" y="3962399"/>
-            <a:ext cx="1467350" cy="1402080"/>
-          </a:xfrm>
-          <a:prstGeom prst="roundRect">
-            <a:avLst>
-              <a:gd name="adj" fmla="val 6000"/>
-            </a:avLst>
-          </a:prstGeom>
-          <a:solidFill>
-            <a:srgbClr val="EAF3FF"/>
-          </a:solidFill>
-          <a:ln>
-            <a:noFill/>
-          </a:ln>
-          <a:effectLst/>
-        </p:spPr>
-        <p:style>
-          <a:lnRef idx="1">
-            <a:schemeClr val="accent1"/>
-          </a:lnRef>
-          <a:fillRef idx="3">
-            <a:schemeClr val="accent1"/>
-          </a:fillRef>
-          <a:effectRef idx="2">
-            <a:schemeClr val="accent1"/>
-          </a:effectRef>
-          <a:fontRef idx="minor">
-            <a:schemeClr val="lt1"/>
-          </a:fontRef>
-        </p:style>
-        <p:txBody>
-          <a:bodyPr rtlCol="0" anchor="ctr"/>
-          <a:lstStyle/>
-          <a:p/>
-        </p:txBody>
-      </p:sp>
-      <p:sp>
-        <p:nvSpPr>
-          <p:cNvPr id="14" name="TextBox 13"/>
-          <p:cNvSpPr txBox="1"/>
-          <p:nvPr/>
-        </p:nvSpPr>
-        <p:spPr>
-          <a:xfrm>
-            <a:off x="2290310" y="4099560"/>
-            <a:ext cx="1193030" cy="1127759"/>
-          </a:xfrm>
-          <a:prstGeom prst="rect">
-            <a:avLst/>
-          </a:prstGeom>
-          <a:noFill/>
-        </p:spPr>
-        <p:txBody>
-          <a:bodyPr wrap="square" anchor="t" lIns="0" rIns="0" tIns="0" bIns="0"/>
-          <a:lstStyle/>
-          <a:p>
-            <a:pPr algn="l"/>
-            <a:r>
-              <a:rPr sz="1300" b="0" i="0">
-                <a:solidFill>
-                  <a:srgbClr val="202122"/>
-                </a:solidFill>
-                <a:latin typeface="Calibri"/>
-              </a:rPr>
-              <a:t>Requirements, KPIs, schedule, costs, language, risks.</a:t>
-            </a:r>
-          </a:p>
-        </p:txBody>
-      </p:sp>
-      <p:sp>
-        <p:nvSpPr>
-          <p:cNvPr id="15" name="Oval 14"/>
-          <p:cNvSpPr/>
-          <p:nvPr/>
-        </p:nvSpPr>
-        <p:spPr>
-          <a:xfrm>
-            <a:off x="4171296" y="2407920"/>
-            <a:ext cx="640080" cy="640080"/>
-          </a:xfrm>
-          <a:prstGeom prst="ellipse">
-            <a:avLst/>
-          </a:prstGeom>
-          <a:solidFill>
-            <a:srgbClr val="33C17A"/>
-          </a:solidFill>
-          <a:ln>
-            <a:noFill/>
-          </a:ln>
-          <a:effectLst/>
-        </p:spPr>
-        <p:style>
-          <a:lnRef idx="1">
-            <a:schemeClr val="accent1"/>
-          </a:lnRef>
-          <a:fillRef idx="3">
-            <a:schemeClr val="accent1"/>
-          </a:fillRef>
-          <a:effectRef idx="2">
-            <a:schemeClr val="accent1"/>
-          </a:effectRef>
-          <a:fontRef idx="minor">
-            <a:schemeClr val="lt1"/>
-          </a:fontRef>
-        </p:style>
-        <p:txBody>
-          <a:bodyPr rtlCol="0" anchor="ctr" lIns="0" rIns="0" tIns="0" bIns="0"/>
-          <a:lstStyle/>
-          <a:p>
-            <a:pPr algn="ctr"/>
-            <a:r>
-              <a:rPr sz="2000" b="1">
-                <a:solidFill>
-                  <a:srgbClr val="202122"/>
-                </a:solidFill>
-                <a:latin typeface="Calibri"/>
-              </a:rPr>
-              <a:t>3</a:t>
-            </a:r>
-          </a:p>
-        </p:txBody>
-      </p:sp>
-      <p:sp>
-        <p:nvSpPr>
-          <p:cNvPr id="16" name="TextBox 15"/>
-          <p:cNvSpPr txBox="1"/>
-          <p:nvPr/>
-        </p:nvSpPr>
-        <p:spPr>
-          <a:xfrm>
-            <a:off x="3757661" y="3185159"/>
-            <a:ext cx="1467350" cy="731520"/>
-          </a:xfrm>
-          <a:prstGeom prst="rect">
-            <a:avLst/>
-          </a:prstGeom>
-          <a:noFill/>
-        </p:spPr>
-        <p:txBody>
-          <a:bodyPr wrap="square" anchor="t" lIns="0" rIns="0" tIns="0" bIns="0"/>
-          <a:lstStyle/>
-          <a:p>
-            <a:pPr algn="ctr"/>
-            <a:r>
-              <a:rPr sz="1700" b="1" i="0">
-                <a:solidFill>
-                  <a:srgbClr val="03306E"/>
-                </a:solidFill>
-                <a:latin typeface="Calibri"/>
-              </a:rPr>
-              <a:t>User analysis</a:t>
-            </a:r>
-          </a:p>
-        </p:txBody>
-      </p:sp>
-      <p:sp>
-        <p:nvSpPr>
-          <p:cNvPr id="17" name="Rounded Rectangle 16"/>
-          <p:cNvSpPr/>
-          <p:nvPr/>
-        </p:nvSpPr>
-        <p:spPr>
-          <a:xfrm>
-            <a:off x="3757661" y="3962399"/>
-            <a:ext cx="1467350" cy="1402080"/>
-          </a:xfrm>
-          <a:prstGeom prst="roundRect">
-            <a:avLst>
-              <a:gd name="adj" fmla="val 6000"/>
-            </a:avLst>
-          </a:prstGeom>
-          <a:solidFill>
-            <a:srgbClr val="EAF3FF"/>
-          </a:solidFill>
-          <a:ln>
-            <a:noFill/>
-          </a:ln>
-          <a:effectLst/>
-        </p:spPr>
-        <p:style>
-          <a:lnRef idx="1">
-            <a:schemeClr val="accent1"/>
-          </a:lnRef>
-          <a:fillRef idx="3">
-            <a:schemeClr val="accent1"/>
-          </a:fillRef>
-          <a:effectRef idx="2">
-            <a:schemeClr val="accent1"/>
-          </a:effectRef>
-          <a:fontRef idx="minor">
-            <a:schemeClr val="lt1"/>
-          </a:fontRef>
-        </p:style>
-        <p:txBody>
-          <a:bodyPr rtlCol="0" anchor="ctr"/>
-          <a:lstStyle/>
-          <a:p/>
-        </p:txBody>
-      </p:sp>
-      <p:sp>
-        <p:nvSpPr>
-          <p:cNvPr id="18" name="TextBox 17"/>
-          <p:cNvSpPr txBox="1"/>
-          <p:nvPr/>
-        </p:nvSpPr>
-        <p:spPr>
-          <a:xfrm>
-            <a:off x="3894821" y="4099560"/>
-            <a:ext cx="1193030" cy="1127759"/>
-          </a:xfrm>
-          <a:prstGeom prst="rect">
-            <a:avLst/>
-          </a:prstGeom>
-          <a:noFill/>
-        </p:spPr>
-        <p:txBody>
-          <a:bodyPr wrap="square" anchor="t" lIns="0" rIns="0" tIns="0" bIns="0"/>
-          <a:lstStyle/>
-          <a:p>
-            <a:pPr algn="l"/>
-            <a:r>
-              <a:rPr sz="1300" b="0" i="0">
-                <a:solidFill>
-                  <a:srgbClr val="202122"/>
-                </a:solidFill>
-                <a:latin typeface="Calibri"/>
-              </a:rPr>
-              <a:t>User stories, activity diagrams, ERDs.</a:t>
-            </a:r>
-          </a:p>
-        </p:txBody>
-      </p:sp>
-      <p:sp>
-        <p:nvSpPr>
-          <p:cNvPr id="19" name="Oval 18"/>
-          <p:cNvSpPr/>
-          <p:nvPr/>
-        </p:nvSpPr>
-        <p:spPr>
-          <a:xfrm>
-            <a:off x="5775807" y="2407920"/>
-            <a:ext cx="640080" cy="640080"/>
-          </a:xfrm>
-          <a:prstGeom prst="ellipse">
-            <a:avLst/>
-          </a:prstGeom>
-          <a:solidFill>
-            <a:srgbClr val="33C17A"/>
-          </a:solidFill>
-          <a:ln>
-            <a:noFill/>
-          </a:ln>
-          <a:effectLst/>
-        </p:spPr>
-        <p:style>
-          <a:lnRef idx="1">
-            <a:schemeClr val="accent1"/>
-          </a:lnRef>
-          <a:fillRef idx="3">
-            <a:schemeClr val="accent1"/>
-          </a:fillRef>
-          <a:effectRef idx="2">
-            <a:schemeClr val="accent1"/>
-          </a:effectRef>
-          <a:fontRef idx="minor">
-            <a:schemeClr val="lt1"/>
-          </a:fontRef>
-        </p:style>
-        <p:txBody>
-          <a:bodyPr rtlCol="0" anchor="ctr" lIns="0" rIns="0" tIns="0" bIns="0"/>
-          <a:lstStyle/>
-          <a:p>
-            <a:pPr algn="ctr"/>
-            <a:r>
-              <a:rPr sz="2000" b="1">
-                <a:solidFill>
-                  <a:srgbClr val="202122"/>
-                </a:solidFill>
-                <a:latin typeface="Calibri"/>
-              </a:rPr>
-              <a:t>4</a:t>
-            </a:r>
-          </a:p>
-        </p:txBody>
-      </p:sp>
-      <p:sp>
-        <p:nvSpPr>
-          <p:cNvPr id="20" name="TextBox 19"/>
-          <p:cNvSpPr txBox="1"/>
-          <p:nvPr/>
-        </p:nvSpPr>
-        <p:spPr>
-          <a:xfrm>
-            <a:off x="5362172" y="3185159"/>
-            <a:ext cx="1467350" cy="731520"/>
-          </a:xfrm>
-          <a:prstGeom prst="rect">
-            <a:avLst/>
-          </a:prstGeom>
-          <a:noFill/>
-        </p:spPr>
-        <p:txBody>
-          <a:bodyPr wrap="square" anchor="t" lIns="0" rIns="0" tIns="0" bIns="0"/>
-          <a:lstStyle/>
-          <a:p>
-            <a:pPr algn="ctr"/>
-            <a:r>
-              <a:rPr sz="1700" b="1" i="0">
-                <a:solidFill>
-                  <a:srgbClr val="03306E"/>
-                </a:solidFill>
-                <a:latin typeface="Calibri"/>
-              </a:rPr>
-              <a:t>Design</a:t>
-            </a:r>
-          </a:p>
-        </p:txBody>
-      </p:sp>
-      <p:sp>
-        <p:nvSpPr>
-          <p:cNvPr id="21" name="Rounded Rectangle 20"/>
-          <p:cNvSpPr/>
-          <p:nvPr/>
-        </p:nvSpPr>
-        <p:spPr>
-          <a:xfrm>
-            <a:off x="5362172" y="3962399"/>
-            <a:ext cx="1467350" cy="1402080"/>
-          </a:xfrm>
-          <a:prstGeom prst="roundRect">
-            <a:avLst>
-              <a:gd name="adj" fmla="val 6000"/>
-            </a:avLst>
-          </a:prstGeom>
-          <a:solidFill>
-            <a:srgbClr val="EAF3FF"/>
-          </a:solidFill>
-          <a:ln>
-            <a:noFill/>
-          </a:ln>
-          <a:effectLst/>
-        </p:spPr>
-        <p:style>
-          <a:lnRef idx="1">
-            <a:schemeClr val="accent1"/>
-          </a:lnRef>
-          <a:fillRef idx="3">
-            <a:schemeClr val="accent1"/>
-          </a:fillRef>
-          <a:effectRef idx="2">
-            <a:schemeClr val="accent1"/>
-          </a:effectRef>
-          <a:fontRef idx="minor">
-            <a:schemeClr val="lt1"/>
-          </a:fontRef>
-        </p:style>
-        <p:txBody>
-          <a:bodyPr rtlCol="0" anchor="ctr"/>
-          <a:lstStyle/>
-          <a:p/>
-        </p:txBody>
-      </p:sp>
-      <p:sp>
-        <p:nvSpPr>
-          <p:cNvPr id="22" name="TextBox 21"/>
-          <p:cNvSpPr txBox="1"/>
-          <p:nvPr/>
-        </p:nvSpPr>
-        <p:spPr>
-          <a:xfrm>
-            <a:off x="5499332" y="4099560"/>
-            <a:ext cx="1193030" cy="1127759"/>
-          </a:xfrm>
-          <a:prstGeom prst="rect">
-            <a:avLst/>
-          </a:prstGeom>
-          <a:noFill/>
-        </p:spPr>
-        <p:txBody>
-          <a:bodyPr wrap="square" anchor="t" lIns="0" rIns="0" tIns="0" bIns="0"/>
-          <a:lstStyle/>
-          <a:p>
-            <a:pPr algn="l"/>
-            <a:r>
-              <a:rPr sz="1300" b="0" i="0">
-                <a:solidFill>
-                  <a:srgbClr val="202122"/>
-                </a:solidFill>
-                <a:latin typeface="Calibri"/>
-              </a:rPr>
-              <a:t>Interfaces, algorithms, data; review any AI-generated code.</a:t>
-            </a:r>
-          </a:p>
-        </p:txBody>
-      </p:sp>
-      <p:sp>
-        <p:nvSpPr>
-          <p:cNvPr id="23" name="Oval 22"/>
-          <p:cNvSpPr/>
-          <p:nvPr/>
-        </p:nvSpPr>
-        <p:spPr>
-          <a:xfrm>
-            <a:off x="7380318" y="2407920"/>
-            <a:ext cx="640080" cy="640080"/>
-          </a:xfrm>
-          <a:prstGeom prst="ellipse">
-            <a:avLst/>
-          </a:prstGeom>
-          <a:solidFill>
-            <a:srgbClr val="33C17A"/>
-          </a:solidFill>
-          <a:ln>
-            <a:noFill/>
-          </a:ln>
-          <a:effectLst/>
-        </p:spPr>
-        <p:style>
-          <a:lnRef idx="1">
-            <a:schemeClr val="accent1"/>
-          </a:lnRef>
-          <a:fillRef idx="3">
-            <a:schemeClr val="accent1"/>
-          </a:fillRef>
-          <a:effectRef idx="2">
-            <a:schemeClr val="accent1"/>
-          </a:effectRef>
-          <a:fontRef idx="minor">
-            <a:schemeClr val="lt1"/>
-          </a:fontRef>
-        </p:style>
-        <p:txBody>
-          <a:bodyPr rtlCol="0" anchor="ctr" lIns="0" rIns="0" tIns="0" bIns="0"/>
-          <a:lstStyle/>
-          <a:p>
-            <a:pPr algn="ctr"/>
-            <a:r>
-              <a:rPr sz="2000" b="1">
-                <a:solidFill>
-                  <a:srgbClr val="202122"/>
-                </a:solidFill>
-                <a:latin typeface="Calibri"/>
-              </a:rPr>
-              <a:t>5</a:t>
-            </a:r>
-          </a:p>
-        </p:txBody>
-      </p:sp>
-      <p:sp>
-        <p:nvSpPr>
-          <p:cNvPr id="24" name="TextBox 23"/>
-          <p:cNvSpPr txBox="1"/>
-          <p:nvPr/>
-        </p:nvSpPr>
-        <p:spPr>
-          <a:xfrm>
-            <a:off x="6966682" y="3185159"/>
-            <a:ext cx="1467350" cy="731520"/>
-          </a:xfrm>
-          <a:prstGeom prst="rect">
-            <a:avLst/>
-          </a:prstGeom>
-          <a:noFill/>
-        </p:spPr>
-        <p:txBody>
-          <a:bodyPr wrap="square" anchor="t" lIns="0" rIns="0" tIns="0" bIns="0"/>
-          <a:lstStyle/>
-          <a:p>
-            <a:pPr algn="ctr"/>
-            <a:r>
-              <a:rPr sz="1700" b="1" i="0">
-                <a:solidFill>
-                  <a:srgbClr val="03306E"/>
-                </a:solidFill>
-                <a:latin typeface="Calibri"/>
-              </a:rPr>
-              <a:t>Develop and test</a:t>
-            </a:r>
-          </a:p>
-        </p:txBody>
-      </p:sp>
-      <p:sp>
-        <p:nvSpPr>
-          <p:cNvPr id="25" name="Rounded Rectangle 24"/>
-          <p:cNvSpPr/>
-          <p:nvPr/>
-        </p:nvSpPr>
-        <p:spPr>
-          <a:xfrm>
-            <a:off x="6966682" y="3962399"/>
-            <a:ext cx="1467350" cy="1402080"/>
-          </a:xfrm>
-          <a:prstGeom prst="roundRect">
-            <a:avLst>
-              <a:gd name="adj" fmla="val 6000"/>
-            </a:avLst>
-          </a:prstGeom>
-          <a:solidFill>
-            <a:srgbClr val="EAF3FF"/>
-          </a:solidFill>
-          <a:ln>
-            <a:noFill/>
-          </a:ln>
-          <a:effectLst/>
-        </p:spPr>
-        <p:style>
-          <a:lnRef idx="1">
-            <a:schemeClr val="accent1"/>
-          </a:lnRef>
-          <a:fillRef idx="3">
-            <a:schemeClr val="accent1"/>
-          </a:fillRef>
-          <a:effectRef idx="2">
-            <a:schemeClr val="accent1"/>
-          </a:effectRef>
-          <a:fontRef idx="minor">
-            <a:schemeClr val="lt1"/>
-          </a:fontRef>
-        </p:style>
-        <p:txBody>
-          <a:bodyPr rtlCol="0" anchor="ctr"/>
-          <a:lstStyle/>
-          <a:p/>
-        </p:txBody>
-      </p:sp>
-      <p:sp>
-        <p:nvSpPr>
-          <p:cNvPr id="26" name="TextBox 25"/>
-          <p:cNvSpPr txBox="1"/>
-          <p:nvPr/>
-        </p:nvSpPr>
-        <p:spPr>
-          <a:xfrm>
-            <a:off x="7103842" y="4099560"/>
-            <a:ext cx="1193030" cy="1127759"/>
-          </a:xfrm>
-          <a:prstGeom prst="rect">
-            <a:avLst/>
-          </a:prstGeom>
-          <a:noFill/>
-        </p:spPr>
-        <p:txBody>
-          <a:bodyPr wrap="square" anchor="t" lIns="0" rIns="0" tIns="0" bIns="0"/>
-          <a:lstStyle/>
-          <a:p>
-            <a:pPr algn="l"/>
-            <a:r>
-              <a:rPr sz="1300" b="0" i="0">
-                <a:solidFill>
-                  <a:srgbClr val="202122"/>
-                </a:solidFill>
-                <a:latin typeface="Calibri"/>
-              </a:rPr>
-              <a:t>Prototype, module, integration, automated and user tests.</a:t>
-            </a:r>
-          </a:p>
-        </p:txBody>
-      </p:sp>
-      <p:sp>
-        <p:nvSpPr>
-          <p:cNvPr id="27" name="Oval 26"/>
-          <p:cNvSpPr/>
-          <p:nvPr/>
-        </p:nvSpPr>
-        <p:spPr>
-          <a:xfrm>
-            <a:off x="8984829" y="2407920"/>
-            <a:ext cx="640080" cy="640080"/>
-          </a:xfrm>
-          <a:prstGeom prst="ellipse">
-            <a:avLst/>
-          </a:prstGeom>
-          <a:solidFill>
-            <a:srgbClr val="33C17A"/>
-          </a:solidFill>
-          <a:ln>
-            <a:noFill/>
-          </a:ln>
-          <a:effectLst/>
-        </p:spPr>
-        <p:style>
-          <a:lnRef idx="1">
-            <a:schemeClr val="accent1"/>
-          </a:lnRef>
-          <a:fillRef idx="3">
-            <a:schemeClr val="accent1"/>
-          </a:fillRef>
-          <a:effectRef idx="2">
-            <a:schemeClr val="accent1"/>
-          </a:effectRef>
-          <a:fontRef idx="minor">
-            <a:schemeClr val="lt1"/>
-          </a:fontRef>
-        </p:style>
-        <p:txBody>
-          <a:bodyPr rtlCol="0" anchor="ctr" lIns="0" rIns="0" tIns="0" bIns="0"/>
-          <a:lstStyle/>
-          <a:p>
-            <a:pPr algn="ctr"/>
-            <a:r>
-              <a:rPr sz="2000" b="1">
-                <a:solidFill>
-                  <a:srgbClr val="202122"/>
-                </a:solidFill>
-                <a:latin typeface="Calibri"/>
-              </a:rPr>
-              <a:t>6</a:t>
-            </a:r>
-          </a:p>
-        </p:txBody>
-      </p:sp>
-      <p:sp>
-        <p:nvSpPr>
-          <p:cNvPr id="28" name="TextBox 27"/>
-          <p:cNvSpPr txBox="1"/>
-          <p:nvPr/>
-        </p:nvSpPr>
-        <p:spPr>
-          <a:xfrm>
-            <a:off x="8571193" y="3185159"/>
-            <a:ext cx="1467350" cy="731520"/>
-          </a:xfrm>
-          <a:prstGeom prst="rect">
-            <a:avLst/>
-          </a:prstGeom>
-          <a:noFill/>
-        </p:spPr>
-        <p:txBody>
-          <a:bodyPr wrap="square" anchor="t" lIns="0" rIns="0" tIns="0" bIns="0"/>
-          <a:lstStyle/>
-          <a:p>
-            <a:pPr algn="ctr"/>
-            <a:r>
-              <a:rPr sz="1700" b="1" i="0">
-                <a:solidFill>
-                  <a:srgbClr val="03306E"/>
-                </a:solidFill>
-                <a:latin typeface="Calibri"/>
-              </a:rPr>
-              <a:t>Deploy</a:t>
-            </a:r>
-          </a:p>
-        </p:txBody>
-      </p:sp>
-      <p:sp>
-        <p:nvSpPr>
-          <p:cNvPr id="29" name="Rounded Rectangle 28"/>
-          <p:cNvSpPr/>
-          <p:nvPr/>
-        </p:nvSpPr>
-        <p:spPr>
-          <a:xfrm>
-            <a:off x="8571193" y="3962399"/>
-            <a:ext cx="1467350" cy="1402080"/>
-          </a:xfrm>
-          <a:prstGeom prst="roundRect">
-            <a:avLst>
-              <a:gd name="adj" fmla="val 6000"/>
-            </a:avLst>
-          </a:prstGeom>
-          <a:solidFill>
-            <a:srgbClr val="EAF3FF"/>
-          </a:solidFill>
-          <a:ln>
-            <a:noFill/>
-          </a:ln>
-          <a:effectLst/>
-        </p:spPr>
-        <p:style>
-          <a:lnRef idx="1">
-            <a:schemeClr val="accent1"/>
-          </a:lnRef>
-          <a:fillRef idx="3">
-            <a:schemeClr val="accent1"/>
-          </a:fillRef>
-          <a:effectRef idx="2">
-            <a:schemeClr val="accent1"/>
-          </a:effectRef>
-          <a:fontRef idx="minor">
-            <a:schemeClr val="lt1"/>
-          </a:fontRef>
-        </p:style>
-        <p:txBody>
-          <a:bodyPr rtlCol="0" anchor="ctr"/>
-          <a:lstStyle/>
-          <a:p/>
-        </p:txBody>
-      </p:sp>
-      <p:sp>
-        <p:nvSpPr>
-          <p:cNvPr id="30" name="TextBox 29"/>
-          <p:cNvSpPr txBox="1"/>
-          <p:nvPr/>
-        </p:nvSpPr>
-        <p:spPr>
-          <a:xfrm>
-            <a:off x="8708353" y="4099560"/>
-            <a:ext cx="1193030" cy="1127759"/>
-          </a:xfrm>
-          <a:prstGeom prst="rect">
-            <a:avLst/>
-          </a:prstGeom>
-          <a:noFill/>
-        </p:spPr>
-        <p:txBody>
-          <a:bodyPr wrap="square" anchor="t" lIns="0" rIns="0" tIns="0" bIns="0"/>
-          <a:lstStyle/>
-          <a:p>
-            <a:pPr algn="l"/>
-            <a:r>
-              <a:rPr sz="1300" b="0" i="0">
-                <a:solidFill>
-                  <a:srgbClr val="202122"/>
-                </a:solidFill>
-                <a:latin typeface="Calibri"/>
-              </a:rPr>
-              <a:t>Install, configure, document, version control.</a:t>
-            </a:r>
-          </a:p>
-        </p:txBody>
-      </p:sp>
-      <p:sp>
-        <p:nvSpPr>
-          <p:cNvPr id="31" name="Oval 30"/>
-          <p:cNvSpPr/>
-          <p:nvPr/>
-        </p:nvSpPr>
-        <p:spPr>
-          <a:xfrm>
-            <a:off x="10589339" y="2407920"/>
-            <a:ext cx="640080" cy="640080"/>
-          </a:xfrm>
-          <a:prstGeom prst="ellipse">
-            <a:avLst/>
-          </a:prstGeom>
-          <a:solidFill>
-            <a:srgbClr val="33C17A"/>
-          </a:solidFill>
-          <a:ln>
-            <a:noFill/>
-          </a:ln>
-          <a:effectLst/>
-        </p:spPr>
-        <p:style>
-          <a:lnRef idx="1">
-            <a:schemeClr val="accent1"/>
-          </a:lnRef>
-          <a:fillRef idx="3">
-            <a:schemeClr val="accent1"/>
-          </a:fillRef>
-          <a:effectRef idx="2">
-            <a:schemeClr val="accent1"/>
-          </a:effectRef>
-          <a:fontRef idx="minor">
-            <a:schemeClr val="lt1"/>
-          </a:fontRef>
-        </p:style>
-        <p:txBody>
-          <a:bodyPr rtlCol="0" anchor="ctr" lIns="0" rIns="0" tIns="0" bIns="0"/>
-          <a:lstStyle/>
-          <a:p>
-            <a:pPr algn="ctr"/>
-            <a:r>
-              <a:rPr sz="2000" b="1">
-                <a:solidFill>
-                  <a:srgbClr val="202122"/>
-                </a:solidFill>
-                <a:latin typeface="Calibri"/>
-              </a:rPr>
-              <a:t>7</a:t>
-            </a:r>
-          </a:p>
-        </p:txBody>
-      </p:sp>
-      <p:sp>
-        <p:nvSpPr>
-          <p:cNvPr id="32" name="TextBox 31"/>
-          <p:cNvSpPr txBox="1"/>
-          <p:nvPr/>
-        </p:nvSpPr>
-        <p:spPr>
-          <a:xfrm>
-            <a:off x="10175704" y="3185159"/>
-            <a:ext cx="1467350" cy="731520"/>
-          </a:xfrm>
-          <a:prstGeom prst="rect">
-            <a:avLst/>
-          </a:prstGeom>
-          <a:noFill/>
-        </p:spPr>
-        <p:txBody>
-          <a:bodyPr wrap="square" anchor="t" lIns="0" rIns="0" tIns="0" bIns="0"/>
-          <a:lstStyle/>
-          <a:p>
-            <a:pPr algn="ctr"/>
-            <a:r>
-              <a:rPr sz="1700" b="1" i="0">
-                <a:solidFill>
-                  <a:srgbClr val="03306E"/>
-                </a:solidFill>
-                <a:latin typeface="Calibri"/>
-              </a:rPr>
-              <a:t>Maintain</a:t>
-            </a:r>
-          </a:p>
-        </p:txBody>
-      </p:sp>
-      <p:sp>
-        <p:nvSpPr>
-          <p:cNvPr id="33" name="Rounded Rectangle 32"/>
-          <p:cNvSpPr/>
-          <p:nvPr/>
-        </p:nvSpPr>
-        <p:spPr>
-          <a:xfrm>
-            <a:off x="10175704" y="3962399"/>
-            <a:ext cx="1467350" cy="1402080"/>
-          </a:xfrm>
-          <a:prstGeom prst="roundRect">
-            <a:avLst>
-              <a:gd name="adj" fmla="val 6000"/>
-            </a:avLst>
-          </a:prstGeom>
-          <a:solidFill>
-            <a:srgbClr val="EAF3FF"/>
-          </a:solidFill>
-          <a:ln>
-            <a:noFill/>
-          </a:ln>
-          <a:effectLst/>
-        </p:spPr>
-        <p:style>
-          <a:lnRef idx="1">
-            <a:schemeClr val="accent1"/>
-          </a:lnRef>
-          <a:fillRef idx="3">
-            <a:schemeClr val="accent1"/>
-          </a:fillRef>
-          <a:effectRef idx="2">
-            <a:schemeClr val="accent1"/>
-          </a:effectRef>
-          <a:fontRef idx="minor">
-            <a:schemeClr val="lt1"/>
-          </a:fontRef>
-        </p:style>
-        <p:txBody>
-          <a:bodyPr rtlCol="0" anchor="ctr"/>
-          <a:lstStyle/>
-          <a:p/>
-        </p:txBody>
-      </p:sp>
-      <p:sp>
-        <p:nvSpPr>
-          <p:cNvPr id="34" name="TextBox 33"/>
-          <p:cNvSpPr txBox="1"/>
-          <p:nvPr/>
-        </p:nvSpPr>
-        <p:spPr>
-          <a:xfrm>
-            <a:off x="10312864" y="4099560"/>
-            <a:ext cx="1193030" cy="1127759"/>
-          </a:xfrm>
-          <a:prstGeom prst="rect">
-            <a:avLst/>
-          </a:prstGeom>
-          <a:noFill/>
-        </p:spPr>
-        <p:txBody>
-          <a:bodyPr wrap="square" anchor="t" lIns="0" rIns="0" tIns="0" bIns="0"/>
-          <a:lstStyle/>
-          <a:p>
-            <a:pPr algn="l"/>
-            <a:r>
-              <a:rPr sz="1300" b="0" i="0">
-                <a:solidFill>
-                  <a:srgbClr val="202122"/>
-                </a:solidFill>
-                <a:latin typeface="Calibri"/>
-              </a:rPr>
-              <a:t>Support, bug fixes, training, updates.</a:t>
+              <a:rPr sz="1900" b="0" i="0">
+                <a:solidFill>
+                  <a:srgbClr val="FFFFFF"/>
+                </a:solidFill>
+                <a:latin typeface="Cambria"/>
+              </a:rPr>
+              <a:t>A bakery ordering app: research competitors, plan features and costs, write user stories, design screens, build and test, launch on app stores, then fix bugs and add features.</a:t>
             </a:r>
           </a:p>
         </p:txBody>
@@ -6637,7 +9599,7 @@
                 </a:solidFill>
                 <a:latin typeface="Cambria"/>
               </a:rPr>
-              <a:t>Planning and requirement analysis</a:t>
+              <a:t>The SDLC</a:t>
             </a:r>
           </a:p>
         </p:txBody>
@@ -6710,14 +9672,142 @@
       </p:sp>
       <p:sp>
         <p:nvSpPr>
-          <p:cNvPr id="6" name="Rounded Rectangle 5"/>
+          <p:cNvPr id="6" name="Rectangle 5"/>
           <p:cNvSpPr/>
           <p:nvPr/>
         </p:nvSpPr>
         <p:spPr>
           <a:xfrm>
-            <a:off x="548640" y="1600200"/>
-            <a:ext cx="3515258" cy="2148840"/>
+            <a:off x="1282315" y="2709672"/>
+            <a:ext cx="9627064" cy="36576"/>
+          </a:xfrm>
+          <a:prstGeom prst="rect">
+            <a:avLst/>
+          </a:prstGeom>
+          <a:solidFill>
+            <a:srgbClr val="A9C8F0"/>
+          </a:solidFill>
+          <a:ln>
+            <a:noFill/>
+          </a:ln>
+          <a:effectLst/>
+        </p:spPr>
+        <p:style>
+          <a:lnRef idx="1">
+            <a:schemeClr val="accent1"/>
+          </a:lnRef>
+          <a:fillRef idx="3">
+            <a:schemeClr val="accent1"/>
+          </a:fillRef>
+          <a:effectRef idx="2">
+            <a:schemeClr val="accent1"/>
+          </a:effectRef>
+          <a:fontRef idx="minor">
+            <a:schemeClr val="lt1"/>
+          </a:fontRef>
+        </p:style>
+        <p:txBody>
+          <a:bodyPr rtlCol="0" anchor="ctr"/>
+          <a:lstStyle/>
+          <a:p/>
+        </p:txBody>
+      </p:sp>
+      <p:sp>
+        <p:nvSpPr>
+          <p:cNvPr id="7" name="Oval 6"/>
+          <p:cNvSpPr/>
+          <p:nvPr/>
+        </p:nvSpPr>
+        <p:spPr>
+          <a:xfrm>
+            <a:off x="962275" y="2407920"/>
+            <a:ext cx="640080" cy="640080"/>
+          </a:xfrm>
+          <a:prstGeom prst="ellipse">
+            <a:avLst/>
+          </a:prstGeom>
+          <a:solidFill>
+            <a:srgbClr val="33C17A"/>
+          </a:solidFill>
+          <a:ln>
+            <a:noFill/>
+          </a:ln>
+          <a:effectLst/>
+        </p:spPr>
+        <p:style>
+          <a:lnRef idx="1">
+            <a:schemeClr val="accent1"/>
+          </a:lnRef>
+          <a:fillRef idx="3">
+            <a:schemeClr val="accent1"/>
+          </a:fillRef>
+          <a:effectRef idx="2">
+            <a:schemeClr val="accent1"/>
+          </a:effectRef>
+          <a:fontRef idx="minor">
+            <a:schemeClr val="lt1"/>
+          </a:fontRef>
+        </p:style>
+        <p:txBody>
+          <a:bodyPr rtlCol="0" anchor="ctr" lIns="0" rIns="0" tIns="0" bIns="0"/>
+          <a:lstStyle/>
+          <a:p>
+            <a:pPr algn="ctr"/>
+            <a:r>
+              <a:rPr sz="2000" b="1">
+                <a:solidFill>
+                  <a:srgbClr val="202122"/>
+                </a:solidFill>
+                <a:latin typeface="Calibri"/>
+              </a:rPr>
+              <a:t>1</a:t>
+            </a:r>
+          </a:p>
+        </p:txBody>
+      </p:sp>
+      <p:sp>
+        <p:nvSpPr>
+          <p:cNvPr id="8" name="TextBox 7"/>
+          <p:cNvSpPr txBox="1"/>
+          <p:nvPr/>
+        </p:nvSpPr>
+        <p:spPr>
+          <a:xfrm>
+            <a:off x="548640" y="3185159"/>
+            <a:ext cx="1467350" cy="731520"/>
+          </a:xfrm>
+          <a:prstGeom prst="rect">
+            <a:avLst/>
+          </a:prstGeom>
+          <a:noFill/>
+        </p:spPr>
+        <p:txBody>
+          <a:bodyPr wrap="square" anchor="t" lIns="0" rIns="0" tIns="0" bIns="0"/>
+          <a:lstStyle/>
+          <a:p>
+            <a:pPr algn="ctr"/>
+            <a:r>
+              <a:rPr sz="1700" b="1" i="0">
+                <a:solidFill>
+                  <a:srgbClr val="03306E"/>
+                </a:solidFill>
+                <a:latin typeface="Calibri"/>
+              </a:rPr>
+              <a:t>Research</a:t>
+            </a:r>
+          </a:p>
+        </p:txBody>
+      </p:sp>
+      <p:sp>
+        <p:nvSpPr>
+          <p:cNvPr id="9" name="Rounded Rectangle 8"/>
+          <p:cNvSpPr/>
+          <p:nvPr/>
+        </p:nvSpPr>
+        <p:spPr>
+          <a:xfrm>
+            <a:off x="548640" y="3962399"/>
+            <a:ext cx="1467350" cy="1402080"/>
           </a:xfrm>
           <a:prstGeom prst="roundRect">
             <a:avLst>
@@ -6754,14 +9844,47 @@
       </p:sp>
       <p:sp>
         <p:nvSpPr>
-          <p:cNvPr id="7" name="Oval 6"/>
+          <p:cNvPr id="10" name="TextBox 9"/>
+          <p:cNvSpPr txBox="1"/>
+          <p:nvPr/>
+        </p:nvSpPr>
+        <p:spPr>
+          <a:xfrm>
+            <a:off x="685800" y="4099560"/>
+            <a:ext cx="1193030" cy="1127759"/>
+          </a:xfrm>
+          <a:prstGeom prst="rect">
+            <a:avLst/>
+          </a:prstGeom>
+          <a:noFill/>
+        </p:spPr>
+        <p:txBody>
+          <a:bodyPr wrap="square" anchor="t" lIns="0" rIns="0" tIns="0" bIns="0"/>
+          <a:lstStyle/>
+          <a:p>
+            <a:pPr algn="l"/>
+            <a:r>
+              <a:rPr sz="1300" b="0" i="0">
+                <a:solidFill>
+                  <a:srgbClr val="202122"/>
+                </a:solidFill>
+                <a:latin typeface="Calibri"/>
+              </a:rPr>
+              <a:t>Understand the brief, market and your own skills gaps.</a:t>
+            </a:r>
+          </a:p>
+        </p:txBody>
+      </p:sp>
+      <p:sp>
+        <p:nvSpPr>
+          <p:cNvPr id="11" name="Oval 10"/>
           <p:cNvSpPr/>
           <p:nvPr/>
         </p:nvSpPr>
         <p:spPr>
           <a:xfrm>
-            <a:off x="777240" y="1828800"/>
-            <a:ext cx="457200" cy="457200"/>
+            <a:off x="2566786" y="2407920"/>
+            <a:ext cx="640080" cy="640080"/>
           </a:xfrm>
           <a:prstGeom prst="ellipse">
             <a:avLst/>
@@ -6794,93 +9917,60 @@
           <a:p>
             <a:pPr algn="ctr"/>
             <a:r>
-              <a:rPr sz="1500" b="1">
+              <a:rPr sz="2000" b="1">
                 <a:solidFill>
                   <a:srgbClr val="202122"/>
                 </a:solidFill>
                 <a:latin typeface="Calibri"/>
               </a:rPr>
-              <a:t>1</a:t>
-            </a:r>
-          </a:p>
-        </p:txBody>
-      </p:sp>
-      <p:sp>
-        <p:nvSpPr>
-          <p:cNvPr id="8" name="TextBox 7"/>
-          <p:cNvSpPr txBox="1"/>
-          <p:nvPr/>
-        </p:nvSpPr>
-        <p:spPr>
-          <a:xfrm>
-            <a:off x="1371600" y="1801368"/>
-            <a:ext cx="2509418" cy="512064"/>
-          </a:xfrm>
-          <a:prstGeom prst="rect">
-            <a:avLst/>
-          </a:prstGeom>
-          <a:noFill/>
-        </p:spPr>
-        <p:txBody>
-          <a:bodyPr wrap="square" anchor="ctr" lIns="0" rIns="0" tIns="0" bIns="0"/>
-          <a:lstStyle/>
-          <a:p>
-            <a:pPr algn="l"/>
-            <a:r>
-              <a:rPr sz="1900" b="1" i="0">
+              <a:t>2</a:t>
+            </a:r>
+          </a:p>
+        </p:txBody>
+      </p:sp>
+      <p:sp>
+        <p:nvSpPr>
+          <p:cNvPr id="12" name="TextBox 11"/>
+          <p:cNvSpPr txBox="1"/>
+          <p:nvPr/>
+        </p:nvSpPr>
+        <p:spPr>
+          <a:xfrm>
+            <a:off x="2153150" y="3185159"/>
+            <a:ext cx="1467350" cy="731520"/>
+          </a:xfrm>
+          <a:prstGeom prst="rect">
+            <a:avLst/>
+          </a:prstGeom>
+          <a:noFill/>
+        </p:spPr>
+        <p:txBody>
+          <a:bodyPr wrap="square" anchor="t" lIns="0" rIns="0" tIns="0" bIns="0"/>
+          <a:lstStyle/>
+          <a:p>
+            <a:pPr algn="ctr"/>
+            <a:r>
+              <a:rPr sz="1700" b="1" i="0">
                 <a:solidFill>
                   <a:srgbClr val="03306E"/>
                 </a:solidFill>
                 <a:latin typeface="Calibri"/>
               </a:rPr>
-              <a:t>Scope</a:t>
-            </a:r>
-          </a:p>
-        </p:txBody>
-      </p:sp>
-      <p:sp>
-        <p:nvSpPr>
-          <p:cNvPr id="9" name="TextBox 8"/>
-          <p:cNvSpPr txBox="1"/>
-          <p:nvPr/>
-        </p:nvSpPr>
-        <p:spPr>
-          <a:xfrm>
-            <a:off x="777240" y="2468880"/>
-            <a:ext cx="3058058" cy="1143000"/>
-          </a:xfrm>
-          <a:prstGeom prst="rect">
-            <a:avLst/>
-          </a:prstGeom>
-          <a:noFill/>
-        </p:spPr>
-        <p:txBody>
-          <a:bodyPr wrap="square" anchor="t" lIns="0" rIns="0" tIns="0" bIns="0"/>
-          <a:lstStyle/>
-          <a:p>
-            <a:pPr algn="l"/>
-            <a:r>
-              <a:rPr sz="2000" b="0" i="0">
-                <a:solidFill>
-                  <a:srgbClr val="202122"/>
-                </a:solidFill>
-                <a:latin typeface="Calibri"/>
-              </a:rPr>
-              <a:t>Turn the brief into a project proposal with business requirements.</a:t>
-            </a:r>
-          </a:p>
-        </p:txBody>
-      </p:sp>
-      <p:sp>
-        <p:nvSpPr>
-          <p:cNvPr id="10" name="Rounded Rectangle 9"/>
+              <a:t>Plan</a:t>
+            </a:r>
+          </a:p>
+        </p:txBody>
+      </p:sp>
+      <p:sp>
+        <p:nvSpPr>
+          <p:cNvPr id="13" name="Rounded Rectangle 12"/>
           <p:cNvSpPr/>
           <p:nvPr/>
         </p:nvSpPr>
         <p:spPr>
           <a:xfrm>
-            <a:off x="4338218" y="1600200"/>
-            <a:ext cx="3515258" cy="2148840"/>
+            <a:off x="2153150" y="3962399"/>
+            <a:ext cx="1467350" cy="1402080"/>
           </a:xfrm>
           <a:prstGeom prst="roundRect">
             <a:avLst>
@@ -6917,14 +10007,47 @@
       </p:sp>
       <p:sp>
         <p:nvSpPr>
-          <p:cNvPr id="11" name="Oval 10"/>
+          <p:cNvPr id="14" name="TextBox 13"/>
+          <p:cNvSpPr txBox="1"/>
+          <p:nvPr/>
+        </p:nvSpPr>
+        <p:spPr>
+          <a:xfrm>
+            <a:off x="2290310" y="4099560"/>
+            <a:ext cx="1193030" cy="1127759"/>
+          </a:xfrm>
+          <a:prstGeom prst="rect">
+            <a:avLst/>
+          </a:prstGeom>
+          <a:noFill/>
+        </p:spPr>
+        <p:txBody>
+          <a:bodyPr wrap="square" anchor="t" lIns="0" rIns="0" tIns="0" bIns="0"/>
+          <a:lstStyle/>
+          <a:p>
+            <a:pPr algn="l"/>
+            <a:r>
+              <a:rPr sz="1300" b="0" i="0">
+                <a:solidFill>
+                  <a:srgbClr val="202122"/>
+                </a:solidFill>
+                <a:latin typeface="Calibri"/>
+              </a:rPr>
+              <a:t>Requirements, KPIs, schedule, costs, language, risks.</a:t>
+            </a:r>
+          </a:p>
+        </p:txBody>
+      </p:sp>
+      <p:sp>
+        <p:nvSpPr>
+          <p:cNvPr id="15" name="Oval 14"/>
           <p:cNvSpPr/>
           <p:nvPr/>
         </p:nvSpPr>
         <p:spPr>
           <a:xfrm>
-            <a:off x="4566818" y="1828800"/>
-            <a:ext cx="457200" cy="457200"/>
+            <a:off x="4171296" y="2407920"/>
+            <a:ext cx="640080" cy="640080"/>
           </a:xfrm>
           <a:prstGeom prst="ellipse">
             <a:avLst/>
@@ -6957,93 +10080,60 @@
           <a:p>
             <a:pPr algn="ctr"/>
             <a:r>
-              <a:rPr sz="1500" b="1">
+              <a:rPr sz="2000" b="1">
                 <a:solidFill>
                   <a:srgbClr val="202122"/>
                 </a:solidFill>
                 <a:latin typeface="Calibri"/>
               </a:rPr>
-              <a:t>2</a:t>
-            </a:r>
-          </a:p>
-        </p:txBody>
-      </p:sp>
-      <p:sp>
-        <p:nvSpPr>
-          <p:cNvPr id="12" name="TextBox 11"/>
-          <p:cNvSpPr txBox="1"/>
-          <p:nvPr/>
-        </p:nvSpPr>
-        <p:spPr>
-          <a:xfrm>
-            <a:off x="5161178" y="1801368"/>
-            <a:ext cx="2509418" cy="512064"/>
-          </a:xfrm>
-          <a:prstGeom prst="rect">
-            <a:avLst/>
-          </a:prstGeom>
-          <a:noFill/>
-        </p:spPr>
-        <p:txBody>
-          <a:bodyPr wrap="square" anchor="ctr" lIns="0" rIns="0" tIns="0" bIns="0"/>
-          <a:lstStyle/>
-          <a:p>
-            <a:pPr algn="l"/>
-            <a:r>
-              <a:rPr sz="1600" b="1" i="0">
+              <a:t>3</a:t>
+            </a:r>
+          </a:p>
+        </p:txBody>
+      </p:sp>
+      <p:sp>
+        <p:nvSpPr>
+          <p:cNvPr id="16" name="TextBox 15"/>
+          <p:cNvSpPr txBox="1"/>
+          <p:nvPr/>
+        </p:nvSpPr>
+        <p:spPr>
+          <a:xfrm>
+            <a:off x="3757661" y="3185159"/>
+            <a:ext cx="1467350" cy="731520"/>
+          </a:xfrm>
+          <a:prstGeom prst="rect">
+            <a:avLst/>
+          </a:prstGeom>
+          <a:noFill/>
+        </p:spPr>
+        <p:txBody>
+          <a:bodyPr wrap="square" anchor="t" lIns="0" rIns="0" tIns="0" bIns="0"/>
+          <a:lstStyle/>
+          <a:p>
+            <a:pPr algn="ctr"/>
+            <a:r>
+              <a:rPr sz="1700" b="1" i="0">
                 <a:solidFill>
                   <a:srgbClr val="03306E"/>
                 </a:solidFill>
                 <a:latin typeface="Calibri"/>
               </a:rPr>
-              <a:t>Computational thinking</a:t>
-            </a:r>
-          </a:p>
-        </p:txBody>
-      </p:sp>
-      <p:sp>
-        <p:nvSpPr>
-          <p:cNvPr id="13" name="TextBox 12"/>
-          <p:cNvSpPr txBox="1"/>
-          <p:nvPr/>
-        </p:nvSpPr>
-        <p:spPr>
-          <a:xfrm>
-            <a:off x="4566818" y="2468880"/>
-            <a:ext cx="3058058" cy="1143000"/>
-          </a:xfrm>
-          <a:prstGeom prst="rect">
-            <a:avLst/>
-          </a:prstGeom>
-          <a:noFill/>
-        </p:spPr>
-        <p:txBody>
-          <a:bodyPr wrap="square" anchor="t" lIns="0" rIns="0" tIns="0" bIns="0"/>
-          <a:lstStyle/>
-          <a:p>
-            <a:pPr algn="l"/>
-            <a:r>
-              <a:rPr sz="2000" b="0" i="0">
-                <a:solidFill>
-                  <a:srgbClr val="202122"/>
-                </a:solidFill>
-                <a:latin typeface="Calibri"/>
-              </a:rPr>
-              <a:t>Decompose the problem, spot patterns, abstract the detail.</a:t>
-            </a:r>
-          </a:p>
-        </p:txBody>
-      </p:sp>
-      <p:sp>
-        <p:nvSpPr>
-          <p:cNvPr id="14" name="Rounded Rectangle 13"/>
+              <a:t>User analysis</a:t>
+            </a:r>
+          </a:p>
+        </p:txBody>
+      </p:sp>
+      <p:sp>
+        <p:nvSpPr>
+          <p:cNvPr id="17" name="Rounded Rectangle 16"/>
           <p:cNvSpPr/>
           <p:nvPr/>
         </p:nvSpPr>
         <p:spPr>
           <a:xfrm>
-            <a:off x="8127796" y="1600200"/>
-            <a:ext cx="3515258" cy="2148840"/>
+            <a:off x="3757661" y="3962399"/>
+            <a:ext cx="1467350" cy="1402080"/>
           </a:xfrm>
           <a:prstGeom prst="roundRect">
             <a:avLst>
@@ -7080,14 +10170,47 @@
       </p:sp>
       <p:sp>
         <p:nvSpPr>
-          <p:cNvPr id="15" name="Oval 14"/>
+          <p:cNvPr id="18" name="TextBox 17"/>
+          <p:cNvSpPr txBox="1"/>
+          <p:nvPr/>
+        </p:nvSpPr>
+        <p:spPr>
+          <a:xfrm>
+            <a:off x="3894821" y="4099560"/>
+            <a:ext cx="1193030" cy="1127759"/>
+          </a:xfrm>
+          <a:prstGeom prst="rect">
+            <a:avLst/>
+          </a:prstGeom>
+          <a:noFill/>
+        </p:spPr>
+        <p:txBody>
+          <a:bodyPr wrap="square" anchor="t" lIns="0" rIns="0" tIns="0" bIns="0"/>
+          <a:lstStyle/>
+          <a:p>
+            <a:pPr algn="l"/>
+            <a:r>
+              <a:rPr sz="1300" b="0" i="0">
+                <a:solidFill>
+                  <a:srgbClr val="202122"/>
+                </a:solidFill>
+                <a:latin typeface="Calibri"/>
+              </a:rPr>
+              <a:t>User stories, activity diagrams, ERDs.</a:t>
+            </a:r>
+          </a:p>
+        </p:txBody>
+      </p:sp>
+      <p:sp>
+        <p:nvSpPr>
+          <p:cNvPr id="19" name="Oval 18"/>
           <p:cNvSpPr/>
           <p:nvPr/>
         </p:nvSpPr>
         <p:spPr>
           <a:xfrm>
-            <a:off x="8356396" y="1828800"/>
-            <a:ext cx="457200" cy="457200"/>
+            <a:off x="5775807" y="2407920"/>
+            <a:ext cx="640080" cy="640080"/>
           </a:xfrm>
           <a:prstGeom prst="ellipse">
             <a:avLst/>
@@ -7120,93 +10243,60 @@
           <a:p>
             <a:pPr algn="ctr"/>
             <a:r>
-              <a:rPr sz="1500" b="1">
+              <a:rPr sz="2000" b="1">
                 <a:solidFill>
                   <a:srgbClr val="202122"/>
                 </a:solidFill>
                 <a:latin typeface="Calibri"/>
               </a:rPr>
-              <a:t>3</a:t>
-            </a:r>
-          </a:p>
-        </p:txBody>
-      </p:sp>
-      <p:sp>
-        <p:nvSpPr>
-          <p:cNvPr id="16" name="TextBox 15"/>
-          <p:cNvSpPr txBox="1"/>
-          <p:nvPr/>
-        </p:nvSpPr>
-        <p:spPr>
-          <a:xfrm>
-            <a:off x="8950756" y="1801368"/>
-            <a:ext cx="2509418" cy="512064"/>
-          </a:xfrm>
-          <a:prstGeom prst="rect">
-            <a:avLst/>
-          </a:prstGeom>
-          <a:noFill/>
-        </p:spPr>
-        <p:txBody>
-          <a:bodyPr wrap="square" anchor="ctr" lIns="0" rIns="0" tIns="0" bIns="0"/>
-          <a:lstStyle/>
-          <a:p>
-            <a:pPr algn="l"/>
-            <a:r>
-              <a:rPr sz="1900" b="1" i="0">
+              <a:t>4</a:t>
+            </a:r>
+          </a:p>
+        </p:txBody>
+      </p:sp>
+      <p:sp>
+        <p:nvSpPr>
+          <p:cNvPr id="20" name="TextBox 19"/>
+          <p:cNvSpPr txBox="1"/>
+          <p:nvPr/>
+        </p:nvSpPr>
+        <p:spPr>
+          <a:xfrm>
+            <a:off x="5362172" y="3185159"/>
+            <a:ext cx="1467350" cy="731520"/>
+          </a:xfrm>
+          <a:prstGeom prst="rect">
+            <a:avLst/>
+          </a:prstGeom>
+          <a:noFill/>
+        </p:spPr>
+        <p:txBody>
+          <a:bodyPr wrap="square" anchor="t" lIns="0" rIns="0" tIns="0" bIns="0"/>
+          <a:lstStyle/>
+          <a:p>
+            <a:pPr algn="ctr"/>
+            <a:r>
+              <a:rPr sz="1700" b="1" i="0">
                 <a:solidFill>
                   <a:srgbClr val="03306E"/>
                 </a:solidFill>
                 <a:latin typeface="Calibri"/>
               </a:rPr>
-              <a:t>Measures</a:t>
-            </a:r>
-          </a:p>
-        </p:txBody>
-      </p:sp>
-      <p:sp>
-        <p:nvSpPr>
-          <p:cNvPr id="17" name="TextBox 16"/>
-          <p:cNvSpPr txBox="1"/>
-          <p:nvPr/>
-        </p:nvSpPr>
-        <p:spPr>
-          <a:xfrm>
-            <a:off x="8356396" y="2468880"/>
-            <a:ext cx="3058058" cy="1143000"/>
-          </a:xfrm>
-          <a:prstGeom prst="rect">
-            <a:avLst/>
-          </a:prstGeom>
-          <a:noFill/>
-        </p:spPr>
-        <p:txBody>
-          <a:bodyPr wrap="square" anchor="t" lIns="0" rIns="0" tIns="0" bIns="0"/>
-          <a:lstStyle/>
-          <a:p>
-            <a:pPr algn="l"/>
-            <a:r>
-              <a:rPr sz="2000" b="0" i="0">
-                <a:solidFill>
-                  <a:srgbClr val="202122"/>
-                </a:solidFill>
-                <a:latin typeface="Calibri"/>
-              </a:rPr>
-              <a:t>Set KPIs, performance constraints and user acceptance criteria.</a:t>
-            </a:r>
-          </a:p>
-        </p:txBody>
-      </p:sp>
-      <p:sp>
-        <p:nvSpPr>
-          <p:cNvPr id="18" name="Rounded Rectangle 17"/>
+              <a:t>Design</a:t>
+            </a:r>
+          </a:p>
+        </p:txBody>
+      </p:sp>
+      <p:sp>
+        <p:nvSpPr>
+          <p:cNvPr id="21" name="Rounded Rectangle 20"/>
           <p:cNvSpPr/>
           <p:nvPr/>
         </p:nvSpPr>
         <p:spPr>
           <a:xfrm>
-            <a:off x="548640" y="4023360"/>
-            <a:ext cx="3515258" cy="2148840"/>
+            <a:off x="5362172" y="3962399"/>
+            <a:ext cx="1467350" cy="1402080"/>
           </a:xfrm>
           <a:prstGeom prst="roundRect">
             <a:avLst>
@@ -7243,14 +10333,47 @@
       </p:sp>
       <p:sp>
         <p:nvSpPr>
-          <p:cNvPr id="19" name="Oval 18"/>
+          <p:cNvPr id="22" name="TextBox 21"/>
+          <p:cNvSpPr txBox="1"/>
+          <p:nvPr/>
+        </p:nvSpPr>
+        <p:spPr>
+          <a:xfrm>
+            <a:off x="5499332" y="4099560"/>
+            <a:ext cx="1193030" cy="1127759"/>
+          </a:xfrm>
+          <a:prstGeom prst="rect">
+            <a:avLst/>
+          </a:prstGeom>
+          <a:noFill/>
+        </p:spPr>
+        <p:txBody>
+          <a:bodyPr wrap="square" anchor="t" lIns="0" rIns="0" tIns="0" bIns="0"/>
+          <a:lstStyle/>
+          <a:p>
+            <a:pPr algn="l"/>
+            <a:r>
+              <a:rPr sz="1300" b="0" i="0">
+                <a:solidFill>
+                  <a:srgbClr val="202122"/>
+                </a:solidFill>
+                <a:latin typeface="Calibri"/>
+              </a:rPr>
+              <a:t>Interfaces, algorithms, data; review any AI-generated code.</a:t>
+            </a:r>
+          </a:p>
+        </p:txBody>
+      </p:sp>
+      <p:sp>
+        <p:nvSpPr>
+          <p:cNvPr id="23" name="Oval 22"/>
           <p:cNvSpPr/>
           <p:nvPr/>
         </p:nvSpPr>
         <p:spPr>
           <a:xfrm>
-            <a:off x="777240" y="4251960"/>
-            <a:ext cx="457200" cy="457200"/>
+            <a:off x="7380318" y="2407920"/>
+            <a:ext cx="640080" cy="640080"/>
           </a:xfrm>
           <a:prstGeom prst="ellipse">
             <a:avLst/>
@@ -7283,93 +10406,60 @@
           <a:p>
             <a:pPr algn="ctr"/>
             <a:r>
-              <a:rPr sz="1500" b="1">
+              <a:rPr sz="2000" b="1">
                 <a:solidFill>
                   <a:srgbClr val="202122"/>
                 </a:solidFill>
                 <a:latin typeface="Calibri"/>
               </a:rPr>
-              <a:t>4</a:t>
-            </a:r>
-          </a:p>
-        </p:txBody>
-      </p:sp>
-      <p:sp>
-        <p:nvSpPr>
-          <p:cNvPr id="20" name="TextBox 19"/>
-          <p:cNvSpPr txBox="1"/>
-          <p:nvPr/>
-        </p:nvSpPr>
-        <p:spPr>
-          <a:xfrm>
-            <a:off x="1371600" y="4224528"/>
-            <a:ext cx="2509418" cy="512064"/>
-          </a:xfrm>
-          <a:prstGeom prst="rect">
-            <a:avLst/>
-          </a:prstGeom>
-          <a:noFill/>
-        </p:spPr>
-        <p:txBody>
-          <a:bodyPr wrap="square" anchor="ctr" lIns="0" rIns="0" tIns="0" bIns="0"/>
-          <a:lstStyle/>
-          <a:p>
-            <a:pPr algn="l"/>
-            <a:r>
-              <a:rPr sz="1900" b="1" i="0">
+              <a:t>5</a:t>
+            </a:r>
+          </a:p>
+        </p:txBody>
+      </p:sp>
+      <p:sp>
+        <p:nvSpPr>
+          <p:cNvPr id="24" name="TextBox 23"/>
+          <p:cNvSpPr txBox="1"/>
+          <p:nvPr/>
+        </p:nvSpPr>
+        <p:spPr>
+          <a:xfrm>
+            <a:off x="6966682" y="3185159"/>
+            <a:ext cx="1467350" cy="731520"/>
+          </a:xfrm>
+          <a:prstGeom prst="rect">
+            <a:avLst/>
+          </a:prstGeom>
+          <a:noFill/>
+        </p:spPr>
+        <p:txBody>
+          <a:bodyPr wrap="square" anchor="t" lIns="0" rIns="0" tIns="0" bIns="0"/>
+          <a:lstStyle/>
+          <a:p>
+            <a:pPr algn="ctr"/>
+            <a:r>
+              <a:rPr sz="1700" b="1" i="0">
                 <a:solidFill>
                   <a:srgbClr val="03306E"/>
                 </a:solidFill>
                 <a:latin typeface="Calibri"/>
               </a:rPr>
-              <a:t>Resources</a:t>
-            </a:r>
-          </a:p>
-        </p:txBody>
-      </p:sp>
-      <p:sp>
-        <p:nvSpPr>
-          <p:cNvPr id="21" name="TextBox 20"/>
-          <p:cNvSpPr txBox="1"/>
-          <p:nvPr/>
-        </p:nvSpPr>
-        <p:spPr>
-          <a:xfrm>
-            <a:off x="777240" y="4892040"/>
-            <a:ext cx="3058058" cy="1143000"/>
-          </a:xfrm>
-          <a:prstGeom prst="rect">
-            <a:avLst/>
-          </a:prstGeom>
-          <a:noFill/>
-        </p:spPr>
-        <p:txBody>
-          <a:bodyPr wrap="square" anchor="t" lIns="0" rIns="0" tIns="0" bIns="0"/>
-          <a:lstStyle/>
-          <a:p>
-            <a:pPr algn="l"/>
-            <a:r>
-              <a:rPr sz="2000" b="0" i="0">
-                <a:solidFill>
-                  <a:srgbClr val="202122"/>
-                </a:solidFill>
-                <a:latin typeface="Calibri"/>
-              </a:rPr>
-              <a:t>Schedule tasks and milestones, allocate resources and estimate costs.</a:t>
-            </a:r>
-          </a:p>
-        </p:txBody>
-      </p:sp>
-      <p:sp>
-        <p:nvSpPr>
-          <p:cNvPr id="22" name="Rounded Rectangle 21"/>
+              <a:t>Develop and test</a:t>
+            </a:r>
+          </a:p>
+        </p:txBody>
+      </p:sp>
+      <p:sp>
+        <p:nvSpPr>
+          <p:cNvPr id="25" name="Rounded Rectangle 24"/>
           <p:cNvSpPr/>
           <p:nvPr/>
         </p:nvSpPr>
         <p:spPr>
           <a:xfrm>
-            <a:off x="4338218" y="4023360"/>
-            <a:ext cx="3515258" cy="2148840"/>
+            <a:off x="6966682" y="3962399"/>
+            <a:ext cx="1467350" cy="1402080"/>
           </a:xfrm>
           <a:prstGeom prst="roundRect">
             <a:avLst>
@@ -7406,14 +10496,47 @@
       </p:sp>
       <p:sp>
         <p:nvSpPr>
-          <p:cNvPr id="23" name="Oval 22"/>
+          <p:cNvPr id="26" name="TextBox 25"/>
+          <p:cNvSpPr txBox="1"/>
+          <p:nvPr/>
+        </p:nvSpPr>
+        <p:spPr>
+          <a:xfrm>
+            <a:off x="7103842" y="4099560"/>
+            <a:ext cx="1193030" cy="1127759"/>
+          </a:xfrm>
+          <a:prstGeom prst="rect">
+            <a:avLst/>
+          </a:prstGeom>
+          <a:noFill/>
+        </p:spPr>
+        <p:txBody>
+          <a:bodyPr wrap="square" anchor="t" lIns="0" rIns="0" tIns="0" bIns="0"/>
+          <a:lstStyle/>
+          <a:p>
+            <a:pPr algn="l"/>
+            <a:r>
+              <a:rPr sz="1300" b="0" i="0">
+                <a:solidFill>
+                  <a:srgbClr val="202122"/>
+                </a:solidFill>
+                <a:latin typeface="Calibri"/>
+              </a:rPr>
+              <a:t>Prototype, module, integration, automated and user tests.</a:t>
+            </a:r>
+          </a:p>
+        </p:txBody>
+      </p:sp>
+      <p:sp>
+        <p:nvSpPr>
+          <p:cNvPr id="27" name="Oval 26"/>
           <p:cNvSpPr/>
           <p:nvPr/>
         </p:nvSpPr>
         <p:spPr>
           <a:xfrm>
-            <a:off x="4566818" y="4251960"/>
-            <a:ext cx="457200" cy="457200"/>
+            <a:off x="8984829" y="2407920"/>
+            <a:ext cx="640080" cy="640080"/>
           </a:xfrm>
           <a:prstGeom prst="ellipse">
             <a:avLst/>
@@ -7446,93 +10569,60 @@
           <a:p>
             <a:pPr algn="ctr"/>
             <a:r>
-              <a:rPr sz="1500" b="1">
+              <a:rPr sz="2000" b="1">
                 <a:solidFill>
                   <a:srgbClr val="202122"/>
                 </a:solidFill>
                 <a:latin typeface="Calibri"/>
               </a:rPr>
-              <a:t>5</a:t>
-            </a:r>
-          </a:p>
-        </p:txBody>
-      </p:sp>
-      <p:sp>
-        <p:nvSpPr>
-          <p:cNvPr id="24" name="TextBox 23"/>
-          <p:cNvSpPr txBox="1"/>
-          <p:nvPr/>
-        </p:nvSpPr>
-        <p:spPr>
-          <a:xfrm>
-            <a:off x="5161178" y="4224528"/>
-            <a:ext cx="2509418" cy="512064"/>
-          </a:xfrm>
-          <a:prstGeom prst="rect">
-            <a:avLst/>
-          </a:prstGeom>
-          <a:noFill/>
-        </p:spPr>
-        <p:txBody>
-          <a:bodyPr wrap="square" anchor="ctr" lIns="0" rIns="0" tIns="0" bIns="0"/>
-          <a:lstStyle/>
-          <a:p>
-            <a:pPr algn="l"/>
-            <a:r>
-              <a:rPr sz="1900" b="1" i="0">
+              <a:t>6</a:t>
+            </a:r>
+          </a:p>
+        </p:txBody>
+      </p:sp>
+      <p:sp>
+        <p:nvSpPr>
+          <p:cNvPr id="28" name="TextBox 27"/>
+          <p:cNvSpPr txBox="1"/>
+          <p:nvPr/>
+        </p:nvSpPr>
+        <p:spPr>
+          <a:xfrm>
+            <a:off x="8571193" y="3185159"/>
+            <a:ext cx="1467350" cy="731520"/>
+          </a:xfrm>
+          <a:prstGeom prst="rect">
+            <a:avLst/>
+          </a:prstGeom>
+          <a:noFill/>
+        </p:spPr>
+        <p:txBody>
+          <a:bodyPr wrap="square" anchor="t" lIns="0" rIns="0" tIns="0" bIns="0"/>
+          <a:lstStyle/>
+          <a:p>
+            <a:pPr algn="ctr"/>
+            <a:r>
+              <a:rPr sz="1700" b="1" i="0">
                 <a:solidFill>
                   <a:srgbClr val="03306E"/>
                 </a:solidFill>
                 <a:latin typeface="Calibri"/>
               </a:rPr>
-              <a:t>Language choice</a:t>
-            </a:r>
-          </a:p>
-        </p:txBody>
-      </p:sp>
-      <p:sp>
-        <p:nvSpPr>
-          <p:cNvPr id="25" name="TextBox 24"/>
-          <p:cNvSpPr txBox="1"/>
-          <p:nvPr/>
-        </p:nvSpPr>
-        <p:spPr>
-          <a:xfrm>
-            <a:off x="4566818" y="4892040"/>
-            <a:ext cx="3058058" cy="1143000"/>
-          </a:xfrm>
-          <a:prstGeom prst="rect">
-            <a:avLst/>
-          </a:prstGeom>
-          <a:noFill/>
-        </p:spPr>
-        <p:txBody>
-          <a:bodyPr wrap="square" anchor="t" lIns="0" rIns="0" tIns="0" bIns="0"/>
-          <a:lstStyle/>
-          <a:p>
-            <a:pPr algn="l"/>
-            <a:r>
-              <a:rPr sz="2000" b="0" i="0">
-                <a:solidFill>
-                  <a:srgbClr val="202122"/>
-                </a:solidFill>
-                <a:latin typeface="Calibri"/>
-              </a:rPr>
-              <a:t>Suitability, policy, scalability, security, staff, cost, reliability.</a:t>
-            </a:r>
-          </a:p>
-        </p:txBody>
-      </p:sp>
-      <p:sp>
-        <p:nvSpPr>
-          <p:cNvPr id="26" name="Rounded Rectangle 25"/>
+              <a:t>Deploy</a:t>
+            </a:r>
+          </a:p>
+        </p:txBody>
+      </p:sp>
+      <p:sp>
+        <p:nvSpPr>
+          <p:cNvPr id="29" name="Rounded Rectangle 28"/>
           <p:cNvSpPr/>
           <p:nvPr/>
         </p:nvSpPr>
         <p:spPr>
           <a:xfrm>
-            <a:off x="8127796" y="4023360"/>
-            <a:ext cx="3515258" cy="2148840"/>
+            <a:off x="8571193" y="3962399"/>
+            <a:ext cx="1467350" cy="1402080"/>
           </a:xfrm>
           <a:prstGeom prst="roundRect">
             <a:avLst>
@@ -7569,14 +10659,47 @@
       </p:sp>
       <p:sp>
         <p:nvSpPr>
-          <p:cNvPr id="27" name="Oval 26"/>
+          <p:cNvPr id="30" name="TextBox 29"/>
+          <p:cNvSpPr txBox="1"/>
+          <p:nvPr/>
+        </p:nvSpPr>
+        <p:spPr>
+          <a:xfrm>
+            <a:off x="8708353" y="4099560"/>
+            <a:ext cx="1193030" cy="1127759"/>
+          </a:xfrm>
+          <a:prstGeom prst="rect">
+            <a:avLst/>
+          </a:prstGeom>
+          <a:noFill/>
+        </p:spPr>
+        <p:txBody>
+          <a:bodyPr wrap="square" anchor="t" lIns="0" rIns="0" tIns="0" bIns="0"/>
+          <a:lstStyle/>
+          <a:p>
+            <a:pPr algn="l"/>
+            <a:r>
+              <a:rPr sz="1300" b="0" i="0">
+                <a:solidFill>
+                  <a:srgbClr val="202122"/>
+                </a:solidFill>
+                <a:latin typeface="Calibri"/>
+              </a:rPr>
+              <a:t>Install, configure, document, version control.</a:t>
+            </a:r>
+          </a:p>
+        </p:txBody>
+      </p:sp>
+      <p:sp>
+        <p:nvSpPr>
+          <p:cNvPr id="31" name="Oval 30"/>
           <p:cNvSpPr/>
           <p:nvPr/>
         </p:nvSpPr>
         <p:spPr>
           <a:xfrm>
-            <a:off x="8356396" y="4251960"/>
-            <a:ext cx="457200" cy="457200"/>
+            <a:off x="10589339" y="2407920"/>
+            <a:ext cx="640080" cy="640080"/>
           </a:xfrm>
           <a:prstGeom prst="ellipse">
             <a:avLst/>
@@ -7609,79 +10732,123 @@
           <a:p>
             <a:pPr algn="ctr"/>
             <a:r>
-              <a:rPr sz="1500" b="1">
+              <a:rPr sz="2000" b="1">
                 <a:solidFill>
                   <a:srgbClr val="202122"/>
                 </a:solidFill>
                 <a:latin typeface="Calibri"/>
               </a:rPr>
-              <a:t>6</a:t>
-            </a:r>
-          </a:p>
-        </p:txBody>
-      </p:sp>
-      <p:sp>
-        <p:nvSpPr>
-          <p:cNvPr id="28" name="TextBox 27"/>
-          <p:cNvSpPr txBox="1"/>
-          <p:nvPr/>
-        </p:nvSpPr>
-        <p:spPr>
-          <a:xfrm>
-            <a:off x="8950756" y="4224528"/>
-            <a:ext cx="2509418" cy="512064"/>
-          </a:xfrm>
-          <a:prstGeom prst="rect">
-            <a:avLst/>
-          </a:prstGeom>
-          <a:noFill/>
-        </p:spPr>
-        <p:txBody>
-          <a:bodyPr wrap="square" anchor="ctr" lIns="0" rIns="0" tIns="0" bIns="0"/>
+              <a:t>7</a:t>
+            </a:r>
+          </a:p>
+        </p:txBody>
+      </p:sp>
+      <p:sp>
+        <p:nvSpPr>
+          <p:cNvPr id="32" name="TextBox 31"/>
+          <p:cNvSpPr txBox="1"/>
+          <p:nvPr/>
+        </p:nvSpPr>
+        <p:spPr>
+          <a:xfrm>
+            <a:off x="10175704" y="3185159"/>
+            <a:ext cx="1467350" cy="731520"/>
+          </a:xfrm>
+          <a:prstGeom prst="rect">
+            <a:avLst/>
+          </a:prstGeom>
+          <a:noFill/>
+        </p:spPr>
+        <p:txBody>
+          <a:bodyPr wrap="square" anchor="t" lIns="0" rIns="0" tIns="0" bIns="0"/>
+          <a:lstStyle/>
+          <a:p>
+            <a:pPr algn="ctr"/>
+            <a:r>
+              <a:rPr sz="1700" b="1" i="0">
+                <a:solidFill>
+                  <a:srgbClr val="03306E"/>
+                </a:solidFill>
+                <a:latin typeface="Calibri"/>
+              </a:rPr>
+              <a:t>Maintain</a:t>
+            </a:r>
+          </a:p>
+        </p:txBody>
+      </p:sp>
+      <p:sp>
+        <p:nvSpPr>
+          <p:cNvPr id="33" name="Rounded Rectangle 32"/>
+          <p:cNvSpPr/>
+          <p:nvPr/>
+        </p:nvSpPr>
+        <p:spPr>
+          <a:xfrm>
+            <a:off x="10175704" y="3962399"/>
+            <a:ext cx="1467350" cy="1402080"/>
+          </a:xfrm>
+          <a:prstGeom prst="roundRect">
+            <a:avLst>
+              <a:gd name="adj" fmla="val 6000"/>
+            </a:avLst>
+          </a:prstGeom>
+          <a:solidFill>
+            <a:srgbClr val="EAF3FF"/>
+          </a:solidFill>
+          <a:ln>
+            <a:noFill/>
+          </a:ln>
+          <a:effectLst/>
+        </p:spPr>
+        <p:style>
+          <a:lnRef idx="1">
+            <a:schemeClr val="accent1"/>
+          </a:lnRef>
+          <a:fillRef idx="3">
+            <a:schemeClr val="accent1"/>
+          </a:fillRef>
+          <a:effectRef idx="2">
+            <a:schemeClr val="accent1"/>
+          </a:effectRef>
+          <a:fontRef idx="minor">
+            <a:schemeClr val="lt1"/>
+          </a:fontRef>
+        </p:style>
+        <p:txBody>
+          <a:bodyPr rtlCol="0" anchor="ctr"/>
+          <a:lstStyle/>
+          <a:p/>
+        </p:txBody>
+      </p:sp>
+      <p:sp>
+        <p:nvSpPr>
+          <p:cNvPr id="34" name="TextBox 33"/>
+          <p:cNvSpPr txBox="1"/>
+          <p:nvPr/>
+        </p:nvSpPr>
+        <p:spPr>
+          <a:xfrm>
+            <a:off x="10312864" y="4099560"/>
+            <a:ext cx="1193030" cy="1127759"/>
+          </a:xfrm>
+          <a:prstGeom prst="rect">
+            <a:avLst/>
+          </a:prstGeom>
+          <a:noFill/>
+        </p:spPr>
+        <p:txBody>
+          <a:bodyPr wrap="square" anchor="t" lIns="0" rIns="0" tIns="0" bIns="0"/>
           <a:lstStyle/>
           <a:p>
             <a:pPr algn="l"/>
             <a:r>
-              <a:rPr sz="1900" b="1" i="0">
-                <a:solidFill>
-                  <a:srgbClr val="03306E"/>
-                </a:solidFill>
-                <a:latin typeface="Calibri"/>
-              </a:rPr>
-              <a:t>Risk</a:t>
-            </a:r>
-          </a:p>
-        </p:txBody>
-      </p:sp>
-      <p:sp>
-        <p:nvSpPr>
-          <p:cNvPr id="29" name="TextBox 28"/>
-          <p:cNvSpPr txBox="1"/>
-          <p:nvPr/>
-        </p:nvSpPr>
-        <p:spPr>
-          <a:xfrm>
-            <a:off x="8356396" y="4892040"/>
-            <a:ext cx="3058058" cy="1143000"/>
-          </a:xfrm>
-          <a:prstGeom prst="rect">
-            <a:avLst/>
-          </a:prstGeom>
-          <a:noFill/>
-        </p:spPr>
-        <p:txBody>
-          <a:bodyPr wrap="square" anchor="t" lIns="0" rIns="0" tIns="0" bIns="0"/>
-          <a:lstStyle/>
-          <a:p>
-            <a:pPr algn="l"/>
-            <a:r>
-              <a:rPr sz="2000" b="0" i="0">
+              <a:rPr sz="1300" b="0" i="0">
                 <a:solidFill>
                   <a:srgbClr val="202122"/>
                 </a:solidFill>
                 <a:latin typeface="Calibri"/>
               </a:rPr>
-              <a:t>Identify risks and how to mitigate them.</a:t>
+              <a:t>Support, bug fixes, training, updates.</a:t>
             </a:r>
           </a:p>
         </p:txBody>
@@ -7773,7 +10940,7 @@
                 </a:solidFill>
                 <a:latin typeface="Cambria"/>
               </a:rPr>
-              <a:t>Functional and non-functional requirements</a:t>
+              <a:t>Quick check: The SDLC</a:t>
             </a:r>
           </a:p>
         </p:txBody>
@@ -7846,22 +11013,20 @@
       </p:sp>
       <p:sp>
         <p:nvSpPr>
-          <p:cNvPr id="6" name="Rounded Rectangle 5"/>
+          <p:cNvPr id="6" name="Oval 5"/>
           <p:cNvSpPr/>
           <p:nvPr/>
         </p:nvSpPr>
         <p:spPr>
           <a:xfrm>
-            <a:off x="548640" y="1600200"/>
-            <a:ext cx="5364327" cy="640080"/>
-          </a:xfrm>
-          <a:prstGeom prst="roundRect">
-            <a:avLst>
-              <a:gd name="adj" fmla="val 15000"/>
-            </a:avLst>
+            <a:off x="548640" y="1691640"/>
+            <a:ext cx="502920" cy="502920"/>
+          </a:xfrm>
+          <a:prstGeom prst="ellipse">
+            <a:avLst/>
           </a:prstGeom>
           <a:solidFill>
-            <a:srgbClr val="03306E"/>
+            <a:srgbClr val="33C17A"/>
           </a:solidFill>
           <a:ln>
             <a:noFill/>
@@ -7883,9 +11048,20 @@
           </a:fontRef>
         </p:style>
         <p:txBody>
-          <a:bodyPr rtlCol="0" anchor="ctr"/>
-          <a:lstStyle/>
-          <a:p/>
+          <a:bodyPr rtlCol="0" anchor="ctr" lIns="0" rIns="0" tIns="0" bIns="0"/>
+          <a:lstStyle/>
+          <a:p>
+            <a:pPr algn="ctr"/>
+            <a:r>
+              <a:rPr sz="1600" b="1">
+                <a:solidFill>
+                  <a:srgbClr val="202122"/>
+                </a:solidFill>
+                <a:latin typeface="Calibri"/>
+              </a:rPr>
+              <a:t>1</a:t>
+            </a:r>
+          </a:p>
         </p:txBody>
       </p:sp>
       <p:sp>
@@ -7896,49 +11072,47 @@
         </p:nvSpPr>
         <p:spPr>
           <a:xfrm>
-            <a:off x="777240" y="1600200"/>
-            <a:ext cx="4907127" cy="640080"/>
-          </a:xfrm>
-          <a:prstGeom prst="rect">
-            <a:avLst/>
-          </a:prstGeom>
-          <a:noFill/>
-        </p:spPr>
-        <p:txBody>
-          <a:bodyPr wrap="square" anchor="ctr" lIns="0" rIns="0" tIns="0" bIns="0"/>
+            <a:off x="1371600" y="1645920"/>
+            <a:ext cx="10271455" cy="1188720"/>
+          </a:xfrm>
+          <a:prstGeom prst="rect">
+            <a:avLst/>
+          </a:prstGeom>
+          <a:noFill/>
+        </p:spPr>
+        <p:txBody>
+          <a:bodyPr wrap="square" anchor="t" lIns="0" rIns="0" tIns="0" bIns="0"/>
           <a:lstStyle/>
           <a:p>
             <a:pPr algn="l"/>
             <a:r>
-              <a:rPr sz="2000" b="1" i="0">
-                <a:solidFill>
-                  <a:srgbClr val="FFFFFF"/>
-                </a:solidFill>
-                <a:latin typeface="Calibri"/>
-              </a:rPr>
-              <a:t>Functional: what it does</a:t>
-            </a:r>
-          </a:p>
-        </p:txBody>
-      </p:sp>
-      <p:sp>
-        <p:nvSpPr>
-          <p:cNvPr id="8" name="Rounded Rectangle 7"/>
+              <a:rPr sz="2400" b="0" i="0">
+                <a:solidFill>
+                  <a:srgbClr val="202122"/>
+                </a:solidFill>
+                <a:latin typeface="Calibri"/>
+              </a:rPr>
+              <a:t>Name the stage where user stories are written.</a:t>
+            </a:r>
+          </a:p>
+        </p:txBody>
+      </p:sp>
+      <p:sp>
+        <p:nvSpPr>
+          <p:cNvPr id="8" name="Oval 7"/>
           <p:cNvSpPr/>
           <p:nvPr/>
         </p:nvSpPr>
         <p:spPr>
           <a:xfrm>
-            <a:off x="548640" y="2377440"/>
-            <a:ext cx="5364327" cy="3794760"/>
-          </a:xfrm>
-          <a:prstGeom prst="roundRect">
-            <a:avLst>
-              <a:gd name="adj" fmla="val 4000"/>
-            </a:avLst>
+            <a:off x="548640" y="3108960"/>
+            <a:ext cx="502920" cy="502920"/>
+          </a:xfrm>
+          <a:prstGeom prst="ellipse">
+            <a:avLst/>
           </a:prstGeom>
           <a:solidFill>
-            <a:srgbClr val="EAF3FF"/>
+            <a:srgbClr val="33C17A"/>
           </a:solidFill>
           <a:ln>
             <a:noFill/>
@@ -7960,9 +11134,20 @@
           </a:fontRef>
         </p:style>
         <p:txBody>
-          <a:bodyPr rtlCol="0" anchor="ctr"/>
-          <a:lstStyle/>
-          <a:p/>
+          <a:bodyPr rtlCol="0" anchor="ctr" lIns="0" rIns="0" tIns="0" bIns="0"/>
+          <a:lstStyle/>
+          <a:p>
+            <a:pPr algn="ctr"/>
+            <a:r>
+              <a:rPr sz="1600" b="1">
+                <a:solidFill>
+                  <a:srgbClr val="202122"/>
+                </a:solidFill>
+                <a:latin typeface="Calibri"/>
+              </a:rPr>
+              <a:t>2</a:t>
+            </a:r>
+          </a:p>
         </p:txBody>
       </p:sp>
       <p:sp>
@@ -7973,144 +11158,47 @@
         </p:nvSpPr>
         <p:spPr>
           <a:xfrm>
-            <a:off x="822959" y="2606040"/>
-            <a:ext cx="4815687" cy="3337560"/>
-          </a:xfrm>
-          <a:prstGeom prst="rect">
-            <a:avLst/>
-          </a:prstGeom>
-          <a:noFill/>
-        </p:spPr>
-        <p:txBody>
-          <a:bodyPr wrap="square" lIns="0" rIns="0" tIns="0" bIns="0">
-            <a:spAutoFit/>
-          </a:bodyPr>
-          <a:lstStyle/>
-          <a:p>
-            <a:pPr marL="274320" indent="-274320">
-              <a:spcAft>
-                <a:spcPts val="990"/>
-              </a:spcAft>
-              <a:buClr>
-                <a:srgbClr val="0645AD"/>
-              </a:buClr>
-              <a:buFont typeface="Arial"/>
-              <a:buChar char="•"/>
-            </a:pPr>
-            <a:r>
-              <a:rPr sz="2200" b="0">
+            <a:off x="1371600" y="3063240"/>
+            <a:ext cx="10271455" cy="1188720"/>
+          </a:xfrm>
+          <a:prstGeom prst="rect">
+            <a:avLst/>
+          </a:prstGeom>
+          <a:noFill/>
+        </p:spPr>
+        <p:txBody>
+          <a:bodyPr wrap="square" anchor="t" lIns="0" rIns="0" tIns="0" bIns="0"/>
+          <a:lstStyle/>
+          <a:p>
+            <a:pPr algn="l"/>
+            <a:r>
+              <a:rPr sz="2400" b="0" i="0">
                 <a:solidFill>
                   <a:srgbClr val="202122"/>
                 </a:solidFill>
                 <a:latin typeface="Calibri"/>
               </a:rPr>
-              <a:t>Inputs needed</a:t>
-            </a:r>
-          </a:p>
-          <a:p>
-            <a:pPr marL="274320" indent="-274320">
-              <a:spcAft>
-                <a:spcPts val="990"/>
-              </a:spcAft>
-              <a:buClr>
-                <a:srgbClr val="0645AD"/>
-              </a:buClr>
-              <a:buFont typeface="Arial"/>
-              <a:buChar char="•"/>
-            </a:pPr>
-            <a:r>
-              <a:rPr sz="2200" b="0">
-                <a:solidFill>
-                  <a:srgbClr val="202122"/>
-                </a:solidFill>
-                <a:latin typeface="Calibri"/>
-              </a:rPr>
-              <a:t>Data needed</a:t>
-            </a:r>
-          </a:p>
-          <a:p>
-            <a:pPr marL="274320" indent="-274320">
-              <a:spcAft>
-                <a:spcPts val="990"/>
-              </a:spcAft>
-              <a:buClr>
-                <a:srgbClr val="0645AD"/>
-              </a:buClr>
-              <a:buFont typeface="Arial"/>
-              <a:buChar char="•"/>
-            </a:pPr>
-            <a:r>
-              <a:rPr sz="2200" b="0">
-                <a:solidFill>
-                  <a:srgbClr val="202122"/>
-                </a:solidFill>
-                <a:latin typeface="Calibri"/>
-              </a:rPr>
-              <a:t>Processing that must happen</a:t>
-            </a:r>
-          </a:p>
-          <a:p>
-            <a:pPr marL="274320" indent="-274320">
-              <a:spcAft>
-                <a:spcPts val="990"/>
-              </a:spcAft>
-              <a:buClr>
-                <a:srgbClr val="0645AD"/>
-              </a:buClr>
-              <a:buFont typeface="Arial"/>
-              <a:buChar char="•"/>
-            </a:pPr>
-            <a:r>
-              <a:rPr sz="2200" b="0">
-                <a:solidFill>
-                  <a:srgbClr val="202122"/>
-                </a:solidFill>
-                <a:latin typeface="Calibri"/>
-              </a:rPr>
-              <a:t>The system's logic</a:t>
-            </a:r>
-          </a:p>
-          <a:p>
-            <a:pPr marL="274320" indent="-274320">
-              <a:spcAft>
-                <a:spcPts val="990"/>
-              </a:spcAft>
-              <a:buClr>
-                <a:srgbClr val="0645AD"/>
-              </a:buClr>
-              <a:buFont typeface="Arial"/>
-              <a:buChar char="•"/>
-            </a:pPr>
-            <a:r>
-              <a:rPr sz="2200" b="0">
-                <a:solidFill>
-                  <a:srgbClr val="202122"/>
-                </a:solidFill>
-                <a:latin typeface="Calibri"/>
-              </a:rPr>
-              <a:t>Platforms it runs on</a:t>
-            </a:r>
-          </a:p>
-        </p:txBody>
-      </p:sp>
-      <p:sp>
-        <p:nvSpPr>
-          <p:cNvPr id="10" name="Rounded Rectangle 9"/>
+              <a:t>Why review AI-generated code?</a:t>
+            </a:r>
+          </a:p>
+        </p:txBody>
+      </p:sp>
+      <p:sp>
+        <p:nvSpPr>
+          <p:cNvPr id="10" name="Oval 9"/>
           <p:cNvSpPr/>
           <p:nvPr/>
         </p:nvSpPr>
         <p:spPr>
           <a:xfrm>
-            <a:off x="6278727" y="1600200"/>
-            <a:ext cx="5364327" cy="640080"/>
-          </a:xfrm>
-          <a:prstGeom prst="roundRect">
-            <a:avLst>
-              <a:gd name="adj" fmla="val 15000"/>
-            </a:avLst>
+            <a:off x="548640" y="4526280"/>
+            <a:ext cx="502920" cy="502920"/>
+          </a:xfrm>
+          <a:prstGeom prst="ellipse">
+            <a:avLst/>
           </a:prstGeom>
           <a:solidFill>
-            <a:srgbClr val="0645AD"/>
+            <a:srgbClr val="33C17A"/>
           </a:solidFill>
           <a:ln>
             <a:noFill/>
@@ -8132,9 +11220,20 @@
           </a:fontRef>
         </p:style>
         <p:txBody>
-          <a:bodyPr rtlCol="0" anchor="ctr"/>
-          <a:lstStyle/>
-          <a:p/>
+          <a:bodyPr rtlCol="0" anchor="ctr" lIns="0" rIns="0" tIns="0" bIns="0"/>
+          <a:lstStyle/>
+          <a:p>
+            <a:pPr algn="ctr"/>
+            <a:r>
+              <a:rPr sz="1600" b="1">
+                <a:solidFill>
+                  <a:srgbClr val="202122"/>
+                </a:solidFill>
+                <a:latin typeface="Calibri"/>
+              </a:rPr>
+              <a:t>3</a:t>
+            </a:r>
+          </a:p>
         </p:txBody>
       </p:sp>
       <p:sp>
@@ -8145,199 +11244,60 @@
         </p:nvSpPr>
         <p:spPr>
           <a:xfrm>
-            <a:off x="6507327" y="1600200"/>
-            <a:ext cx="4907127" cy="640080"/>
-          </a:xfrm>
-          <a:prstGeom prst="rect">
-            <a:avLst/>
-          </a:prstGeom>
-          <a:noFill/>
-        </p:spPr>
-        <p:txBody>
-          <a:bodyPr wrap="square" anchor="ctr" lIns="0" rIns="0" tIns="0" bIns="0"/>
+            <a:off x="1371600" y="4480560"/>
+            <a:ext cx="10271455" cy="1188720"/>
+          </a:xfrm>
+          <a:prstGeom prst="rect">
+            <a:avLst/>
+          </a:prstGeom>
+          <a:noFill/>
+        </p:spPr>
+        <p:txBody>
+          <a:bodyPr wrap="square" anchor="t" lIns="0" rIns="0" tIns="0" bIns="0"/>
           <a:lstStyle/>
           <a:p>
             <a:pPr algn="l"/>
             <a:r>
-              <a:rPr sz="2000" b="1" i="0">
-                <a:solidFill>
-                  <a:srgbClr val="FFFFFF"/>
-                </a:solidFill>
-                <a:latin typeface="Calibri"/>
-              </a:rPr>
-              <a:t>Non-functional: how well</a:t>
-            </a:r>
-          </a:p>
-        </p:txBody>
-      </p:sp>
-      <p:sp>
-        <p:nvSpPr>
-          <p:cNvPr id="12" name="Rounded Rectangle 11"/>
-          <p:cNvSpPr/>
-          <p:nvPr/>
-        </p:nvSpPr>
-        <p:spPr>
-          <a:xfrm>
-            <a:off x="6278727" y="2377440"/>
-            <a:ext cx="5364327" cy="3794760"/>
-          </a:xfrm>
-          <a:prstGeom prst="roundRect">
-            <a:avLst>
-              <a:gd name="adj" fmla="val 4000"/>
-            </a:avLst>
-          </a:prstGeom>
-          <a:solidFill>
-            <a:srgbClr val="EAF3FF"/>
-          </a:solidFill>
-          <a:ln>
-            <a:noFill/>
-          </a:ln>
-          <a:effectLst/>
-        </p:spPr>
-        <p:style>
-          <a:lnRef idx="1">
-            <a:schemeClr val="accent1"/>
-          </a:lnRef>
-          <a:fillRef idx="3">
-            <a:schemeClr val="accent1"/>
-          </a:fillRef>
-          <a:effectRef idx="2">
-            <a:schemeClr val="accent1"/>
-          </a:effectRef>
-          <a:fontRef idx="minor">
-            <a:schemeClr val="lt1"/>
-          </a:fontRef>
-        </p:style>
-        <p:txBody>
-          <a:bodyPr rtlCol="0" anchor="ctr"/>
-          <a:lstStyle/>
-          <a:p/>
-        </p:txBody>
-      </p:sp>
-      <p:sp>
-        <p:nvSpPr>
-          <p:cNvPr id="13" name="TextBox 12"/>
-          <p:cNvSpPr txBox="1"/>
-          <p:nvPr/>
-        </p:nvSpPr>
-        <p:spPr>
-          <a:xfrm>
-            <a:off x="6553047" y="2606040"/>
-            <a:ext cx="4815687" cy="3337560"/>
-          </a:xfrm>
-          <a:prstGeom prst="rect">
-            <a:avLst/>
-          </a:prstGeom>
-          <a:noFill/>
-        </p:spPr>
-        <p:txBody>
-          <a:bodyPr wrap="square" lIns="0" rIns="0" tIns="0" bIns="0">
-            <a:spAutoFit/>
-          </a:bodyPr>
-          <a:lstStyle/>
-          <a:p>
-            <a:pPr marL="274320" indent="-274320">
-              <a:spcAft>
-                <a:spcPts val="990"/>
-              </a:spcAft>
-              <a:buClr>
-                <a:srgbClr val="0645AD"/>
-              </a:buClr>
-              <a:buFont typeface="Arial"/>
-              <a:buChar char="•"/>
-            </a:pPr>
-            <a:r>
-              <a:rPr sz="2200" b="0">
+              <a:rPr sz="2400" b="0" i="0">
                 <a:solidFill>
                   <a:srgbClr val="202122"/>
                 </a:solidFill>
                 <a:latin typeface="Calibri"/>
               </a:rPr>
-              <a:t>Security</a:t>
-            </a:r>
-          </a:p>
-          <a:p>
-            <a:pPr marL="274320" indent="-274320">
-              <a:spcAft>
-                <a:spcPts val="990"/>
-              </a:spcAft>
-              <a:buClr>
-                <a:srgbClr val="0645AD"/>
-              </a:buClr>
-              <a:buFont typeface="Arial"/>
-              <a:buChar char="•"/>
-            </a:pPr>
-            <a:r>
-              <a:rPr sz="2200" b="0">
-                <a:solidFill>
-                  <a:srgbClr val="202122"/>
-                </a:solidFill>
-                <a:latin typeface="Calibri"/>
-              </a:rPr>
-              <a:t>Accessibility</a:t>
-            </a:r>
-          </a:p>
-          <a:p>
-            <a:pPr marL="274320" indent="-274320">
-              <a:spcAft>
-                <a:spcPts val="990"/>
-              </a:spcAft>
-              <a:buClr>
-                <a:srgbClr val="0645AD"/>
-              </a:buClr>
-              <a:buFont typeface="Arial"/>
-              <a:buChar char="•"/>
-            </a:pPr>
-            <a:r>
-              <a:rPr sz="2200" b="0">
-                <a:solidFill>
-                  <a:srgbClr val="202122"/>
-                </a:solidFill>
-                <a:latin typeface="Calibri"/>
-              </a:rPr>
-              <a:t>Scalability</a:t>
-            </a:r>
-          </a:p>
-          <a:p>
-            <a:pPr marL="274320" indent="-274320">
-              <a:spcAft>
-                <a:spcPts val="990"/>
-              </a:spcAft>
-              <a:buClr>
-                <a:srgbClr val="0645AD"/>
-              </a:buClr>
-              <a:buFont typeface="Arial"/>
-              <a:buChar char="•"/>
-            </a:pPr>
-            <a:r>
-              <a:rPr sz="2200" b="0">
-                <a:solidFill>
-                  <a:srgbClr val="202122"/>
-                </a:solidFill>
-                <a:latin typeface="Calibri"/>
-              </a:rPr>
-              <a:t>KPIs for responsiveness, load and reliability</a:t>
-            </a:r>
-          </a:p>
-          <a:p>
-            <a:pPr marL="274320" indent="-274320">
-              <a:spcAft>
-                <a:spcPts val="990"/>
-              </a:spcAft>
-              <a:buClr>
-                <a:srgbClr val="0645AD"/>
-              </a:buClr>
-              <a:buFont typeface="Arial"/>
-              <a:buChar char="•"/>
-            </a:pPr>
-            <a:r>
-              <a:rPr sz="2200" b="0">
-                <a:solidFill>
-                  <a:srgbClr val="202122"/>
-                </a:solidFill>
-                <a:latin typeface="Calibri"/>
-              </a:rPr>
-              <a:t>User acceptance criteria</a:t>
+              <a:t>What happens during maintenance?</a:t>
+            </a:r>
+          </a:p>
+        </p:txBody>
+      </p:sp>
+      <p:sp>
+        <p:nvSpPr>
+          <p:cNvPr id="12" name="TextBox 11"/>
+          <p:cNvSpPr txBox="1"/>
+          <p:nvPr/>
+        </p:nvSpPr>
+        <p:spPr>
+          <a:xfrm>
+            <a:off x="548640" y="5852160"/>
+            <a:ext cx="11094415" cy="365760"/>
+          </a:xfrm>
+          <a:prstGeom prst="rect">
+            <a:avLst/>
+          </a:prstGeom>
+          <a:noFill/>
+        </p:spPr>
+        <p:txBody>
+          <a:bodyPr wrap="square" anchor="t" lIns="0" rIns="0" tIns="0" bIns="0"/>
+          <a:lstStyle/>
+          <a:p>
+            <a:pPr algn="l"/>
+            <a:r>
+              <a:rPr sz="1300" b="0" i="1">
+                <a:solidFill>
+                  <a:srgbClr val="54595D"/>
+                </a:solidFill>
+                <a:latin typeface="Calibri"/>
+              </a:rPr>
+              <a:t>Answer on mini whiteboards or in your book. Answers are in the speaker notes.</a:t>
             </a:r>
           </a:p>
         </p:txBody>
@@ -8429,7 +11389,7 @@
                 </a:solidFill>
                 <a:latin typeface="Cambria"/>
               </a:rPr>
-              <a:t>User analysis tools</a:t>
+              <a:t>Planning and requirement analysis</a:t>
             </a:r>
           </a:p>
         </p:txBody>
@@ -8509,7 +11469,7 @@
         <p:spPr>
           <a:xfrm>
             <a:off x="548640" y="1600200"/>
-            <a:ext cx="5410047" cy="2148840"/>
+            <a:ext cx="3515258" cy="2148840"/>
           </a:xfrm>
           <a:prstGeom prst="roundRect">
             <a:avLst>
@@ -8606,7 +11566,7 @@
         <p:spPr>
           <a:xfrm>
             <a:off x="1371600" y="1801368"/>
-            <a:ext cx="4404207" cy="512064"/>
+            <a:ext cx="2509418" cy="512064"/>
           </a:xfrm>
           <a:prstGeom prst="rect">
             <a:avLst/>
@@ -8625,7 +11585,7 @@
                 </a:solidFill>
                 <a:latin typeface="Calibri"/>
               </a:rPr>
-              <a:t>User stories</a:t>
+              <a:t>Scope</a:t>
             </a:r>
           </a:p>
         </p:txBody>
@@ -8639,7 +11599,7 @@
         <p:spPr>
           <a:xfrm>
             <a:off x="777240" y="2468880"/>
-            <a:ext cx="4952847" cy="1143000"/>
+            <a:ext cx="3058058" cy="1143000"/>
           </a:xfrm>
           <a:prstGeom prst="rect">
             <a:avLst/>
@@ -8658,7 +11618,7 @@
                 </a:solidFill>
                 <a:latin typeface="Calibri"/>
               </a:rPr>
-              <a:t>As a customer, I want to order ahead, so that I skip the queue.</a:t>
+              <a:t>Turn the brief into a project proposal with business requirements.</a:t>
             </a:r>
           </a:p>
         </p:txBody>
@@ -8671,8 +11631,8 @@
         </p:nvSpPr>
         <p:spPr>
           <a:xfrm>
-            <a:off x="6233007" y="1600200"/>
-            <a:ext cx="5410047" cy="2148840"/>
+            <a:off x="4338218" y="1600200"/>
+            <a:ext cx="3515258" cy="2148840"/>
           </a:xfrm>
           <a:prstGeom prst="roundRect">
             <a:avLst>
@@ -8715,7 +11675,7 @@
         </p:nvSpPr>
         <p:spPr>
           <a:xfrm>
-            <a:off x="6461607" y="1828800"/>
+            <a:off x="4566818" y="1828800"/>
             <a:ext cx="457200" cy="457200"/>
           </a:xfrm>
           <a:prstGeom prst="ellipse">
@@ -8768,8 +11728,8 @@
         </p:nvSpPr>
         <p:spPr>
           <a:xfrm>
-            <a:off x="7055967" y="1801368"/>
-            <a:ext cx="4404207" cy="512064"/>
+            <a:off x="5161178" y="1801368"/>
+            <a:ext cx="2509418" cy="512064"/>
           </a:xfrm>
           <a:prstGeom prst="rect">
             <a:avLst/>
@@ -8782,13 +11742,13 @@
           <a:p>
             <a:pPr algn="l"/>
             <a:r>
-              <a:rPr sz="1900" b="1" i="0">
+              <a:rPr sz="1600" b="1" i="0">
                 <a:solidFill>
                   <a:srgbClr val="03306E"/>
                 </a:solidFill>
                 <a:latin typeface="Calibri"/>
               </a:rPr>
-              <a:t>Activity and process diagrams</a:t>
+              <a:t>Computational thinking</a:t>
             </a:r>
           </a:p>
         </p:txBody>
@@ -8801,8 +11761,8 @@
         </p:nvSpPr>
         <p:spPr>
           <a:xfrm>
-            <a:off x="6461607" y="2468880"/>
-            <a:ext cx="4952847" cy="1143000"/>
+            <a:off x="4566818" y="2468880"/>
+            <a:ext cx="3058058" cy="1143000"/>
           </a:xfrm>
           <a:prstGeom prst="rect">
             <a:avLst/>
@@ -8821,7 +11781,7 @@
                 </a:solidFill>
                 <a:latin typeface="Calibri"/>
               </a:rPr>
-              <a:t>Show the steps a user or system goes through.</a:t>
+              <a:t>Decompose the problem, spot patterns, abstract the detail.</a:t>
             </a:r>
           </a:p>
         </p:txBody>
@@ -8834,8 +11794,8 @@
         </p:nvSpPr>
         <p:spPr>
           <a:xfrm>
-            <a:off x="548640" y="4023360"/>
-            <a:ext cx="5410047" cy="2148840"/>
+            <a:off x="8127796" y="1600200"/>
+            <a:ext cx="3515258" cy="2148840"/>
           </a:xfrm>
           <a:prstGeom prst="roundRect">
             <a:avLst>
@@ -8878,7 +11838,7 @@
         </p:nvSpPr>
         <p:spPr>
           <a:xfrm>
-            <a:off x="777240" y="4251960"/>
+            <a:off x="8356396" y="1828800"/>
             <a:ext cx="457200" cy="457200"/>
           </a:xfrm>
           <a:prstGeom prst="ellipse">
@@ -8931,8 +11891,8 @@
         </p:nvSpPr>
         <p:spPr>
           <a:xfrm>
-            <a:off x="1371600" y="4224528"/>
-            <a:ext cx="4404207" cy="512064"/>
+            <a:off x="8950756" y="1801368"/>
+            <a:ext cx="2509418" cy="512064"/>
           </a:xfrm>
           <a:prstGeom prst="rect">
             <a:avLst/>
@@ -8951,7 +11911,7 @@
                 </a:solidFill>
                 <a:latin typeface="Calibri"/>
               </a:rPr>
-              <a:t>Mind maps and road maps</a:t>
+              <a:t>Measures</a:t>
             </a:r>
           </a:p>
         </p:txBody>
@@ -8964,8 +11924,8 @@
         </p:nvSpPr>
         <p:spPr>
           <a:xfrm>
-            <a:off x="777240" y="4892040"/>
-            <a:ext cx="4952847" cy="1143000"/>
+            <a:off x="8356396" y="2468880"/>
+            <a:ext cx="3058058" cy="1143000"/>
           </a:xfrm>
           <a:prstGeom prst="rect">
             <a:avLst/>
@@ -8984,7 +11944,7 @@
                 </a:solidFill>
                 <a:latin typeface="Calibri"/>
               </a:rPr>
-              <a:t>Explore ideas and plan releases over time.</a:t>
+              <a:t>Set KPIs, performance constraints and user acceptance criteria.</a:t>
             </a:r>
           </a:p>
         </p:txBody>
@@ -8997,8 +11957,8 @@
         </p:nvSpPr>
         <p:spPr>
           <a:xfrm>
-            <a:off x="6233007" y="4023360"/>
-            <a:ext cx="5410047" cy="2148840"/>
+            <a:off x="548640" y="4023360"/>
+            <a:ext cx="3515258" cy="2148840"/>
           </a:xfrm>
           <a:prstGeom prst="roundRect">
             <a:avLst>
@@ -9041,7 +12001,7 @@
         </p:nvSpPr>
         <p:spPr>
           <a:xfrm>
-            <a:off x="6461607" y="4251960"/>
+            <a:off x="777240" y="4251960"/>
             <a:ext cx="457200" cy="457200"/>
           </a:xfrm>
           <a:prstGeom prst="ellipse">
@@ -9094,8 +12054,8 @@
         </p:nvSpPr>
         <p:spPr>
           <a:xfrm>
-            <a:off x="7055967" y="4224528"/>
-            <a:ext cx="4404207" cy="512064"/>
+            <a:off x="1371600" y="4224528"/>
+            <a:ext cx="2509418" cy="512064"/>
           </a:xfrm>
           <a:prstGeom prst="rect">
             <a:avLst/>
@@ -9114,7 +12074,7 @@
                 </a:solidFill>
                 <a:latin typeface="Calibri"/>
               </a:rPr>
-              <a:t>Entity relationship diagrams</a:t>
+              <a:t>Resources</a:t>
             </a:r>
           </a:p>
         </p:txBody>
@@ -9127,8 +12087,8 @@
         </p:nvSpPr>
         <p:spPr>
           <a:xfrm>
-            <a:off x="6461607" y="4892040"/>
-            <a:ext cx="4952847" cy="1143000"/>
+            <a:off x="777240" y="4892040"/>
+            <a:ext cx="3058058" cy="1143000"/>
           </a:xfrm>
           <a:prstGeom prst="rect">
             <a:avLst/>
@@ -9147,7 +12107,333 @@
                 </a:solidFill>
                 <a:latin typeface="Calibri"/>
               </a:rPr>
-              <a:t>Show the data and how it links.</a:t>
+              <a:t>Schedule tasks and milestones, allocate resources and estimate costs.</a:t>
+            </a:r>
+          </a:p>
+        </p:txBody>
+      </p:sp>
+      <p:sp>
+        <p:nvSpPr>
+          <p:cNvPr id="22" name="Rounded Rectangle 21"/>
+          <p:cNvSpPr/>
+          <p:nvPr/>
+        </p:nvSpPr>
+        <p:spPr>
+          <a:xfrm>
+            <a:off x="4338218" y="4023360"/>
+            <a:ext cx="3515258" cy="2148840"/>
+          </a:xfrm>
+          <a:prstGeom prst="roundRect">
+            <a:avLst>
+              <a:gd name="adj" fmla="val 6000"/>
+            </a:avLst>
+          </a:prstGeom>
+          <a:solidFill>
+            <a:srgbClr val="EAF3FF"/>
+          </a:solidFill>
+          <a:ln>
+            <a:noFill/>
+          </a:ln>
+          <a:effectLst/>
+        </p:spPr>
+        <p:style>
+          <a:lnRef idx="1">
+            <a:schemeClr val="accent1"/>
+          </a:lnRef>
+          <a:fillRef idx="3">
+            <a:schemeClr val="accent1"/>
+          </a:fillRef>
+          <a:effectRef idx="2">
+            <a:schemeClr val="accent1"/>
+          </a:effectRef>
+          <a:fontRef idx="minor">
+            <a:schemeClr val="lt1"/>
+          </a:fontRef>
+        </p:style>
+        <p:txBody>
+          <a:bodyPr rtlCol="0" anchor="ctr"/>
+          <a:lstStyle/>
+          <a:p/>
+        </p:txBody>
+      </p:sp>
+      <p:sp>
+        <p:nvSpPr>
+          <p:cNvPr id="23" name="Oval 22"/>
+          <p:cNvSpPr/>
+          <p:nvPr/>
+        </p:nvSpPr>
+        <p:spPr>
+          <a:xfrm>
+            <a:off x="4566818" y="4251960"/>
+            <a:ext cx="457200" cy="457200"/>
+          </a:xfrm>
+          <a:prstGeom prst="ellipse">
+            <a:avLst/>
+          </a:prstGeom>
+          <a:solidFill>
+            <a:srgbClr val="33C17A"/>
+          </a:solidFill>
+          <a:ln>
+            <a:noFill/>
+          </a:ln>
+          <a:effectLst/>
+        </p:spPr>
+        <p:style>
+          <a:lnRef idx="1">
+            <a:schemeClr val="accent1"/>
+          </a:lnRef>
+          <a:fillRef idx="3">
+            <a:schemeClr val="accent1"/>
+          </a:fillRef>
+          <a:effectRef idx="2">
+            <a:schemeClr val="accent1"/>
+          </a:effectRef>
+          <a:fontRef idx="minor">
+            <a:schemeClr val="lt1"/>
+          </a:fontRef>
+        </p:style>
+        <p:txBody>
+          <a:bodyPr rtlCol="0" anchor="ctr" lIns="0" rIns="0" tIns="0" bIns="0"/>
+          <a:lstStyle/>
+          <a:p>
+            <a:pPr algn="ctr"/>
+            <a:r>
+              <a:rPr sz="1500" b="1">
+                <a:solidFill>
+                  <a:srgbClr val="202122"/>
+                </a:solidFill>
+                <a:latin typeface="Calibri"/>
+              </a:rPr>
+              <a:t>5</a:t>
+            </a:r>
+          </a:p>
+        </p:txBody>
+      </p:sp>
+      <p:sp>
+        <p:nvSpPr>
+          <p:cNvPr id="24" name="TextBox 23"/>
+          <p:cNvSpPr txBox="1"/>
+          <p:nvPr/>
+        </p:nvSpPr>
+        <p:spPr>
+          <a:xfrm>
+            <a:off x="5161178" y="4224528"/>
+            <a:ext cx="2509418" cy="512064"/>
+          </a:xfrm>
+          <a:prstGeom prst="rect">
+            <a:avLst/>
+          </a:prstGeom>
+          <a:noFill/>
+        </p:spPr>
+        <p:txBody>
+          <a:bodyPr wrap="square" anchor="ctr" lIns="0" rIns="0" tIns="0" bIns="0"/>
+          <a:lstStyle/>
+          <a:p>
+            <a:pPr algn="l"/>
+            <a:r>
+              <a:rPr sz="1900" b="1" i="0">
+                <a:solidFill>
+                  <a:srgbClr val="03306E"/>
+                </a:solidFill>
+                <a:latin typeface="Calibri"/>
+              </a:rPr>
+              <a:t>Language choice</a:t>
+            </a:r>
+          </a:p>
+        </p:txBody>
+      </p:sp>
+      <p:sp>
+        <p:nvSpPr>
+          <p:cNvPr id="25" name="TextBox 24"/>
+          <p:cNvSpPr txBox="1"/>
+          <p:nvPr/>
+        </p:nvSpPr>
+        <p:spPr>
+          <a:xfrm>
+            <a:off x="4566818" y="4892040"/>
+            <a:ext cx="3058058" cy="1143000"/>
+          </a:xfrm>
+          <a:prstGeom prst="rect">
+            <a:avLst/>
+          </a:prstGeom>
+          <a:noFill/>
+        </p:spPr>
+        <p:txBody>
+          <a:bodyPr wrap="square" anchor="t" lIns="0" rIns="0" tIns="0" bIns="0"/>
+          <a:lstStyle/>
+          <a:p>
+            <a:pPr algn="l"/>
+            <a:r>
+              <a:rPr sz="2000" b="0" i="0">
+                <a:solidFill>
+                  <a:srgbClr val="202122"/>
+                </a:solidFill>
+                <a:latin typeface="Calibri"/>
+              </a:rPr>
+              <a:t>Suitability, policy, scalability, security, staff, cost, reliability.</a:t>
+            </a:r>
+          </a:p>
+        </p:txBody>
+      </p:sp>
+      <p:sp>
+        <p:nvSpPr>
+          <p:cNvPr id="26" name="Rounded Rectangle 25"/>
+          <p:cNvSpPr/>
+          <p:nvPr/>
+        </p:nvSpPr>
+        <p:spPr>
+          <a:xfrm>
+            <a:off x="8127796" y="4023360"/>
+            <a:ext cx="3515258" cy="2148840"/>
+          </a:xfrm>
+          <a:prstGeom prst="roundRect">
+            <a:avLst>
+              <a:gd name="adj" fmla="val 6000"/>
+            </a:avLst>
+          </a:prstGeom>
+          <a:solidFill>
+            <a:srgbClr val="EAF3FF"/>
+          </a:solidFill>
+          <a:ln>
+            <a:noFill/>
+          </a:ln>
+          <a:effectLst/>
+        </p:spPr>
+        <p:style>
+          <a:lnRef idx="1">
+            <a:schemeClr val="accent1"/>
+          </a:lnRef>
+          <a:fillRef idx="3">
+            <a:schemeClr val="accent1"/>
+          </a:fillRef>
+          <a:effectRef idx="2">
+            <a:schemeClr val="accent1"/>
+          </a:effectRef>
+          <a:fontRef idx="minor">
+            <a:schemeClr val="lt1"/>
+          </a:fontRef>
+        </p:style>
+        <p:txBody>
+          <a:bodyPr rtlCol="0" anchor="ctr"/>
+          <a:lstStyle/>
+          <a:p/>
+        </p:txBody>
+      </p:sp>
+      <p:sp>
+        <p:nvSpPr>
+          <p:cNvPr id="27" name="Oval 26"/>
+          <p:cNvSpPr/>
+          <p:nvPr/>
+        </p:nvSpPr>
+        <p:spPr>
+          <a:xfrm>
+            <a:off x="8356396" y="4251960"/>
+            <a:ext cx="457200" cy="457200"/>
+          </a:xfrm>
+          <a:prstGeom prst="ellipse">
+            <a:avLst/>
+          </a:prstGeom>
+          <a:solidFill>
+            <a:srgbClr val="33C17A"/>
+          </a:solidFill>
+          <a:ln>
+            <a:noFill/>
+          </a:ln>
+          <a:effectLst/>
+        </p:spPr>
+        <p:style>
+          <a:lnRef idx="1">
+            <a:schemeClr val="accent1"/>
+          </a:lnRef>
+          <a:fillRef idx="3">
+            <a:schemeClr val="accent1"/>
+          </a:fillRef>
+          <a:effectRef idx="2">
+            <a:schemeClr val="accent1"/>
+          </a:effectRef>
+          <a:fontRef idx="minor">
+            <a:schemeClr val="lt1"/>
+          </a:fontRef>
+        </p:style>
+        <p:txBody>
+          <a:bodyPr rtlCol="0" anchor="ctr" lIns="0" rIns="0" tIns="0" bIns="0"/>
+          <a:lstStyle/>
+          <a:p>
+            <a:pPr algn="ctr"/>
+            <a:r>
+              <a:rPr sz="1500" b="1">
+                <a:solidFill>
+                  <a:srgbClr val="202122"/>
+                </a:solidFill>
+                <a:latin typeface="Calibri"/>
+              </a:rPr>
+              <a:t>6</a:t>
+            </a:r>
+          </a:p>
+        </p:txBody>
+      </p:sp>
+      <p:sp>
+        <p:nvSpPr>
+          <p:cNvPr id="28" name="TextBox 27"/>
+          <p:cNvSpPr txBox="1"/>
+          <p:nvPr/>
+        </p:nvSpPr>
+        <p:spPr>
+          <a:xfrm>
+            <a:off x="8950756" y="4224528"/>
+            <a:ext cx="2509418" cy="512064"/>
+          </a:xfrm>
+          <a:prstGeom prst="rect">
+            <a:avLst/>
+          </a:prstGeom>
+          <a:noFill/>
+        </p:spPr>
+        <p:txBody>
+          <a:bodyPr wrap="square" anchor="ctr" lIns="0" rIns="0" tIns="0" bIns="0"/>
+          <a:lstStyle/>
+          <a:p>
+            <a:pPr algn="l"/>
+            <a:r>
+              <a:rPr sz="1900" b="1" i="0">
+                <a:solidFill>
+                  <a:srgbClr val="03306E"/>
+                </a:solidFill>
+                <a:latin typeface="Calibri"/>
+              </a:rPr>
+              <a:t>Risk</a:t>
+            </a:r>
+          </a:p>
+        </p:txBody>
+      </p:sp>
+      <p:sp>
+        <p:nvSpPr>
+          <p:cNvPr id="29" name="TextBox 28"/>
+          <p:cNvSpPr txBox="1"/>
+          <p:nvPr/>
+        </p:nvSpPr>
+        <p:spPr>
+          <a:xfrm>
+            <a:off x="8356396" y="4892040"/>
+            <a:ext cx="3058058" cy="1143000"/>
+          </a:xfrm>
+          <a:prstGeom prst="rect">
+            <a:avLst/>
+          </a:prstGeom>
+          <a:noFill/>
+        </p:spPr>
+        <p:txBody>
+          <a:bodyPr wrap="square" anchor="t" lIns="0" rIns="0" tIns="0" bIns="0"/>
+          <a:lstStyle/>
+          <a:p>
+            <a:pPr algn="l"/>
+            <a:r>
+              <a:rPr sz="2000" b="0" i="0">
+                <a:solidFill>
+                  <a:srgbClr val="202122"/>
+                </a:solidFill>
+                <a:latin typeface="Calibri"/>
+              </a:rPr>
+              <a:t>Identify risks and how to mitigate them.</a:t>
             </a:r>
           </a:p>
         </p:txBody>
@@ -9239,7 +12525,7 @@
                 </a:solidFill>
                 <a:latin typeface="Cambria"/>
               </a:rPr>
-              <a:t>Check your understanding</a:t>
+              <a:t>Functional and non-functional requirements</a:t>
             </a:r>
           </a:p>
         </p:txBody>
@@ -9312,14 +12598,129 @@
       </p:sp>
       <p:sp>
         <p:nvSpPr>
-          <p:cNvPr id="6" name="Oval 5"/>
+          <p:cNvPr id="6" name="TextBox 5"/>
+          <p:cNvSpPr txBox="1"/>
+          <p:nvPr/>
+        </p:nvSpPr>
+        <p:spPr>
+          <a:xfrm>
+            <a:off x="548640" y="1554480"/>
+            <a:ext cx="6720840" cy="4617720"/>
+          </a:xfrm>
+          <a:prstGeom prst="rect">
+            <a:avLst/>
+          </a:prstGeom>
+          <a:noFill/>
+        </p:spPr>
+        <p:txBody>
+          <a:bodyPr wrap="square" lIns="0" rIns="0" tIns="0" bIns="0">
+            <a:spAutoFit/>
+          </a:bodyPr>
+          <a:lstStyle/>
+          <a:p>
+            <a:pPr>
+              <a:spcAft>
+                <a:spcPts val="1320"/>
+              </a:spcAft>
+            </a:pPr>
+            <a:r>
+              <a:rPr sz="2200" b="0">
+                <a:solidFill>
+                  <a:srgbClr val="202122"/>
+                </a:solidFill>
+                <a:latin typeface="Calibri"/>
+              </a:rPr>
+              <a:t>Functional requirements say what the system does: the inputs it takes, the data it needs, the processing it performs, its logic and the platforms it runs on.</a:t>
+            </a:r>
+          </a:p>
+          <a:p>
+            <a:pPr>
+              <a:spcAft>
+                <a:spcPts val="1320"/>
+              </a:spcAft>
+            </a:pPr>
+            <a:r>
+              <a:rPr sz="2200" b="0">
+                <a:solidFill>
+                  <a:srgbClr val="202122"/>
+                </a:solidFill>
+                <a:latin typeface="Calibri"/>
+              </a:rPr>
+              <a:t>Non-functional requirements say how well it does it: security, accessibility, scalability, and measurable KPIs for responsiveness, load and reliability, plus user acceptance criteria.</a:t>
+            </a:r>
+          </a:p>
+          <a:p>
+            <a:pPr>
+              <a:spcAft>
+                <a:spcPts val="1320"/>
+              </a:spcAft>
+            </a:pPr>
+            <a:r>
+              <a:rPr sz="2200" b="0">
+                <a:solidFill>
+                  <a:srgbClr val="202122"/>
+                </a:solidFill>
+                <a:latin typeface="Calibri"/>
+              </a:rPr>
+              <a:t>Secure by design means security shapes both from the start. Spike testing is a short experiment early on to explore a problem and work out the scope of the solution.</a:t>
+            </a:r>
+          </a:p>
+        </p:txBody>
+      </p:sp>
+      <p:sp>
+        <p:nvSpPr>
+          <p:cNvPr id="7" name="Rounded Rectangle 6"/>
           <p:cNvSpPr/>
           <p:nvPr/>
         </p:nvSpPr>
         <p:spPr>
           <a:xfrm>
-            <a:off x="548640" y="1618488"/>
-            <a:ext cx="411480" cy="411480"/>
+            <a:off x="7772400" y="1554480"/>
+            <a:ext cx="3867912" cy="4526280"/>
+          </a:xfrm>
+          <a:prstGeom prst="roundRect">
+            <a:avLst>
+              <a:gd name="adj" fmla="val 8000"/>
+            </a:avLst>
+          </a:prstGeom>
+          <a:solidFill>
+            <a:srgbClr val="03306E"/>
+          </a:solidFill>
+          <a:ln>
+            <a:noFill/>
+          </a:ln>
+          <a:effectLst/>
+        </p:spPr>
+        <p:style>
+          <a:lnRef idx="1">
+            <a:schemeClr val="accent1"/>
+          </a:lnRef>
+          <a:fillRef idx="3">
+            <a:schemeClr val="accent1"/>
+          </a:fillRef>
+          <a:effectRef idx="2">
+            <a:schemeClr val="accent1"/>
+          </a:effectRef>
+          <a:fontRef idx="minor">
+            <a:schemeClr val="lt1"/>
+          </a:fontRef>
+        </p:style>
+        <p:txBody>
+          <a:bodyPr rtlCol="0" anchor="ctr"/>
+          <a:lstStyle/>
+          <a:p/>
+        </p:txBody>
+      </p:sp>
+      <p:sp>
+        <p:nvSpPr>
+          <p:cNvPr id="8" name="Oval 7"/>
+          <p:cNvSpPr/>
+          <p:nvPr/>
+        </p:nvSpPr>
+        <p:spPr>
+          <a:xfrm>
+            <a:off x="8046720" y="1828800"/>
+            <a:ext cx="548640" cy="548640"/>
           </a:xfrm>
           <a:prstGeom prst="ellipse">
             <a:avLst/>
@@ -9352,27 +12753,27 @@
           <a:p>
             <a:pPr algn="ctr"/>
             <a:r>
-              <a:rPr sz="1400" b="1">
+              <a:rPr sz="1300" b="1">
                 <a:solidFill>
                   <a:srgbClr val="202122"/>
                 </a:solidFill>
                 <a:latin typeface="Calibri"/>
               </a:rPr>
-              <a:t>1</a:t>
-            </a:r>
-          </a:p>
-        </p:txBody>
-      </p:sp>
-      <p:sp>
-        <p:nvSpPr>
-          <p:cNvPr id="7" name="TextBox 6"/>
-          <p:cNvSpPr txBox="1"/>
-          <p:nvPr/>
-        </p:nvSpPr>
-        <p:spPr>
-          <a:xfrm>
-            <a:off x="1234440" y="1600200"/>
-            <a:ext cx="10408615" cy="791870"/>
+              <a:t>e.g.</a:t>
+            </a:r>
+          </a:p>
+        </p:txBody>
+      </p:sp>
+      <p:sp>
+        <p:nvSpPr>
+          <p:cNvPr id="9" name="TextBox 8"/>
+          <p:cNvSpPr txBox="1"/>
+          <p:nvPr/>
+        </p:nvSpPr>
+        <p:spPr>
+          <a:xfrm>
+            <a:off x="8046720" y="2560320"/>
+            <a:ext cx="3291840" cy="365760"/>
           </a:xfrm>
           <a:prstGeom prst="rect">
             <a:avLst/>
@@ -9385,80 +12786,27 @@
           <a:p>
             <a:pPr algn="l"/>
             <a:r>
-              <a:rPr sz="2200" b="0" i="0">
-                <a:solidFill>
-                  <a:srgbClr val="202122"/>
-                </a:solidFill>
-                <a:latin typeface="Calibri"/>
-              </a:rPr>
-              <a:t>Name the SDLC stage where user stories are written.</a:t>
-            </a:r>
-          </a:p>
-        </p:txBody>
-      </p:sp>
-      <p:sp>
-        <p:nvSpPr>
-          <p:cNvPr id="8" name="Oval 7"/>
-          <p:cNvSpPr/>
-          <p:nvPr/>
-        </p:nvSpPr>
-        <p:spPr>
-          <a:xfrm>
-            <a:off x="548640" y="2574950"/>
-            <a:ext cx="411480" cy="411480"/>
-          </a:xfrm>
-          <a:prstGeom prst="ellipse">
-            <a:avLst/>
-          </a:prstGeom>
-          <a:solidFill>
-            <a:srgbClr val="33C17A"/>
-          </a:solidFill>
-          <a:ln>
-            <a:noFill/>
-          </a:ln>
-          <a:effectLst/>
-        </p:spPr>
-        <p:style>
-          <a:lnRef idx="1">
-            <a:schemeClr val="accent1"/>
-          </a:lnRef>
-          <a:fillRef idx="3">
-            <a:schemeClr val="accent1"/>
-          </a:fillRef>
-          <a:effectRef idx="2">
-            <a:schemeClr val="accent1"/>
-          </a:effectRef>
-          <a:fontRef idx="minor">
-            <a:schemeClr val="lt1"/>
-          </a:fontRef>
-        </p:style>
-        <p:txBody>
-          <a:bodyPr rtlCol="0" anchor="ctr" lIns="0" rIns="0" tIns="0" bIns="0"/>
-          <a:lstStyle/>
-          <a:p>
-            <a:pPr algn="ctr"/>
-            <a:r>
-              <a:rPr sz="1400" b="1">
-                <a:solidFill>
-                  <a:srgbClr val="202122"/>
-                </a:solidFill>
-                <a:latin typeface="Calibri"/>
-              </a:rPr>
-              <a:t>2</a:t>
-            </a:r>
-          </a:p>
-        </p:txBody>
-      </p:sp>
-      <p:sp>
-        <p:nvSpPr>
-          <p:cNvPr id="9" name="TextBox 8"/>
-          <p:cNvSpPr txBox="1"/>
-          <p:nvPr/>
-        </p:nvSpPr>
-        <p:spPr>
-          <a:xfrm>
-            <a:off x="1234440" y="2556662"/>
-            <a:ext cx="10408615" cy="791870"/>
+              <a:rPr sz="1300" b="1" i="0">
+                <a:solidFill>
+                  <a:srgbClr val="A9C8F0"/>
+                </a:solidFill>
+                <a:latin typeface="Calibri"/>
+              </a:rPr>
+              <a:t>EXAMPLE</a:t>
+            </a:r>
+          </a:p>
+        </p:txBody>
+      </p:sp>
+      <p:sp>
+        <p:nvSpPr>
+          <p:cNvPr id="10" name="TextBox 9"/>
+          <p:cNvSpPr txBox="1"/>
+          <p:nvPr/>
+        </p:nvSpPr>
+        <p:spPr>
+          <a:xfrm>
+            <a:off x="8046720" y="2971800"/>
+            <a:ext cx="3291840" cy="2971800"/>
           </a:xfrm>
           <a:prstGeom prst="rect">
             <a:avLst/>
@@ -9471,271 +12819,13 @@
           <a:p>
             <a:pPr algn="l"/>
             <a:r>
-              <a:rPr sz="2200" b="0" i="0">
-                <a:solidFill>
-                  <a:srgbClr val="202122"/>
-                </a:solidFill>
-                <a:latin typeface="Calibri"/>
-              </a:rPr>
-              <a:t>Is 'the app loads in under 2 seconds' functional or non-functional?</a:t>
-            </a:r>
-          </a:p>
-        </p:txBody>
-      </p:sp>
-      <p:sp>
-        <p:nvSpPr>
-          <p:cNvPr id="10" name="Oval 9"/>
-          <p:cNvSpPr/>
-          <p:nvPr/>
-        </p:nvSpPr>
-        <p:spPr>
-          <a:xfrm>
-            <a:off x="548640" y="3531412"/>
-            <a:ext cx="411480" cy="411480"/>
-          </a:xfrm>
-          <a:prstGeom prst="ellipse">
-            <a:avLst/>
-          </a:prstGeom>
-          <a:solidFill>
-            <a:srgbClr val="33C17A"/>
-          </a:solidFill>
-          <a:ln>
-            <a:noFill/>
-          </a:ln>
-          <a:effectLst/>
-        </p:spPr>
-        <p:style>
-          <a:lnRef idx="1">
-            <a:schemeClr val="accent1"/>
-          </a:lnRef>
-          <a:fillRef idx="3">
-            <a:schemeClr val="accent1"/>
-          </a:fillRef>
-          <a:effectRef idx="2">
-            <a:schemeClr val="accent1"/>
-          </a:effectRef>
-          <a:fontRef idx="minor">
-            <a:schemeClr val="lt1"/>
-          </a:fontRef>
-        </p:style>
-        <p:txBody>
-          <a:bodyPr rtlCol="0" anchor="ctr" lIns="0" rIns="0" tIns="0" bIns="0"/>
-          <a:lstStyle/>
-          <a:p>
-            <a:pPr algn="ctr"/>
-            <a:r>
-              <a:rPr sz="1400" b="1">
-                <a:solidFill>
-                  <a:srgbClr val="202122"/>
-                </a:solidFill>
-                <a:latin typeface="Calibri"/>
-              </a:rPr>
-              <a:t>3</a:t>
-            </a:r>
-          </a:p>
-        </p:txBody>
-      </p:sp>
-      <p:sp>
-        <p:nvSpPr>
-          <p:cNvPr id="11" name="TextBox 10"/>
-          <p:cNvSpPr txBox="1"/>
-          <p:nvPr/>
-        </p:nvSpPr>
-        <p:spPr>
-          <a:xfrm>
-            <a:off x="1234440" y="3513124"/>
-            <a:ext cx="10408615" cy="791870"/>
-          </a:xfrm>
-          <a:prstGeom prst="rect">
-            <a:avLst/>
-          </a:prstGeom>
-          <a:noFill/>
-        </p:spPr>
-        <p:txBody>
-          <a:bodyPr wrap="square" anchor="t" lIns="0" rIns="0" tIns="0" bIns="0"/>
-          <a:lstStyle/>
-          <a:p>
-            <a:pPr algn="l"/>
-            <a:r>
-              <a:rPr sz="2200" b="0" i="0">
-                <a:solidFill>
-                  <a:srgbClr val="202122"/>
-                </a:solidFill>
-                <a:latin typeface="Calibri"/>
-              </a:rPr>
-              <a:t>What is secure by design?</a:t>
-            </a:r>
-          </a:p>
-        </p:txBody>
-      </p:sp>
-      <p:sp>
-        <p:nvSpPr>
-          <p:cNvPr id="12" name="Oval 11"/>
-          <p:cNvSpPr/>
-          <p:nvPr/>
-        </p:nvSpPr>
-        <p:spPr>
-          <a:xfrm>
-            <a:off x="548640" y="4487875"/>
-            <a:ext cx="411480" cy="411480"/>
-          </a:xfrm>
-          <a:prstGeom prst="ellipse">
-            <a:avLst/>
-          </a:prstGeom>
-          <a:solidFill>
-            <a:srgbClr val="33C17A"/>
-          </a:solidFill>
-          <a:ln>
-            <a:noFill/>
-          </a:ln>
-          <a:effectLst/>
-        </p:spPr>
-        <p:style>
-          <a:lnRef idx="1">
-            <a:schemeClr val="accent1"/>
-          </a:lnRef>
-          <a:fillRef idx="3">
-            <a:schemeClr val="accent1"/>
-          </a:fillRef>
-          <a:effectRef idx="2">
-            <a:schemeClr val="accent1"/>
-          </a:effectRef>
-          <a:fontRef idx="minor">
-            <a:schemeClr val="lt1"/>
-          </a:fontRef>
-        </p:style>
-        <p:txBody>
-          <a:bodyPr rtlCol="0" anchor="ctr" lIns="0" rIns="0" tIns="0" bIns="0"/>
-          <a:lstStyle/>
-          <a:p>
-            <a:pPr algn="ctr"/>
-            <a:r>
-              <a:rPr sz="1400" b="1">
-                <a:solidFill>
-                  <a:srgbClr val="202122"/>
-                </a:solidFill>
-                <a:latin typeface="Calibri"/>
-              </a:rPr>
-              <a:t>4</a:t>
-            </a:r>
-          </a:p>
-        </p:txBody>
-      </p:sp>
-      <p:sp>
-        <p:nvSpPr>
-          <p:cNvPr id="13" name="TextBox 12"/>
-          <p:cNvSpPr txBox="1"/>
-          <p:nvPr/>
-        </p:nvSpPr>
-        <p:spPr>
-          <a:xfrm>
-            <a:off x="1234440" y="4469587"/>
-            <a:ext cx="10408615" cy="791870"/>
-          </a:xfrm>
-          <a:prstGeom prst="rect">
-            <a:avLst/>
-          </a:prstGeom>
-          <a:noFill/>
-        </p:spPr>
-        <p:txBody>
-          <a:bodyPr wrap="square" anchor="t" lIns="0" rIns="0" tIns="0" bIns="0"/>
-          <a:lstStyle/>
-          <a:p>
-            <a:pPr algn="l"/>
-            <a:r>
-              <a:rPr sz="2200" b="0" i="0">
-                <a:solidFill>
-                  <a:srgbClr val="202122"/>
-                </a:solidFill>
-                <a:latin typeface="Calibri"/>
-              </a:rPr>
-              <a:t>What is spike testing used for?</a:t>
-            </a:r>
-          </a:p>
-        </p:txBody>
-      </p:sp>
-      <p:sp>
-        <p:nvSpPr>
-          <p:cNvPr id="14" name="Oval 13"/>
-          <p:cNvSpPr/>
-          <p:nvPr/>
-        </p:nvSpPr>
-        <p:spPr>
-          <a:xfrm>
-            <a:off x="548640" y="5444337"/>
-            <a:ext cx="411480" cy="411480"/>
-          </a:xfrm>
-          <a:prstGeom prst="ellipse">
-            <a:avLst/>
-          </a:prstGeom>
-          <a:solidFill>
-            <a:srgbClr val="33C17A"/>
-          </a:solidFill>
-          <a:ln>
-            <a:noFill/>
-          </a:ln>
-          <a:effectLst/>
-        </p:spPr>
-        <p:style>
-          <a:lnRef idx="1">
-            <a:schemeClr val="accent1"/>
-          </a:lnRef>
-          <a:fillRef idx="3">
-            <a:schemeClr val="accent1"/>
-          </a:fillRef>
-          <a:effectRef idx="2">
-            <a:schemeClr val="accent1"/>
-          </a:effectRef>
-          <a:fontRef idx="minor">
-            <a:schemeClr val="lt1"/>
-          </a:fontRef>
-        </p:style>
-        <p:txBody>
-          <a:bodyPr rtlCol="0" anchor="ctr" lIns="0" rIns="0" tIns="0" bIns="0"/>
-          <a:lstStyle/>
-          <a:p>
-            <a:pPr algn="ctr"/>
-            <a:r>
-              <a:rPr sz="1400" b="1">
-                <a:solidFill>
-                  <a:srgbClr val="202122"/>
-                </a:solidFill>
-                <a:latin typeface="Calibri"/>
-              </a:rPr>
-              <a:t>5</a:t>
-            </a:r>
-          </a:p>
-        </p:txBody>
-      </p:sp>
-      <p:sp>
-        <p:nvSpPr>
-          <p:cNvPr id="15" name="TextBox 14"/>
-          <p:cNvSpPr txBox="1"/>
-          <p:nvPr/>
-        </p:nvSpPr>
-        <p:spPr>
-          <a:xfrm>
-            <a:off x="1234440" y="5426049"/>
-            <a:ext cx="10408615" cy="791870"/>
-          </a:xfrm>
-          <a:prstGeom prst="rect">
-            <a:avLst/>
-          </a:prstGeom>
-          <a:noFill/>
-        </p:spPr>
-        <p:txBody>
-          <a:bodyPr wrap="square" anchor="t" lIns="0" rIns="0" tIns="0" bIns="0"/>
-          <a:lstStyle/>
-          <a:p>
-            <a:pPr algn="l"/>
-            <a:r>
-              <a:rPr sz="2200" b="0" i="0">
-                <a:solidFill>
-                  <a:srgbClr val="202122"/>
-                </a:solidFill>
-                <a:latin typeface="Calibri"/>
-              </a:rPr>
-              <a:t>Why review AI-generated code?</a:t>
+              <a:rPr sz="1900" b="0" i="0">
+                <a:solidFill>
+                  <a:srgbClr val="FFFFFF"/>
+                </a:solidFill>
+                <a:latin typeface="Cambria"/>
+              </a:rPr>
+              <a:t>Functional: 'the user can add items to a basket'. Non-functional: 'the basket page loads in under 2 seconds for 500 simultaneous users'.</a:t>
             </a:r>
           </a:p>
         </p:txBody>
@@ -9827,7 +12917,7 @@
                 </a:solidFill>
                 <a:latin typeface="Cambria"/>
               </a:rPr>
-              <a:t>Answers</a:t>
+              <a:t>Functional and non-functional requirements</a:t>
             </a:r>
           </a:p>
         </p:txBody>
@@ -9900,20 +12990,22 @@
       </p:sp>
       <p:sp>
         <p:nvSpPr>
-          <p:cNvPr id="6" name="Oval 5"/>
+          <p:cNvPr id="6" name="Rounded Rectangle 5"/>
           <p:cNvSpPr/>
           <p:nvPr/>
         </p:nvSpPr>
         <p:spPr>
           <a:xfrm>
-            <a:off x="548640" y="1618488"/>
-            <a:ext cx="411480" cy="411480"/>
-          </a:xfrm>
-          <a:prstGeom prst="ellipse">
-            <a:avLst/>
+            <a:off x="548640" y="1600200"/>
+            <a:ext cx="5364327" cy="640080"/>
+          </a:xfrm>
+          <a:prstGeom prst="roundRect">
+            <a:avLst>
+              <a:gd name="adj" fmla="val 15000"/>
+            </a:avLst>
           </a:prstGeom>
           <a:solidFill>
-            <a:srgbClr val="33C17A"/>
+            <a:srgbClr val="03306E"/>
           </a:solidFill>
           <a:ln>
             <a:noFill/>
@@ -9935,20 +13027,9 @@
           </a:fontRef>
         </p:style>
         <p:txBody>
-          <a:bodyPr rtlCol="0" anchor="ctr" lIns="0" rIns="0" tIns="0" bIns="0"/>
-          <a:lstStyle/>
-          <a:p>
-            <a:pPr algn="ctr"/>
-            <a:r>
-              <a:rPr sz="1400" b="1">
-                <a:solidFill>
-                  <a:srgbClr val="202122"/>
-                </a:solidFill>
-                <a:latin typeface="Calibri"/>
-              </a:rPr>
-              <a:t>1</a:t>
-            </a:r>
-          </a:p>
+          <a:bodyPr rtlCol="0" anchor="ctr"/>
+          <a:lstStyle/>
+          <a:p/>
         </p:txBody>
       </p:sp>
       <p:sp>
@@ -9959,58 +13040,49 @@
         </p:nvSpPr>
         <p:spPr>
           <a:xfrm>
-            <a:off x="1234440" y="1600200"/>
-            <a:ext cx="10408615" cy="791870"/>
-          </a:xfrm>
-          <a:prstGeom prst="rect">
-            <a:avLst/>
-          </a:prstGeom>
-          <a:noFill/>
-        </p:spPr>
-        <p:txBody>
-          <a:bodyPr wrap="square" anchor="t" lIns="0" rIns="0" tIns="0" bIns="0"/>
+            <a:off x="777240" y="1600200"/>
+            <a:ext cx="4907127" cy="640080"/>
+          </a:xfrm>
+          <a:prstGeom prst="rect">
+            <a:avLst/>
+          </a:prstGeom>
+          <a:noFill/>
+        </p:spPr>
+        <p:txBody>
+          <a:bodyPr wrap="square" anchor="ctr" lIns="0" rIns="0" tIns="0" bIns="0"/>
           <a:lstStyle/>
           <a:p>
             <a:pPr algn="l"/>
             <a:r>
-              <a:rPr sz="1800" b="0" i="0">
-                <a:solidFill>
-                  <a:srgbClr val="54595D"/>
-                </a:solidFill>
-                <a:latin typeface="Calibri"/>
-              </a:rPr>
-              <a:t>Name the SDLC stage where user stories are written.</a:t>
-            </a:r>
-          </a:p>
-          <a:p>
-            <a:r>
-              <a:rPr sz="1800" b="1">
-                <a:solidFill>
-                  <a:srgbClr val="03306E"/>
-                </a:solidFill>
-                <a:latin typeface="Calibri"/>
-              </a:rPr>
-              <a:t>Performing a user analysis.</a:t>
-            </a:r>
-          </a:p>
-        </p:txBody>
-      </p:sp>
-      <p:sp>
-        <p:nvSpPr>
-          <p:cNvPr id="8" name="Oval 7"/>
+              <a:rPr sz="2000" b="1" i="0">
+                <a:solidFill>
+                  <a:srgbClr val="FFFFFF"/>
+                </a:solidFill>
+                <a:latin typeface="Calibri"/>
+              </a:rPr>
+              <a:t>Functional: what it does</a:t>
+            </a:r>
+          </a:p>
+        </p:txBody>
+      </p:sp>
+      <p:sp>
+        <p:nvSpPr>
+          <p:cNvPr id="8" name="Rounded Rectangle 7"/>
           <p:cNvSpPr/>
           <p:nvPr/>
         </p:nvSpPr>
         <p:spPr>
           <a:xfrm>
-            <a:off x="548640" y="2574950"/>
-            <a:ext cx="411480" cy="411480"/>
-          </a:xfrm>
-          <a:prstGeom prst="ellipse">
-            <a:avLst/>
+            <a:off x="548640" y="2377440"/>
+            <a:ext cx="5364327" cy="3794760"/>
+          </a:xfrm>
+          <a:prstGeom prst="roundRect">
+            <a:avLst>
+              <a:gd name="adj" fmla="val 4000"/>
+            </a:avLst>
           </a:prstGeom>
           <a:solidFill>
-            <a:srgbClr val="33C17A"/>
+            <a:srgbClr val="EAF3FF"/>
           </a:solidFill>
           <a:ln>
             <a:noFill/>
@@ -10032,82 +13104,157 @@
           </a:fontRef>
         </p:style>
         <p:txBody>
-          <a:bodyPr rtlCol="0" anchor="ctr" lIns="0" rIns="0" tIns="0" bIns="0"/>
-          <a:lstStyle/>
-          <a:p>
-            <a:pPr algn="ctr"/>
-            <a:r>
-              <a:rPr sz="1400" b="1">
+          <a:bodyPr rtlCol="0" anchor="ctr"/>
+          <a:lstStyle/>
+          <a:p/>
+        </p:txBody>
+      </p:sp>
+      <p:sp>
+        <p:nvSpPr>
+          <p:cNvPr id="9" name="TextBox 8"/>
+          <p:cNvSpPr txBox="1"/>
+          <p:nvPr/>
+        </p:nvSpPr>
+        <p:spPr>
+          <a:xfrm>
+            <a:off x="822959" y="2606040"/>
+            <a:ext cx="4815687" cy="3337560"/>
+          </a:xfrm>
+          <a:prstGeom prst="rect">
+            <a:avLst/>
+          </a:prstGeom>
+          <a:noFill/>
+        </p:spPr>
+        <p:txBody>
+          <a:bodyPr wrap="square" lIns="0" rIns="0" tIns="0" bIns="0">
+            <a:spAutoFit/>
+          </a:bodyPr>
+          <a:lstStyle/>
+          <a:p>
+            <a:pPr marL="274320" indent="-274320">
+              <a:spcAft>
+                <a:spcPts val="990"/>
+              </a:spcAft>
+              <a:buClr>
+                <a:srgbClr val="0645AD"/>
+              </a:buClr>
+              <a:buFont typeface="Arial"/>
+              <a:buChar char="•"/>
+            </a:pPr>
+            <a:r>
+              <a:rPr sz="2200" b="0">
                 <a:solidFill>
                   <a:srgbClr val="202122"/>
                 </a:solidFill>
                 <a:latin typeface="Calibri"/>
               </a:rPr>
-              <a:t>2</a:t>
-            </a:r>
-          </a:p>
-        </p:txBody>
-      </p:sp>
-      <p:sp>
-        <p:nvSpPr>
-          <p:cNvPr id="9" name="TextBox 8"/>
-          <p:cNvSpPr txBox="1"/>
-          <p:nvPr/>
-        </p:nvSpPr>
-        <p:spPr>
-          <a:xfrm>
-            <a:off x="1234440" y="2556662"/>
-            <a:ext cx="10408615" cy="791870"/>
-          </a:xfrm>
-          <a:prstGeom prst="rect">
-            <a:avLst/>
-          </a:prstGeom>
-          <a:noFill/>
-        </p:spPr>
-        <p:txBody>
-          <a:bodyPr wrap="square" anchor="t" lIns="0" rIns="0" tIns="0" bIns="0"/>
-          <a:lstStyle/>
-          <a:p>
-            <a:pPr algn="l"/>
-            <a:r>
-              <a:rPr sz="1800" b="0" i="0">
-                <a:solidFill>
-                  <a:srgbClr val="54595D"/>
-                </a:solidFill>
-                <a:latin typeface="Calibri"/>
-              </a:rPr>
-              <a:t>Is 'the app loads in under 2 seconds' functional or non-functional?</a:t>
-            </a:r>
-          </a:p>
-          <a:p>
-            <a:r>
-              <a:rPr sz="1800" b="1">
-                <a:solidFill>
-                  <a:srgbClr val="03306E"/>
-                </a:solidFill>
-                <a:latin typeface="Calibri"/>
-              </a:rPr>
-              <a:t>Non-functional.</a:t>
-            </a:r>
-          </a:p>
-        </p:txBody>
-      </p:sp>
-      <p:sp>
-        <p:nvSpPr>
-          <p:cNvPr id="10" name="Oval 9"/>
+              <a:t>Inputs needed</a:t>
+            </a:r>
+          </a:p>
+          <a:p>
+            <a:pPr marL="274320" indent="-274320">
+              <a:spcAft>
+                <a:spcPts val="990"/>
+              </a:spcAft>
+              <a:buClr>
+                <a:srgbClr val="0645AD"/>
+              </a:buClr>
+              <a:buFont typeface="Arial"/>
+              <a:buChar char="•"/>
+            </a:pPr>
+            <a:r>
+              <a:rPr sz="2200" b="0">
+                <a:solidFill>
+                  <a:srgbClr val="202122"/>
+                </a:solidFill>
+                <a:latin typeface="Calibri"/>
+              </a:rPr>
+              <a:t>Data needed</a:t>
+            </a:r>
+          </a:p>
+          <a:p>
+            <a:pPr marL="274320" indent="-274320">
+              <a:spcAft>
+                <a:spcPts val="990"/>
+              </a:spcAft>
+              <a:buClr>
+                <a:srgbClr val="0645AD"/>
+              </a:buClr>
+              <a:buFont typeface="Arial"/>
+              <a:buChar char="•"/>
+            </a:pPr>
+            <a:r>
+              <a:rPr sz="2200" b="0">
+                <a:solidFill>
+                  <a:srgbClr val="202122"/>
+                </a:solidFill>
+                <a:latin typeface="Calibri"/>
+              </a:rPr>
+              <a:t>Processing that must happen</a:t>
+            </a:r>
+          </a:p>
+          <a:p>
+            <a:pPr marL="274320" indent="-274320">
+              <a:spcAft>
+                <a:spcPts val="990"/>
+              </a:spcAft>
+              <a:buClr>
+                <a:srgbClr val="0645AD"/>
+              </a:buClr>
+              <a:buFont typeface="Arial"/>
+              <a:buChar char="•"/>
+            </a:pPr>
+            <a:r>
+              <a:rPr sz="2200" b="0">
+                <a:solidFill>
+                  <a:srgbClr val="202122"/>
+                </a:solidFill>
+                <a:latin typeface="Calibri"/>
+              </a:rPr>
+              <a:t>The system's logic</a:t>
+            </a:r>
+          </a:p>
+          <a:p>
+            <a:pPr marL="274320" indent="-274320">
+              <a:spcAft>
+                <a:spcPts val="990"/>
+              </a:spcAft>
+              <a:buClr>
+                <a:srgbClr val="0645AD"/>
+              </a:buClr>
+              <a:buFont typeface="Arial"/>
+              <a:buChar char="•"/>
+            </a:pPr>
+            <a:r>
+              <a:rPr sz="2200" b="0">
+                <a:solidFill>
+                  <a:srgbClr val="202122"/>
+                </a:solidFill>
+                <a:latin typeface="Calibri"/>
+              </a:rPr>
+              <a:t>Platforms it runs on</a:t>
+            </a:r>
+          </a:p>
+        </p:txBody>
+      </p:sp>
+      <p:sp>
+        <p:nvSpPr>
+          <p:cNvPr id="10" name="Rounded Rectangle 9"/>
           <p:cNvSpPr/>
           <p:nvPr/>
         </p:nvSpPr>
         <p:spPr>
           <a:xfrm>
-            <a:off x="548640" y="3531412"/>
-            <a:ext cx="411480" cy="411480"/>
-          </a:xfrm>
-          <a:prstGeom prst="ellipse">
-            <a:avLst/>
+            <a:off x="6278727" y="1600200"/>
+            <a:ext cx="5364327" cy="640080"/>
+          </a:xfrm>
+          <a:prstGeom prst="roundRect">
+            <a:avLst>
+              <a:gd name="adj" fmla="val 15000"/>
+            </a:avLst>
           </a:prstGeom>
           <a:solidFill>
-            <a:srgbClr val="33C17A"/>
+            <a:srgbClr val="0645AD"/>
           </a:solidFill>
           <a:ln>
             <a:noFill/>
@@ -10129,20 +13276,9 @@
           </a:fontRef>
         </p:style>
         <p:txBody>
-          <a:bodyPr rtlCol="0" anchor="ctr" lIns="0" rIns="0" tIns="0" bIns="0"/>
-          <a:lstStyle/>
-          <a:p>
-            <a:pPr algn="ctr"/>
-            <a:r>
-              <a:rPr sz="1400" b="1">
-                <a:solidFill>
-                  <a:srgbClr val="202122"/>
-                </a:solidFill>
-                <a:latin typeface="Calibri"/>
-              </a:rPr>
-              <a:t>3</a:t>
-            </a:r>
-          </a:p>
+          <a:bodyPr rtlCol="0" anchor="ctr"/>
+          <a:lstStyle/>
+          <a:p/>
         </p:txBody>
       </p:sp>
       <p:sp>
@@ -10153,58 +13289,49 @@
         </p:nvSpPr>
         <p:spPr>
           <a:xfrm>
-            <a:off x="1234440" y="3513124"/>
-            <a:ext cx="10408615" cy="791870"/>
-          </a:xfrm>
-          <a:prstGeom prst="rect">
-            <a:avLst/>
-          </a:prstGeom>
-          <a:noFill/>
-        </p:spPr>
-        <p:txBody>
-          <a:bodyPr wrap="square" anchor="t" lIns="0" rIns="0" tIns="0" bIns="0"/>
+            <a:off x="6507327" y="1600200"/>
+            <a:ext cx="4907127" cy="640080"/>
+          </a:xfrm>
+          <a:prstGeom prst="rect">
+            <a:avLst/>
+          </a:prstGeom>
+          <a:noFill/>
+        </p:spPr>
+        <p:txBody>
+          <a:bodyPr wrap="square" anchor="ctr" lIns="0" rIns="0" tIns="0" bIns="0"/>
           <a:lstStyle/>
           <a:p>
             <a:pPr algn="l"/>
             <a:r>
-              <a:rPr sz="1800" b="0" i="0">
-                <a:solidFill>
-                  <a:srgbClr val="54595D"/>
-                </a:solidFill>
-                <a:latin typeface="Calibri"/>
-              </a:rPr>
-              <a:t>What is secure by design?</a:t>
-            </a:r>
-          </a:p>
-          <a:p>
-            <a:r>
-              <a:rPr sz="1800" b="1">
-                <a:solidFill>
-                  <a:srgbClr val="03306E"/>
-                </a:solidFill>
-                <a:latin typeface="Calibri"/>
-              </a:rPr>
-              <a:t>Building security into decisions from the start.</a:t>
-            </a:r>
-          </a:p>
-        </p:txBody>
-      </p:sp>
-      <p:sp>
-        <p:nvSpPr>
-          <p:cNvPr id="12" name="Oval 11"/>
+              <a:rPr sz="2000" b="1" i="0">
+                <a:solidFill>
+                  <a:srgbClr val="FFFFFF"/>
+                </a:solidFill>
+                <a:latin typeface="Calibri"/>
+              </a:rPr>
+              <a:t>Non-functional: how well</a:t>
+            </a:r>
+          </a:p>
+        </p:txBody>
+      </p:sp>
+      <p:sp>
+        <p:nvSpPr>
+          <p:cNvPr id="12" name="Rounded Rectangle 11"/>
           <p:cNvSpPr/>
           <p:nvPr/>
         </p:nvSpPr>
         <p:spPr>
           <a:xfrm>
-            <a:off x="548640" y="4487875"/>
-            <a:ext cx="411480" cy="411480"/>
-          </a:xfrm>
-          <a:prstGeom prst="ellipse">
-            <a:avLst/>
+            <a:off x="6278727" y="2377440"/>
+            <a:ext cx="5364327" cy="3794760"/>
+          </a:xfrm>
+          <a:prstGeom prst="roundRect">
+            <a:avLst>
+              <a:gd name="adj" fmla="val 4000"/>
+            </a:avLst>
           </a:prstGeom>
           <a:solidFill>
-            <a:srgbClr val="33C17A"/>
+            <a:srgbClr val="EAF3FF"/>
           </a:solidFill>
           <a:ln>
             <a:noFill/>
@@ -10226,159 +13353,135 @@
           </a:fontRef>
         </p:style>
         <p:txBody>
-          <a:bodyPr rtlCol="0" anchor="ctr" lIns="0" rIns="0" tIns="0" bIns="0"/>
-          <a:lstStyle/>
-          <a:p>
-            <a:pPr algn="ctr"/>
-            <a:r>
-              <a:rPr sz="1400" b="1">
+          <a:bodyPr rtlCol="0" anchor="ctr"/>
+          <a:lstStyle/>
+          <a:p/>
+        </p:txBody>
+      </p:sp>
+      <p:sp>
+        <p:nvSpPr>
+          <p:cNvPr id="13" name="TextBox 12"/>
+          <p:cNvSpPr txBox="1"/>
+          <p:nvPr/>
+        </p:nvSpPr>
+        <p:spPr>
+          <a:xfrm>
+            <a:off x="6553047" y="2606040"/>
+            <a:ext cx="4815687" cy="3337560"/>
+          </a:xfrm>
+          <a:prstGeom prst="rect">
+            <a:avLst/>
+          </a:prstGeom>
+          <a:noFill/>
+        </p:spPr>
+        <p:txBody>
+          <a:bodyPr wrap="square" lIns="0" rIns="0" tIns="0" bIns="0">
+            <a:spAutoFit/>
+          </a:bodyPr>
+          <a:lstStyle/>
+          <a:p>
+            <a:pPr marL="274320" indent="-274320">
+              <a:spcAft>
+                <a:spcPts val="990"/>
+              </a:spcAft>
+              <a:buClr>
+                <a:srgbClr val="0645AD"/>
+              </a:buClr>
+              <a:buFont typeface="Arial"/>
+              <a:buChar char="•"/>
+            </a:pPr>
+            <a:r>
+              <a:rPr sz="2200" b="0">
                 <a:solidFill>
                   <a:srgbClr val="202122"/>
                 </a:solidFill>
                 <a:latin typeface="Calibri"/>
               </a:rPr>
-              <a:t>4</a:t>
-            </a:r>
-          </a:p>
-        </p:txBody>
-      </p:sp>
-      <p:sp>
-        <p:nvSpPr>
-          <p:cNvPr id="13" name="TextBox 12"/>
-          <p:cNvSpPr txBox="1"/>
-          <p:nvPr/>
-        </p:nvSpPr>
-        <p:spPr>
-          <a:xfrm>
-            <a:off x="1234440" y="4469587"/>
-            <a:ext cx="10408615" cy="791870"/>
-          </a:xfrm>
-          <a:prstGeom prst="rect">
-            <a:avLst/>
-          </a:prstGeom>
-          <a:noFill/>
-        </p:spPr>
-        <p:txBody>
-          <a:bodyPr wrap="square" anchor="t" lIns="0" rIns="0" tIns="0" bIns="0"/>
-          <a:lstStyle/>
-          <a:p>
-            <a:pPr algn="l"/>
-            <a:r>
-              <a:rPr sz="1800" b="0" i="0">
-                <a:solidFill>
-                  <a:srgbClr val="54595D"/>
-                </a:solidFill>
-                <a:latin typeface="Calibri"/>
-              </a:rPr>
-              <a:t>What is spike testing used for?</a:t>
-            </a:r>
-          </a:p>
-          <a:p>
-            <a:r>
-              <a:rPr sz="1800" b="1">
-                <a:solidFill>
-                  <a:srgbClr val="03306E"/>
-                </a:solidFill>
-                <a:latin typeface="Calibri"/>
-              </a:rPr>
-              <a:t>Early investigation to establish requirements and scope.</a:t>
-            </a:r>
-          </a:p>
-        </p:txBody>
-      </p:sp>
-      <p:sp>
-        <p:nvSpPr>
-          <p:cNvPr id="14" name="Oval 13"/>
-          <p:cNvSpPr/>
-          <p:nvPr/>
-        </p:nvSpPr>
-        <p:spPr>
-          <a:xfrm>
-            <a:off x="548640" y="5444337"/>
-            <a:ext cx="411480" cy="411480"/>
-          </a:xfrm>
-          <a:prstGeom prst="ellipse">
-            <a:avLst/>
-          </a:prstGeom>
-          <a:solidFill>
-            <a:srgbClr val="33C17A"/>
-          </a:solidFill>
-          <a:ln>
-            <a:noFill/>
-          </a:ln>
-          <a:effectLst/>
-        </p:spPr>
-        <p:style>
-          <a:lnRef idx="1">
-            <a:schemeClr val="accent1"/>
-          </a:lnRef>
-          <a:fillRef idx="3">
-            <a:schemeClr val="accent1"/>
-          </a:fillRef>
-          <a:effectRef idx="2">
-            <a:schemeClr val="accent1"/>
-          </a:effectRef>
-          <a:fontRef idx="minor">
-            <a:schemeClr val="lt1"/>
-          </a:fontRef>
-        </p:style>
-        <p:txBody>
-          <a:bodyPr rtlCol="0" anchor="ctr" lIns="0" rIns="0" tIns="0" bIns="0"/>
-          <a:lstStyle/>
-          <a:p>
-            <a:pPr algn="ctr"/>
-            <a:r>
-              <a:rPr sz="1400" b="1">
+              <a:t>Security</a:t>
+            </a:r>
+          </a:p>
+          <a:p>
+            <a:pPr marL="274320" indent="-274320">
+              <a:spcAft>
+                <a:spcPts val="990"/>
+              </a:spcAft>
+              <a:buClr>
+                <a:srgbClr val="0645AD"/>
+              </a:buClr>
+              <a:buFont typeface="Arial"/>
+              <a:buChar char="•"/>
+            </a:pPr>
+            <a:r>
+              <a:rPr sz="2200" b="0">
                 <a:solidFill>
                   <a:srgbClr val="202122"/>
                 </a:solidFill>
                 <a:latin typeface="Calibri"/>
               </a:rPr>
-              <a:t>5</a:t>
-            </a:r>
-          </a:p>
-        </p:txBody>
-      </p:sp>
-      <p:sp>
-        <p:nvSpPr>
-          <p:cNvPr id="15" name="TextBox 14"/>
-          <p:cNvSpPr txBox="1"/>
-          <p:nvPr/>
-        </p:nvSpPr>
-        <p:spPr>
-          <a:xfrm>
-            <a:off x="1234440" y="5426049"/>
-            <a:ext cx="10408615" cy="791870"/>
-          </a:xfrm>
-          <a:prstGeom prst="rect">
-            <a:avLst/>
-          </a:prstGeom>
-          <a:noFill/>
-        </p:spPr>
-        <p:txBody>
-          <a:bodyPr wrap="square" anchor="t" lIns="0" rIns="0" tIns="0" bIns="0"/>
-          <a:lstStyle/>
-          <a:p>
-            <a:pPr algn="l"/>
-            <a:r>
-              <a:rPr sz="1800" b="0" i="0">
-                <a:solidFill>
-                  <a:srgbClr val="54595D"/>
-                </a:solidFill>
-                <a:latin typeface="Calibri"/>
-              </a:rPr>
-              <a:t>Why review AI-generated code?</a:t>
-            </a:r>
-          </a:p>
-          <a:p>
-            <a:r>
-              <a:rPr sz="1800" b="1">
-                <a:solidFill>
-                  <a:srgbClr val="03306E"/>
-                </a:solidFill>
-                <a:latin typeface="Calibri"/>
-              </a:rPr>
-              <a:t>To make sure it actually meets the requirements.</a:t>
+              <a:t>Accessibility</a:t>
+            </a:r>
+          </a:p>
+          <a:p>
+            <a:pPr marL="274320" indent="-274320">
+              <a:spcAft>
+                <a:spcPts val="990"/>
+              </a:spcAft>
+              <a:buClr>
+                <a:srgbClr val="0645AD"/>
+              </a:buClr>
+              <a:buFont typeface="Arial"/>
+              <a:buChar char="•"/>
+            </a:pPr>
+            <a:r>
+              <a:rPr sz="2200" b="0">
+                <a:solidFill>
+                  <a:srgbClr val="202122"/>
+                </a:solidFill>
+                <a:latin typeface="Calibri"/>
+              </a:rPr>
+              <a:t>Scalability</a:t>
+            </a:r>
+          </a:p>
+          <a:p>
+            <a:pPr marL="274320" indent="-274320">
+              <a:spcAft>
+                <a:spcPts val="990"/>
+              </a:spcAft>
+              <a:buClr>
+                <a:srgbClr val="0645AD"/>
+              </a:buClr>
+              <a:buFont typeface="Arial"/>
+              <a:buChar char="•"/>
+            </a:pPr>
+            <a:r>
+              <a:rPr sz="2200" b="0">
+                <a:solidFill>
+                  <a:srgbClr val="202122"/>
+                </a:solidFill>
+                <a:latin typeface="Calibri"/>
+              </a:rPr>
+              <a:t>KPIs for responsiveness, load and reliability</a:t>
+            </a:r>
+          </a:p>
+          <a:p>
+            <a:pPr marL="274320" indent="-274320">
+              <a:spcAft>
+                <a:spcPts val="990"/>
+              </a:spcAft>
+              <a:buClr>
+                <a:srgbClr val="0645AD"/>
+              </a:buClr>
+              <a:buFont typeface="Arial"/>
+              <a:buChar char="•"/>
+            </a:pPr>
+            <a:r>
+              <a:rPr sz="2200" b="0">
+                <a:solidFill>
+                  <a:srgbClr val="202122"/>
+                </a:solidFill>
+                <a:latin typeface="Calibri"/>
+              </a:rPr>
+              <a:t>User acceptance criteria</a:t>
             </a:r>
           </a:p>
         </p:txBody>
@@ -10464,13 +13567,13 @@
           <a:p>
             <a:pPr algn="l"/>
             <a:r>
-              <a:rPr sz="3200" b="1" i="0">
+              <a:rPr sz="3000" b="1" i="0">
                 <a:solidFill>
                   <a:srgbClr val="03306E"/>
                 </a:solidFill>
                 <a:latin typeface="Cambria"/>
               </a:rPr>
-              <a:t>Activity: Requirements for the bakery app</a:t>
+              <a:t>Quick check: Functional and non-functional requirements</a:t>
             </a:r>
           </a:p>
         </p:txBody>
@@ -10543,19 +13646,17 @@
       </p:sp>
       <p:sp>
         <p:nvSpPr>
-          <p:cNvPr id="6" name="Rounded Rectangle 5"/>
+          <p:cNvPr id="6" name="Oval 5"/>
           <p:cNvSpPr/>
           <p:nvPr/>
         </p:nvSpPr>
         <p:spPr>
           <a:xfrm>
-            <a:off x="548640" y="1508760"/>
-            <a:ext cx="2011680" cy="457200"/>
-          </a:xfrm>
-          <a:prstGeom prst="roundRect">
-            <a:avLst>
-              <a:gd name="adj" fmla="val 50000"/>
-            </a:avLst>
+            <a:off x="548640" y="1691640"/>
+            <a:ext cx="502920" cy="502920"/>
+          </a:xfrm>
+          <a:prstGeom prst="ellipse">
+            <a:avLst/>
           </a:prstGeom>
           <a:solidFill>
             <a:srgbClr val="33C17A"/>
@@ -10580,9 +13681,20 @@
           </a:fontRef>
         </p:style>
         <p:txBody>
-          <a:bodyPr rtlCol="0" anchor="ctr"/>
-          <a:lstStyle/>
-          <a:p/>
+          <a:bodyPr rtlCol="0" anchor="ctr" lIns="0" rIns="0" tIns="0" bIns="0"/>
+          <a:lstStyle/>
+          <a:p>
+            <a:pPr algn="ctr"/>
+            <a:r>
+              <a:rPr sz="1600" b="1">
+                <a:solidFill>
+                  <a:srgbClr val="202122"/>
+                </a:solidFill>
+                <a:latin typeface="Calibri"/>
+              </a:rPr>
+              <a:t>1</a:t>
+            </a:r>
+          </a:p>
         </p:txBody>
       </p:sp>
       <p:sp>
@@ -10593,80 +13705,47 @@
         </p:nvSpPr>
         <p:spPr>
           <a:xfrm>
-            <a:off x="548640" y="1508760"/>
-            <a:ext cx="2011680" cy="457200"/>
-          </a:xfrm>
-          <a:prstGeom prst="rect">
-            <a:avLst/>
-          </a:prstGeom>
-          <a:noFill/>
-        </p:spPr>
-        <p:txBody>
-          <a:bodyPr wrap="square" anchor="ctr" lIns="0" rIns="0" tIns="0" bIns="0"/>
-          <a:lstStyle/>
-          <a:p>
-            <a:pPr algn="ctr"/>
-            <a:r>
-              <a:rPr sz="1400" b="1" i="0">
+            <a:off x="1371600" y="1645920"/>
+            <a:ext cx="10271455" cy="1188720"/>
+          </a:xfrm>
+          <a:prstGeom prst="rect">
+            <a:avLst/>
+          </a:prstGeom>
+          <a:noFill/>
+        </p:spPr>
+        <p:txBody>
+          <a:bodyPr wrap="square" anchor="t" lIns="0" rIns="0" tIns="0" bIns="0"/>
+          <a:lstStyle/>
+          <a:p>
+            <a:pPr algn="l"/>
+            <a:r>
+              <a:rPr sz="2400" b="0" i="0">
                 <a:solidFill>
                   <a:srgbClr val="202122"/>
                 </a:solidFill>
                 <a:latin typeface="Calibri"/>
               </a:rPr>
-              <a:t>30 minutes</a:t>
-            </a:r>
-          </a:p>
-        </p:txBody>
-      </p:sp>
-      <p:sp>
-        <p:nvSpPr>
-          <p:cNvPr id="8" name="TextBox 7"/>
-          <p:cNvSpPr txBox="1"/>
-          <p:nvPr/>
-        </p:nvSpPr>
-        <p:spPr>
-          <a:xfrm>
-            <a:off x="2743200" y="1508760"/>
-            <a:ext cx="4754880" cy="457200"/>
-          </a:xfrm>
-          <a:prstGeom prst="rect">
-            <a:avLst/>
-          </a:prstGeom>
-          <a:noFill/>
-        </p:spPr>
-        <p:txBody>
-          <a:bodyPr wrap="square" anchor="ctr" lIns="0" rIns="0" tIns="0" bIns="0"/>
-          <a:lstStyle/>
-          <a:p>
-            <a:pPr algn="l"/>
-            <a:r>
-              <a:rPr sz="1400" b="0" i="1">
-                <a:solidFill>
-                  <a:srgbClr val="54595D"/>
-                </a:solidFill>
-                <a:latin typeface="Calibri"/>
-              </a:rPr>
-              <a:t>Pairs</a:t>
-            </a:r>
-          </a:p>
-        </p:txBody>
-      </p:sp>
-      <p:sp>
-        <p:nvSpPr>
-          <p:cNvPr id="9" name="Oval 8"/>
+              <a:t>Is 'the app must work with a screen reader' functional or non-functional?</a:t>
+            </a:r>
+          </a:p>
+        </p:txBody>
+      </p:sp>
+      <p:sp>
+        <p:nvSpPr>
+          <p:cNvPr id="8" name="Oval 7"/>
           <p:cNvSpPr/>
           <p:nvPr/>
         </p:nvSpPr>
         <p:spPr>
           <a:xfrm>
-            <a:off x="548640" y="2482596"/>
-            <a:ext cx="384048" cy="384048"/>
+            <a:off x="548640" y="3108960"/>
+            <a:ext cx="502920" cy="502920"/>
           </a:xfrm>
           <a:prstGeom prst="ellipse">
             <a:avLst/>
           </a:prstGeom>
           <a:solidFill>
-            <a:srgbClr val="0645AD"/>
+            <a:srgbClr val="33C17A"/>
           </a:solidFill>
           <a:ln>
             <a:noFill/>
@@ -10693,66 +13772,66 @@
           <a:p>
             <a:pPr algn="ctr"/>
             <a:r>
-              <a:rPr sz="1300" b="1">
-                <a:solidFill>
-                  <a:srgbClr val="FFFFFF"/>
-                </a:solidFill>
-                <a:latin typeface="Calibri"/>
-              </a:rPr>
-              <a:t>1</a:t>
-            </a:r>
-          </a:p>
-        </p:txBody>
-      </p:sp>
-      <p:sp>
-        <p:nvSpPr>
-          <p:cNvPr id="10" name="TextBox 9"/>
-          <p:cNvSpPr txBox="1"/>
-          <p:nvPr/>
-        </p:nvSpPr>
-        <p:spPr>
-          <a:xfrm>
-            <a:off x="1143000" y="2240280"/>
-            <a:ext cx="5943600" cy="868680"/>
-          </a:xfrm>
-          <a:prstGeom prst="rect">
-            <a:avLst/>
-          </a:prstGeom>
-          <a:noFill/>
-        </p:spPr>
-        <p:txBody>
-          <a:bodyPr wrap="square" anchor="ctr" lIns="0" rIns="0" tIns="0" bIns="0"/>
+              <a:rPr sz="1600" b="1">
+                <a:solidFill>
+                  <a:srgbClr val="202122"/>
+                </a:solidFill>
+                <a:latin typeface="Calibri"/>
+              </a:rPr>
+              <a:t>2</a:t>
+            </a:r>
+          </a:p>
+        </p:txBody>
+      </p:sp>
+      <p:sp>
+        <p:nvSpPr>
+          <p:cNvPr id="9" name="TextBox 8"/>
+          <p:cNvSpPr txBox="1"/>
+          <p:nvPr/>
+        </p:nvSpPr>
+        <p:spPr>
+          <a:xfrm>
+            <a:off x="1371600" y="3063240"/>
+            <a:ext cx="10271455" cy="1188720"/>
+          </a:xfrm>
+          <a:prstGeom prst="rect">
+            <a:avLst/>
+          </a:prstGeom>
+          <a:noFill/>
+        </p:spPr>
+        <p:txBody>
+          <a:bodyPr wrap="square" anchor="t" lIns="0" rIns="0" tIns="0" bIns="0"/>
           <a:lstStyle/>
           <a:p>
             <a:pPr algn="l"/>
             <a:r>
-              <a:rPr sz="1700" b="0" i="0">
+              <a:rPr sz="2400" b="0" i="0">
                 <a:solidFill>
                   <a:srgbClr val="202122"/>
                 </a:solidFill>
                 <a:latin typeface="Calibri"/>
               </a:rPr>
-              <a:t>Write five user stories for the bakery app.</a:t>
-            </a:r>
-          </a:p>
-        </p:txBody>
-      </p:sp>
-      <p:sp>
-        <p:nvSpPr>
-          <p:cNvPr id="11" name="Oval 10"/>
+              <a:t>What is secure by design?</a:t>
+            </a:r>
+          </a:p>
+        </p:txBody>
+      </p:sp>
+      <p:sp>
+        <p:nvSpPr>
+          <p:cNvPr id="10" name="Oval 9"/>
           <p:cNvSpPr/>
           <p:nvPr/>
         </p:nvSpPr>
         <p:spPr>
           <a:xfrm>
-            <a:off x="548640" y="3461004"/>
-            <a:ext cx="384048" cy="384048"/>
+            <a:off x="548640" y="4526280"/>
+            <a:ext cx="502920" cy="502920"/>
           </a:xfrm>
           <a:prstGeom prst="ellipse">
             <a:avLst/>
           </a:prstGeom>
           <a:solidFill>
-            <a:srgbClr val="0645AD"/>
+            <a:srgbClr val="33C17A"/>
           </a:solidFill>
           <a:ln>
             <a:noFill/>
@@ -10779,13 +13858,46 @@
           <a:p>
             <a:pPr algn="ctr"/>
             <a:r>
-              <a:rPr sz="1300" b="1">
-                <a:solidFill>
-                  <a:srgbClr val="FFFFFF"/>
-                </a:solidFill>
-                <a:latin typeface="Calibri"/>
-              </a:rPr>
-              <a:t>2</a:t>
+              <a:rPr sz="1600" b="1">
+                <a:solidFill>
+                  <a:srgbClr val="202122"/>
+                </a:solidFill>
+                <a:latin typeface="Calibri"/>
+              </a:rPr>
+              <a:t>3</a:t>
+            </a:r>
+          </a:p>
+        </p:txBody>
+      </p:sp>
+      <p:sp>
+        <p:nvSpPr>
+          <p:cNvPr id="11" name="TextBox 10"/>
+          <p:cNvSpPr txBox="1"/>
+          <p:nvPr/>
+        </p:nvSpPr>
+        <p:spPr>
+          <a:xfrm>
+            <a:off x="1371600" y="4480560"/>
+            <a:ext cx="10271455" cy="1188720"/>
+          </a:xfrm>
+          <a:prstGeom prst="rect">
+            <a:avLst/>
+          </a:prstGeom>
+          <a:noFill/>
+        </p:spPr>
+        <p:txBody>
+          <a:bodyPr wrap="square" anchor="t" lIns="0" rIns="0" tIns="0" bIns="0"/>
+          <a:lstStyle/>
+          <a:p>
+            <a:pPr algn="l"/>
+            <a:r>
+              <a:rPr sz="2400" b="0" i="0">
+                <a:solidFill>
+                  <a:srgbClr val="202122"/>
+                </a:solidFill>
+                <a:latin typeface="Calibri"/>
+              </a:rPr>
+              <a:t>What is spike testing?</a:t>
             </a:r>
           </a:p>
         </p:txBody>
@@ -10798,362 +13910,27 @@
         </p:nvSpPr>
         <p:spPr>
           <a:xfrm>
-            <a:off x="1143000" y="3218688"/>
-            <a:ext cx="5943600" cy="868680"/>
-          </a:xfrm>
-          <a:prstGeom prst="rect">
-            <a:avLst/>
-          </a:prstGeom>
-          <a:noFill/>
-        </p:spPr>
-        <p:txBody>
-          <a:bodyPr wrap="square" anchor="ctr" lIns="0" rIns="0" tIns="0" bIns="0"/>
+            <a:off x="548640" y="5852160"/>
+            <a:ext cx="11094415" cy="365760"/>
+          </a:xfrm>
+          <a:prstGeom prst="rect">
+            <a:avLst/>
+          </a:prstGeom>
+          <a:noFill/>
+        </p:spPr>
+        <p:txBody>
+          <a:bodyPr wrap="square" anchor="t" lIns="0" rIns="0" tIns="0" bIns="0"/>
           <a:lstStyle/>
           <a:p>
             <a:pPr algn="l"/>
             <a:r>
-              <a:rPr sz="1700" b="0" i="0">
-                <a:solidFill>
-                  <a:srgbClr val="202122"/>
-                </a:solidFill>
-                <a:latin typeface="Calibri"/>
-              </a:rPr>
-              <a:t>Turn them into functional requirements.</a:t>
-            </a:r>
-          </a:p>
-        </p:txBody>
-      </p:sp>
-      <p:sp>
-        <p:nvSpPr>
-          <p:cNvPr id="13" name="Oval 12"/>
-          <p:cNvSpPr/>
-          <p:nvPr/>
-        </p:nvSpPr>
-        <p:spPr>
-          <a:xfrm>
-            <a:off x="548640" y="4439412"/>
-            <a:ext cx="384048" cy="384048"/>
-          </a:xfrm>
-          <a:prstGeom prst="ellipse">
-            <a:avLst/>
-          </a:prstGeom>
-          <a:solidFill>
-            <a:srgbClr val="0645AD"/>
-          </a:solidFill>
-          <a:ln>
-            <a:noFill/>
-          </a:ln>
-          <a:effectLst/>
-        </p:spPr>
-        <p:style>
-          <a:lnRef idx="1">
-            <a:schemeClr val="accent1"/>
-          </a:lnRef>
-          <a:fillRef idx="3">
-            <a:schemeClr val="accent1"/>
-          </a:fillRef>
-          <a:effectRef idx="2">
-            <a:schemeClr val="accent1"/>
-          </a:effectRef>
-          <a:fontRef idx="minor">
-            <a:schemeClr val="lt1"/>
-          </a:fontRef>
-        </p:style>
-        <p:txBody>
-          <a:bodyPr rtlCol="0" anchor="ctr" lIns="0" rIns="0" tIns="0" bIns="0"/>
-          <a:lstStyle/>
-          <a:p>
-            <a:pPr algn="ctr"/>
-            <a:r>
-              <a:rPr sz="1300" b="1">
-                <a:solidFill>
-                  <a:srgbClr val="FFFFFF"/>
-                </a:solidFill>
-                <a:latin typeface="Calibri"/>
-              </a:rPr>
-              <a:t>3</a:t>
-            </a:r>
-          </a:p>
-        </p:txBody>
-      </p:sp>
-      <p:sp>
-        <p:nvSpPr>
-          <p:cNvPr id="14" name="TextBox 13"/>
-          <p:cNvSpPr txBox="1"/>
-          <p:nvPr/>
-        </p:nvSpPr>
-        <p:spPr>
-          <a:xfrm>
-            <a:off x="1143000" y="4197096"/>
-            <a:ext cx="5943600" cy="868680"/>
-          </a:xfrm>
-          <a:prstGeom prst="rect">
-            <a:avLst/>
-          </a:prstGeom>
-          <a:noFill/>
-        </p:spPr>
-        <p:txBody>
-          <a:bodyPr wrap="square" anchor="ctr" lIns="0" rIns="0" tIns="0" bIns="0"/>
-          <a:lstStyle/>
-          <a:p>
-            <a:pPr algn="l"/>
-            <a:r>
-              <a:rPr sz="1700" b="0" i="0">
-                <a:solidFill>
-                  <a:srgbClr val="202122"/>
-                </a:solidFill>
-                <a:latin typeface="Calibri"/>
-              </a:rPr>
-              <a:t>Add four non-functional requirements with measurable KPIs.</a:t>
-            </a:r>
-          </a:p>
-        </p:txBody>
-      </p:sp>
-      <p:sp>
-        <p:nvSpPr>
-          <p:cNvPr id="15" name="Oval 14"/>
-          <p:cNvSpPr/>
-          <p:nvPr/>
-        </p:nvSpPr>
-        <p:spPr>
-          <a:xfrm>
-            <a:off x="548640" y="5417820"/>
-            <a:ext cx="384048" cy="384048"/>
-          </a:xfrm>
-          <a:prstGeom prst="ellipse">
-            <a:avLst/>
-          </a:prstGeom>
-          <a:solidFill>
-            <a:srgbClr val="0645AD"/>
-          </a:solidFill>
-          <a:ln>
-            <a:noFill/>
-          </a:ln>
-          <a:effectLst/>
-        </p:spPr>
-        <p:style>
-          <a:lnRef idx="1">
-            <a:schemeClr val="accent1"/>
-          </a:lnRef>
-          <a:fillRef idx="3">
-            <a:schemeClr val="accent1"/>
-          </a:fillRef>
-          <a:effectRef idx="2">
-            <a:schemeClr val="accent1"/>
-          </a:effectRef>
-          <a:fontRef idx="minor">
-            <a:schemeClr val="lt1"/>
-          </a:fontRef>
-        </p:style>
-        <p:txBody>
-          <a:bodyPr rtlCol="0" anchor="ctr" lIns="0" rIns="0" tIns="0" bIns="0"/>
-          <a:lstStyle/>
-          <a:p>
-            <a:pPr algn="ctr"/>
-            <a:r>
-              <a:rPr sz="1300" b="1">
-                <a:solidFill>
-                  <a:srgbClr val="FFFFFF"/>
-                </a:solidFill>
-                <a:latin typeface="Calibri"/>
-              </a:rPr>
-              <a:t>4</a:t>
-            </a:r>
-          </a:p>
-        </p:txBody>
-      </p:sp>
-      <p:sp>
-        <p:nvSpPr>
-          <p:cNvPr id="16" name="TextBox 15"/>
-          <p:cNvSpPr txBox="1"/>
-          <p:nvPr/>
-        </p:nvSpPr>
-        <p:spPr>
-          <a:xfrm>
-            <a:off x="1143000" y="5175504"/>
-            <a:ext cx="5943600" cy="868680"/>
-          </a:xfrm>
-          <a:prstGeom prst="rect">
-            <a:avLst/>
-          </a:prstGeom>
-          <a:noFill/>
-        </p:spPr>
-        <p:txBody>
-          <a:bodyPr wrap="square" anchor="ctr" lIns="0" rIns="0" tIns="0" bIns="0"/>
-          <a:lstStyle/>
-          <a:p>
-            <a:pPr algn="l"/>
-            <a:r>
-              <a:rPr sz="1700" b="0" i="0">
-                <a:solidFill>
-                  <a:srgbClr val="202122"/>
-                </a:solidFill>
-                <a:latin typeface="Calibri"/>
-              </a:rPr>
-              <a:t>Write acceptance criteria for one user story.</a:t>
-            </a:r>
-          </a:p>
-        </p:txBody>
-      </p:sp>
-      <p:sp>
-        <p:nvSpPr>
-          <p:cNvPr id="17" name="Rounded Rectangle 16"/>
-          <p:cNvSpPr/>
-          <p:nvPr/>
-        </p:nvSpPr>
-        <p:spPr>
-          <a:xfrm>
-            <a:off x="7772400" y="1508760"/>
-            <a:ext cx="3867912" cy="4572000"/>
-          </a:xfrm>
-          <a:prstGeom prst="roundRect">
-            <a:avLst>
-              <a:gd name="adj" fmla="val 8000"/>
-            </a:avLst>
-          </a:prstGeom>
-          <a:solidFill>
-            <a:srgbClr val="EAF3FF"/>
-          </a:solidFill>
-          <a:ln>
-            <a:noFill/>
-          </a:ln>
-          <a:effectLst/>
-        </p:spPr>
-        <p:style>
-          <a:lnRef idx="1">
-            <a:schemeClr val="accent1"/>
-          </a:lnRef>
-          <a:fillRef idx="3">
-            <a:schemeClr val="accent1"/>
-          </a:fillRef>
-          <a:effectRef idx="2">
-            <a:schemeClr val="accent1"/>
-          </a:effectRef>
-          <a:fontRef idx="minor">
-            <a:schemeClr val="lt1"/>
-          </a:fontRef>
-        </p:style>
-        <p:txBody>
-          <a:bodyPr rtlCol="0" anchor="ctr"/>
-          <a:lstStyle/>
-          <a:p/>
-        </p:txBody>
-      </p:sp>
-      <p:sp>
-        <p:nvSpPr>
-          <p:cNvPr id="18" name="TextBox 17"/>
-          <p:cNvSpPr txBox="1"/>
-          <p:nvPr/>
-        </p:nvSpPr>
-        <p:spPr>
-          <a:xfrm>
-            <a:off x="8046720" y="1737360"/>
-            <a:ext cx="3291840" cy="365760"/>
-          </a:xfrm>
-          <a:prstGeom prst="rect">
-            <a:avLst/>
-          </a:prstGeom>
-          <a:noFill/>
-        </p:spPr>
-        <p:txBody>
-          <a:bodyPr wrap="square" anchor="t" lIns="0" rIns="0" tIns="0" bIns="0"/>
-          <a:lstStyle/>
-          <a:p>
-            <a:pPr algn="l"/>
-            <a:r>
-              <a:rPr sz="1300" b="1" i="0">
-                <a:solidFill>
-                  <a:srgbClr val="0645AD"/>
-                </a:solidFill>
-                <a:latin typeface="Calibri"/>
-              </a:rPr>
-              <a:t>SUCCESS CRITERIA</a:t>
-            </a:r>
-          </a:p>
-        </p:txBody>
-      </p:sp>
-      <p:sp>
-        <p:nvSpPr>
-          <p:cNvPr id="19" name="TextBox 18"/>
-          <p:cNvSpPr txBox="1"/>
-          <p:nvPr/>
-        </p:nvSpPr>
-        <p:spPr>
-          <a:xfrm>
-            <a:off x="8046720" y="2240280"/>
-            <a:ext cx="3337560" cy="3657600"/>
-          </a:xfrm>
-          <a:prstGeom prst="rect">
-            <a:avLst/>
-          </a:prstGeom>
-          <a:noFill/>
-        </p:spPr>
-        <p:txBody>
-          <a:bodyPr wrap="square" lIns="0" rIns="0" tIns="0" bIns="0">
-            <a:spAutoFit/>
-          </a:bodyPr>
-          <a:lstStyle/>
-          <a:p>
-            <a:pPr marL="274320" indent="-274320">
-              <a:spcAft>
-                <a:spcPts val="810"/>
-              </a:spcAft>
-              <a:buClr>
-                <a:srgbClr val="0645AD"/>
-              </a:buClr>
-              <a:buFont typeface="Arial"/>
-              <a:buChar char="•"/>
-            </a:pPr>
-            <a:r>
-              <a:rPr sz="1800" b="0">
-                <a:solidFill>
-                  <a:srgbClr val="202122"/>
-                </a:solidFill>
-                <a:latin typeface="Calibri"/>
-              </a:rPr>
-              <a:t>Stories follow 'As a... I want... so that...'</a:t>
-            </a:r>
-          </a:p>
-          <a:p>
-            <a:pPr marL="274320" indent="-274320">
-              <a:spcAft>
-                <a:spcPts val="810"/>
-              </a:spcAft>
-              <a:buClr>
-                <a:srgbClr val="0645AD"/>
-              </a:buClr>
-              <a:buFont typeface="Arial"/>
-              <a:buChar char="•"/>
-            </a:pPr>
-            <a:r>
-              <a:rPr sz="1800" b="0">
-                <a:solidFill>
-                  <a:srgbClr val="202122"/>
-                </a:solidFill>
-                <a:latin typeface="Calibri"/>
-              </a:rPr>
-              <a:t>KPIs are measurable</a:t>
-            </a:r>
-          </a:p>
-          <a:p>
-            <a:pPr marL="274320" indent="-274320">
-              <a:spcAft>
-                <a:spcPts val="810"/>
-              </a:spcAft>
-              <a:buClr>
-                <a:srgbClr val="0645AD"/>
-              </a:buClr>
-              <a:buFont typeface="Arial"/>
-              <a:buChar char="•"/>
-            </a:pPr>
-            <a:r>
-              <a:rPr sz="1800" b="0">
-                <a:solidFill>
-                  <a:srgbClr val="202122"/>
-                </a:solidFill>
-                <a:latin typeface="Calibri"/>
-              </a:rPr>
-              <a:t>Security and accessibility included</a:t>
+              <a:rPr sz="1300" b="0" i="1">
+                <a:solidFill>
+                  <a:srgbClr val="54595D"/>
+                </a:solidFill>
+                <a:latin typeface="Calibri"/>
+              </a:rPr>
+              <a:t>Answer on mini whiteboards or in your book. Answers are in the speaker notes.</a:t>
             </a:r>
           </a:p>
         </p:txBody>
